--- a/Docs/수성록_최종결과보고_초안.pptx
+++ b/Docs/수성록_최종결과보고_초안.pptx
@@ -4,6 +4,9 @@
   <p:sldMasterIdLst>
     <p:sldMasterId id="2147483648" r:id="rId1"/>
   </p:sldMasterIdLst>
+  <p:notesMasterIdLst>
+    <p:notesMasterId r:id="rId24"/>
+  </p:notesMasterIdLst>
   <p:sldIdLst>
     <p:sldId id="256" r:id="rId2"/>
     <p:sldId id="257" r:id="rId3"/>
@@ -28,9 +31,6 @@
     <p:sldId id="276" r:id="rId22"/>
     <p:sldId id="277" r:id="rId23"/>
   </p:sldIdLst>
-  <p:notesMasterIdLst>
-    <p:notesMasterId r:id="rId24"/>
-  </p:notesMasterIdLst>
   <p:sldSz cx="12192000" cy="6858000"/>
   <p:notesSz cx="6858000" cy="12192000"/>
   <p:defaultTextStyle>
@@ -125,6 +125,11 @@
       </a:defRPr>
     </a:lvl9pPr>
   </p:defaultTextStyle>
+  <p:extLst>
+    <p:ext uri="{EFAFB233-063F-42B5-8137-9DF3F51BA10A}">
+      <p15:sldGuideLst xmlns:p15="http://schemas.microsoft.com/office/powerpoint/2012/main"/>
+    </p:ext>
+  </p:extLst>
 </p:presentation>
 </file>
 
@@ -150,240 +155,16 @@
           <a:chExt cx="0" cy="0"/>
         </a:xfrm>
       </p:grpSpPr>
-      <p:sp>
-        <p:nvSpPr>
-          <p:cNvPr id="2" name="Header Placeholder 1"/>
-          <p:cNvSpPr>
-            <a:spLocks noGrp="1"/>
-          </p:cNvSpPr>
-          <p:nvPr>
-            <p:ph type="hdr" sz="quarter"/>
-          </p:nvPr>
-        </p:nvSpPr>
-        <p:spPr>
-          <a:xfrm>
-            <a:off x="0" y="0"/>
-            <a:ext cx="2971800" cy="458788"/>
-          </a:xfrm>
-          <a:prstGeom prst="rect">
-            <a:avLst/>
-          </a:prstGeom>
-        </p:spPr>
-        <p:txBody>
-          <a:bodyPr vert="horz" lIns="91440" tIns="45720" rIns="91440" bIns="45720" rtlCol="0"/>
-          <a:lstStyle>
-            <a:lvl1pPr algn="l">
-              <a:defRPr sz="1200"/>
-            </a:lvl1pPr>
-          </a:lstStyle>
-          <a:p>
-            <a:endParaRPr lang="en-US"/>
-          </a:p>
-        </p:txBody>
-      </p:sp>
-      <p:sp>
-        <p:nvSpPr>
-          <p:cNvPr id="3" name="Date Placeholder 2"/>
-          <p:cNvSpPr>
-            <a:spLocks noGrp="1"/>
-          </p:cNvSpPr>
-          <p:nvPr>
-            <p:ph type="dt" idx="1"/>
-          </p:nvPr>
-        </p:nvSpPr>
-        <p:spPr>
-          <a:xfrm>
-            <a:off x="3884613" y="0"/>
-            <a:ext cx="2971800" cy="458788"/>
-          </a:xfrm>
-          <a:prstGeom prst="rect">
-            <a:avLst/>
-          </a:prstGeom>
-        </p:spPr>
-        <p:txBody>
-          <a:bodyPr vert="horz" lIns="91440" tIns="45720" rIns="91440" bIns="45720" rtlCol="0"/>
-          <a:lstStyle>
-            <a:lvl1pPr algn="r">
-              <a:defRPr sz="1200"/>
-            </a:lvl1pPr>
-          </a:lstStyle>
-          <a:p>
-            <a:fld id="{5282F153-3F37-0F45-9E97-73ACFA13230C}" type="datetimeFigureOut">
-              <a:rPr lang="en-US"/>
-              <a:t>7/23/19</a:t>
-            </a:fld>
-            <a:endParaRPr lang="en-US"/>
-          </a:p>
-        </p:txBody>
-      </p:sp>
-      <p:sp>
-        <p:nvSpPr>
-          <p:cNvPr id="4" name="Slide Image Placeholder 3"/>
-          <p:cNvSpPr>
-            <a:spLocks noGrp="1" noRot="1" noChangeAspect="1"/>
-          </p:cNvSpPr>
-          <p:nvPr>
-            <p:ph type="sldImg" idx="2"/>
-          </p:nvPr>
-        </p:nvSpPr>
-        <p:spPr>
-          <a:xfrm>
-            <a:off x="685800" y="1143000"/>
-            <a:ext cx="5486400" cy="3086100"/>
-          </a:xfrm>
-          <a:prstGeom prst="rect">
-            <a:avLst/>
-          </a:prstGeom>
-          <a:noFill/>
-          <a:ln w="12700">
-            <a:solidFill>
-              <a:prstClr val="black"/>
-            </a:solidFill>
-          </a:ln>
-        </p:spPr>
-        <p:txBody>
-          <a:bodyPr vert="horz" lIns="91440" tIns="45720" rIns="91440" bIns="45720" rtlCol="0" anchor="ctr"/>
-          <a:lstStyle/>
-          <a:p>
-            <a:endParaRPr lang="en-US"/>
-          </a:p>
-        </p:txBody>
-      </p:sp>
-      <p:sp>
-        <p:nvSpPr>
-          <p:cNvPr id="5" name="Notes Placeholder 4"/>
-          <p:cNvSpPr>
-            <a:spLocks noGrp="1"/>
-          </p:cNvSpPr>
-          <p:nvPr>
-            <p:ph type="body" sz="quarter" idx="3"/>
-          </p:nvPr>
-        </p:nvSpPr>
-        <p:spPr>
-          <a:xfrm>
-            <a:off x="685800" y="4400550"/>
-            <a:ext cx="5486400" cy="3600450"/>
-          </a:xfrm>
-          <a:prstGeom prst="rect">
-            <a:avLst/>
-          </a:prstGeom>
-        </p:spPr>
-        <p:txBody>
-          <a:bodyPr vert="horz" lIns="91440" tIns="45720" rIns="91440" bIns="45720" rtlCol="0"/>
-          <a:lstStyle/>
-          <a:p>
-            <a:pPr lvl="0"/>
-            <a:r>
-              <a:rPr lang="en-US"/>
-              <a:t>Click to edit Master text styles</a:t>
-            </a:r>
-          </a:p>
-          <a:p>
-            <a:pPr lvl="1"/>
-            <a:r>
-              <a:rPr lang="en-US"/>
-              <a:t>Second level</a:t>
-            </a:r>
-          </a:p>
-          <a:p>
-            <a:pPr lvl="2"/>
-            <a:r>
-              <a:rPr lang="en-US"/>
-              <a:t>Third level</a:t>
-            </a:r>
-          </a:p>
-          <a:p>
-            <a:pPr lvl="3"/>
-            <a:r>
-              <a:rPr lang="en-US"/>
-              <a:t>Fourth level</a:t>
-            </a:r>
-          </a:p>
-          <a:p>
-            <a:pPr lvl="4"/>
-            <a:r>
-              <a:rPr lang="en-US"/>
-              <a:t>Fifth level</a:t>
-            </a:r>
-          </a:p>
-        </p:txBody>
-      </p:sp>
-      <p:sp>
-        <p:nvSpPr>
-          <p:cNvPr id="6" name="Footer Placeholder 5"/>
-          <p:cNvSpPr>
-            <a:spLocks noGrp="1"/>
-          </p:cNvSpPr>
-          <p:nvPr>
-            <p:ph type="ftr" sz="quarter" idx="4"/>
-          </p:nvPr>
-        </p:nvSpPr>
-        <p:spPr>
-          <a:xfrm>
-            <a:off x="0" y="8685213"/>
-            <a:ext cx="2971800" cy="458787"/>
-          </a:xfrm>
-          <a:prstGeom prst="rect">
-            <a:avLst/>
-          </a:prstGeom>
-        </p:spPr>
-        <p:txBody>
-          <a:bodyPr vert="horz" lIns="91440" tIns="45720" rIns="91440" bIns="45720" rtlCol="0" anchor="b"/>
-          <a:lstStyle>
-            <a:lvl1pPr algn="l">
-              <a:defRPr sz="1200"/>
-            </a:lvl1pPr>
-          </a:lstStyle>
-          <a:p>
-            <a:endParaRPr lang="en-US"/>
-          </a:p>
-        </p:txBody>
-      </p:sp>
-      <p:sp>
-        <p:nvSpPr>
-          <p:cNvPr id="7" name="Slide Number Placeholder 6"/>
-          <p:cNvSpPr>
-            <a:spLocks noGrp="1"/>
-          </p:cNvSpPr>
-          <p:nvPr>
-            <p:ph type="sldNum" sz="quarter" idx="5"/>
-          </p:nvPr>
-        </p:nvSpPr>
-        <p:spPr>
-          <a:xfrm>
-            <a:off x="3884613" y="8685213"/>
-            <a:ext cx="2971800" cy="458787"/>
-          </a:xfrm>
-          <a:prstGeom prst="rect">
-            <a:avLst/>
-          </a:prstGeom>
-        </p:spPr>
-        <p:txBody>
-          <a:bodyPr vert="horz" lIns="91440" tIns="45720" rIns="91440" bIns="45720" rtlCol="0" anchor="b"/>
-          <a:lstStyle>
-            <a:lvl1pPr algn="r">
-              <a:defRPr sz="1200"/>
-            </a:lvl1pPr>
-          </a:lstStyle>
-          <a:p>
-            <a:fld id="{CE5E9CC1-C706-0F49-92D6-E571CC5EEA8F}" type="slidenum">
-              <a:rPr lang="en-US"/>
-              <a:t>‹#›</a:t>
-            </a:fld>
-            <a:endParaRPr lang="en-US"/>
-          </a:p>
-        </p:txBody>
-      </p:sp>
     </p:spTree>
     <p:extLst>
       <p:ext uri="{BB962C8B-B14F-4D97-AF65-F5344CB8AC3E}">
-        <p14:creationId xmlns:p14="http://schemas.microsoft.com/office/powerpoint/2010/main" val="1024086991"/>
+        <p14:creationId xmlns:p14="http://schemas.microsoft.com/office/powerpoint/2010/main" val="794443701"/>
       </p:ext>
     </p:extLst>
   </p:cSld>
   <p:clrMap bg1="lt1" tx1="dk1" bg2="lt2" tx2="dk2" accent1="accent1" accent2="accent2" accent3="accent3" accent4="accent4" accent5="accent5" accent6="accent6" hlink="hlink" folHlink="folHlink"/>
   <p:notesStyle>
-    <a:lvl1pPr marL="0" algn="l" defTabSz="914400" rtl="0" eaLnBrk="1" latinLnBrk="0" hangingPunct="1">
+    <a:lvl1pPr marL="0" algn="l" defTabSz="914400" rtl="0" eaLnBrk="1" latinLnBrk="1" hangingPunct="1">
       <a:defRPr sz="1200" kern="1200">
         <a:solidFill>
           <a:schemeClr val="tx1"/>
@@ -393,7 +174,7 @@
         <a:cs typeface="+mn-cs"/>
       </a:defRPr>
     </a:lvl1pPr>
-    <a:lvl2pPr marL="457200" algn="l" defTabSz="914400" rtl="0" eaLnBrk="1" latinLnBrk="0" hangingPunct="1">
+    <a:lvl2pPr marL="457200" algn="l" defTabSz="914400" rtl="0" eaLnBrk="1" latinLnBrk="1" hangingPunct="1">
       <a:defRPr sz="1200" kern="1200">
         <a:solidFill>
           <a:schemeClr val="tx1"/>
@@ -403,7 +184,7 @@
         <a:cs typeface="+mn-cs"/>
       </a:defRPr>
     </a:lvl2pPr>
-    <a:lvl3pPr marL="914400" algn="l" defTabSz="914400" rtl="0" eaLnBrk="1" latinLnBrk="0" hangingPunct="1">
+    <a:lvl3pPr marL="914400" algn="l" defTabSz="914400" rtl="0" eaLnBrk="1" latinLnBrk="1" hangingPunct="1">
       <a:defRPr sz="1200" kern="1200">
         <a:solidFill>
           <a:schemeClr val="tx1"/>
@@ -413,7 +194,7 @@
         <a:cs typeface="+mn-cs"/>
       </a:defRPr>
     </a:lvl3pPr>
-    <a:lvl4pPr marL="1371600" algn="l" defTabSz="914400" rtl="0" eaLnBrk="1" latinLnBrk="0" hangingPunct="1">
+    <a:lvl4pPr marL="1371600" algn="l" defTabSz="914400" rtl="0" eaLnBrk="1" latinLnBrk="1" hangingPunct="1">
       <a:defRPr sz="1200" kern="1200">
         <a:solidFill>
           <a:schemeClr val="tx1"/>
@@ -423,7 +204,7 @@
         <a:cs typeface="+mn-cs"/>
       </a:defRPr>
     </a:lvl4pPr>
-    <a:lvl5pPr marL="1828800" algn="l" defTabSz="914400" rtl="0" eaLnBrk="1" latinLnBrk="0" hangingPunct="1">
+    <a:lvl5pPr marL="1828800" algn="l" defTabSz="914400" rtl="0" eaLnBrk="1" latinLnBrk="1" hangingPunct="1">
       <a:defRPr sz="1200" kern="1200">
         <a:solidFill>
           <a:schemeClr val="tx1"/>
@@ -433,7 +214,7 @@
         <a:cs typeface="+mn-cs"/>
       </a:defRPr>
     </a:lvl5pPr>
-    <a:lvl6pPr marL="2286000" algn="l" defTabSz="914400" rtl="0" eaLnBrk="1" latinLnBrk="0" hangingPunct="1">
+    <a:lvl6pPr marL="2286000" algn="l" defTabSz="914400" rtl="0" eaLnBrk="1" latinLnBrk="1" hangingPunct="1">
       <a:defRPr sz="1200" kern="1200">
         <a:solidFill>
           <a:schemeClr val="tx1"/>
@@ -443,7 +224,7 @@
         <a:cs typeface="+mn-cs"/>
       </a:defRPr>
     </a:lvl6pPr>
-    <a:lvl7pPr marL="2743200" algn="l" defTabSz="914400" rtl="0" eaLnBrk="1" latinLnBrk="0" hangingPunct="1">
+    <a:lvl7pPr marL="2743200" algn="l" defTabSz="914400" rtl="0" eaLnBrk="1" latinLnBrk="1" hangingPunct="1">
       <a:defRPr sz="1200" kern="1200">
         <a:solidFill>
           <a:schemeClr val="tx1"/>
@@ -453,7 +234,7 @@
         <a:cs typeface="+mn-cs"/>
       </a:defRPr>
     </a:lvl7pPr>
-    <a:lvl8pPr marL="3200400" algn="l" defTabSz="914400" rtl="0" eaLnBrk="1" latinLnBrk="0" hangingPunct="1">
+    <a:lvl8pPr marL="3200400" algn="l" defTabSz="914400" rtl="0" eaLnBrk="1" latinLnBrk="1" hangingPunct="1">
       <a:defRPr sz="1200" kern="1200">
         <a:solidFill>
           <a:schemeClr val="tx1"/>
@@ -463,7 +244,7 @@
         <a:cs typeface="+mn-cs"/>
       </a:defRPr>
     </a:lvl8pPr>
-    <a:lvl9pPr marL="3657600" algn="l" defTabSz="914400" rtl="0" eaLnBrk="1" latinLnBrk="0" hangingPunct="1">
+    <a:lvl9pPr marL="3657600" algn="l" defTabSz="914400" rtl="0" eaLnBrk="1" latinLnBrk="1" hangingPunct="1">
       <a:defRPr sz="1200" kern="1200">
         <a:solidFill>
           <a:schemeClr val="tx1"/>
@@ -525,7 +306,6 @@
               <a:rPr lang="en-US" dirty="0"/>
               <a:t>안녕하세요. 타워디펜스와 도시건설을 결합한 싱글플레이 전략 게임 "수성록(Tower and Dragons)" 최종 결과 보고를 시작하겠습니다. 3팀 발표를 맡은 OOO입니다.</a:t>
             </a:r>
-            <a:endParaRPr lang="en-US" dirty="0"/>
           </a:p>
         </p:txBody>
       </p:sp>
@@ -613,7 +393,6 @@
               <a:rPr lang="en-US" dirty="0"/>
               <a:t>인구는 이 게임에서 가장 많이 만졌던 시스템입니다. 처음에는 단순히 모으면 좋은 자원이었는데, 그러면 최적해가 하나로 수렴해 버립니다. 식량 유지비를 붙여 "늘리는 것 자체에 비용이 든다"로 바꾸면서 배분 고민이 실제로 살아났습니다.</a:t>
             </a:r>
-            <a:endParaRPr lang="en-US" dirty="0"/>
           </a:p>
         </p:txBody>
       </p:sp>
@@ -701,7 +480,6 @@
               <a:rPr lang="en-US" dirty="0"/>
               <a:t>용은 저희 게임의 얼굴입니다. 어미용은 판을 통째로 뒤집는 광역 효과를, 새끼용은 특정 지역의 한계를 풀어주는 거점 버퍼를 담당합니다. 중요한 건 새끼용이 인구가 아니라 슬라임을 먹는다는 점인데, 덕분에 인구 배분과 독립된 별도의 운영 고민이 생깁니다.</a:t>
             </a:r>
-            <a:endParaRPr lang="en-US" dirty="0"/>
           </a:p>
         </p:txBody>
       </p:sp>
@@ -789,7 +567,6 @@
               <a:rPr lang="en-US" dirty="0"/>
               <a:t>타워 파괴를 비활성화로 바꾼 것이 이번 프로젝트에서 체감이 가장 컸던 설계 변경입니다. 원래는 밤에 한 번 뚫리면 그대로 게임이 끝나버리는 느낌이었는데, 비활성화 + 충원율 구조로 바꾸면서 실패가 다시 인구 배분 고민으로 되돌아오게 됐습니다.</a:t>
             </a:r>
-            <a:endParaRPr lang="en-US" dirty="0"/>
           </a:p>
         </p:txBody>
       </p:sp>
@@ -877,7 +654,6 @@
               <a:rPr lang="en-US" dirty="0"/>
               <a:t>점령은 "넓히면 무조건 이득"이 되면 안 되는 시스템입니다. 그래서 점령할수록 적이 강해지게 했는데, 처음에 스탯 배율로 처리하니 곱연산이 겹쳐 난이도가 폭발했습니다. 추가 스폰 방식으로 바꾸면서 난이도 상승이 예측 가능한 선형에 가까워졌습니다.</a:t>
             </a:r>
-            <a:endParaRPr lang="en-US" dirty="0"/>
           </a:p>
         </p:txBody>
       </p:sp>
@@ -965,7 +741,6 @@
               <a:rPr lang="en-US" dirty="0"/>
               <a:t>연구와 용 스킬트리를 굳이 분리한 이유를 강조하고 싶습니다. 하나의 포인트로 합치면 결국 효율 좋은 쪽만 찍게 되어 빌드 다양성이 사라집니다. 재화 자체를 분리해 두 축을 병렬로 키우게 만들었습니다.</a:t>
             </a:r>
-            <a:endParaRPr lang="en-US" dirty="0"/>
           </a:p>
         </p:txBody>
       </p:sp>
@@ -1053,7 +828,6 @@
               <a:rPr lang="en-US" dirty="0"/>
               <a:t>네 명이 한 프로젝트를 만지면서 충돌 없이 굴러가게 하려면 규칙이 먼저 필요했습니다. CLAUDE.md 한 문서에 커밋 규칙부터 이벤트 초기화 순서까지 모아두고, 사람과 AI 에이전트가 같은 문서를 보고 작업하게 했습니다.</a:t>
             </a:r>
-            <a:endParaRPr lang="en-US" dirty="0"/>
           </a:p>
         </p:txBody>
       </p:sp>
@@ -1141,7 +915,6 @@
               <a:rPr lang="en-US" dirty="0"/>
               <a:t>알파 이후에는 새 기능보다 완성도에 집중했습니다. 특히 이 게임은 규칙이 많아서, 튜토리얼과 가이드 퀘스트 없이는 처음 플레이하는 사람이 무엇을 해야 할지 알기 어려웠습니다.</a:t>
             </a:r>
-            <a:endParaRPr lang="en-US" dirty="0"/>
           </a:p>
         </p:txBody>
       </p:sp>
@@ -1229,7 +1002,6 @@
               <a:rPr lang="en-US" dirty="0"/>
               <a:t>수치는 실제 게임 데이터 에셋을 집계한 값입니다. 타워 13종, 몬스터 34종, 용 스킬트리 70노드가 핵심이고, 여기에 28일 웨이브와 38개 연구 노드가 붙습니다. 콘텐츠 양보다 중요한 건 이것들이 전부 데이터 에셋으로 분리돼 있어 코드 수정 없이 추가·조정이 가능하다는 점입니다.</a:t>
             </a:r>
-            <a:endParaRPr lang="en-US" dirty="0"/>
           </a:p>
         </p:txBody>
       </p:sp>
@@ -1317,7 +1089,6 @@
               <a:rPr lang="en-US" dirty="0"/>
               <a:t>기획을 그대로 밀어붙이지 않고 실제 플레이 피드백에 따라 덜어낸 부분입니다. 공통점은 "복잡하지만 고민할 가치는 없던 것"과 "한 번 실패하면 회복이 불가능하던 것"을 걷어냈다는 점입니다.</a:t>
             </a:r>
-            <a:endParaRPr lang="en-US" dirty="0"/>
           </a:p>
         </p:txBody>
       </p:sp>
@@ -1405,7 +1176,6 @@
               <a:rPr lang="en-US" dirty="0"/>
               <a:t>[영상 삽입 필요] 5~10분 분량, 100MB 이하, 기능별 소개 음성 포함. 별도 파일 제출도 가능하므로 용량 초과 시 분리 제출을 검토합니다.</a:t>
             </a:r>
-            <a:endParaRPr lang="en-US" dirty="0"/>
           </a:p>
         </p:txBody>
       </p:sp>
@@ -1493,7 +1263,6 @@
               <a:rPr lang="en-US" dirty="0"/>
               <a:t>발표는 다섯 장으로 구성됩니다. 개요와 팀 구성, 수행 절차를 먼저 짚고, 네 번째 장인 수행 경과에서 실제 구현한 핵심 기능과 성과를 집중적으로 다루겠습니다.</a:t>
             </a:r>
-            <a:endParaRPr lang="en-US" dirty="0"/>
           </a:p>
         </p:txBody>
       </p:sp>
@@ -1581,7 +1350,6 @@
               <a:rPr lang="en-US" dirty="0"/>
               <a:t>점수는 팀 내부 합의로 8.5점을 매겼습니다. 핵심 루프가 전부 붙어 있고 완주가 가능하다는 점은 자신 있게 말씀드릴 수 있지만, 아직 마감하지 못한 공백이 명확히 남아 있어 그것까지 감안한 점수입니다.</a:t>
             </a:r>
-            <a:endParaRPr lang="en-US" dirty="0"/>
           </a:p>
         </p:txBody>
       </p:sp>
@@ -1669,7 +1437,6 @@
               <a:rPr lang="en-US" dirty="0"/>
               <a:t>[발표 전 반드시 채울 것] 팀원별 느낀 점을 각자 1~2문장으로 작성합니다. 구체적인 경험(어떤 시스템을 만들며 무엇을 배웠는지)이 들어가야 설득력이 있습니다.</a:t>
             </a:r>
-            <a:endParaRPr lang="en-US" dirty="0"/>
           </a:p>
         </p:txBody>
       </p:sp>
@@ -1757,7 +1524,6 @@
               <a:rPr lang="en-US" dirty="0"/>
               <a:t>예상 질문: ① 왜 멀티가 아니라 싱글인가 ② 밸런스는 어떻게 검증했는가 ③ 남은 공백은 언제까지 마감할 것인가 ④ AI 도구를 어디까지 활용했는가</a:t>
             </a:r>
-            <a:endParaRPr lang="en-US" dirty="0"/>
           </a:p>
         </p:txBody>
       </p:sp>
@@ -1845,7 +1611,6 @@
               <a:rPr lang="en-US" dirty="0"/>
               <a:t>타워디펜스에 도시건설을 결합한 싱글플레이 전략 게임입니다. 한 줄 컨셉은 "낮의 선택이 밤의 생존을 결정한다"입니다. 낮에 한정된 자원을 어디에 투자하느냐가 그날 밤의 결과로 그대로 돌아오는 구조를 장르 문법으로 잡았습니다.</a:t>
             </a:r>
-            <a:endParaRPr lang="en-US" dirty="0"/>
           </a:p>
         </p:txBody>
       </p:sp>
@@ -1933,7 +1698,6 @@
               <a:rPr lang="en-US" dirty="0"/>
               <a:t>차별화는 세 가지입니다. 용, 인구, 확장. 중요한 건 이 셋이 따로 노는 기능이 아니라 서로 물려 있다는 점입니다. 확장하면 인구를 얻지만 적도 늘고, 그 인구를 방어에 넣으면 생산이 줄고, 용은 그 균형을 흔드는 별도 카드로 작동합니다.</a:t>
             </a:r>
-            <a:endParaRPr lang="en-US" dirty="0"/>
           </a:p>
         </p:txBody>
       </p:sp>
@@ -2021,7 +1785,6 @@
               <a:rPr lang="en-US" dirty="0"/>
               <a:t>역할 구분은 실제 Git 이력을 분석해 정리했습니다. 네 명이 각각 인프라, UI, 낮 운영, 밤 전투로 영역을 나눠 맡았고, 겹치는 구역은 씬과 건물 스크립트 정도로 한정됩니다.</a:t>
             </a:r>
-            <a:endParaRPr lang="en-US" dirty="0"/>
           </a:p>
         </p:txBody>
       </p:sp>
@@ -2109,7 +1872,6 @@
               <a:rPr lang="en-US" dirty="0"/>
               <a:t>기여도는 감이 아니라 Git 이력을 실제로 집계해 정리했습니다. 주목할 점은 전담 디렉터리 점유율이 대부분 70%를 넘는다는 것입니다. 담당 경계가 명확했다는 뜻이고, 그래서 네 명이 동시에 작업해도 충돌이 씬과 건물 스크립트 정도로 한정됐습니다. 커밋 수 자체는 기여량이 아닙니다 — 데이터 에셋을 다루면 늘고 스크립트를 깊게 파면 줄어들기 때문에, 커밋 수보다 전담 영역을 함께 보셔야 합니다.</a:t>
             </a:r>
-            <a:endParaRPr lang="en-US" dirty="0"/>
           </a:p>
         </p:txBody>
       </p:sp>
@@ -2197,7 +1959,6 @@
               <a:rPr lang="en-US" dirty="0"/>
               <a:t>9주 일정을 사전 기획 → 설계 → 프로토타입 → 알파 → 베타 → 폴리싱의 6단계로 나눴습니다. 특히 매주 빌드를 끊고 빌드 결과 보고서를 남겨, 다음 주 작업 우선순위를 문서로 확정하는 방식으로 진행했습니다.</a:t>
             </a:r>
-            <a:endParaRPr lang="en-US" dirty="0"/>
           </a:p>
         </p:txBody>
       </p:sp>
@@ -2285,7 +2046,6 @@
               <a:rPr lang="en-US" dirty="0"/>
               <a:t>이제부터 실제로 무엇을 구현했는지 시스템 단위로 말씀드리겠습니다.</a:t>
             </a:r>
-            <a:endParaRPr lang="en-US" dirty="0"/>
           </a:p>
         </p:txBody>
       </p:sp>
@@ -2373,7 +2133,6 @@
               <a:rPr lang="en-US" dirty="0"/>
               <a:t>가장 먼저 잡은 것이 이 루프입니다. 낮에는 시간 제한을 두지 않아 충분히 고민하게 하고, 대신 밤에는 개입 여지를 줄여 낮의 선택이 그대로 결과로 드러나게 했습니다. 28일 4주기 동안 포탈이 하나씩 늘어나며 난이도가 계단식으로 올라갑니다.</a:t>
             </a:r>
-            <a:endParaRPr lang="en-US" dirty="0"/>
           </a:p>
         </p:txBody>
       </p:sp>
@@ -2446,6 +2205,11 @@
 <file path=ppt/slideMasters/slideMaster1.xml><?xml version="1.0" encoding="utf-8"?>
 <p:sldMaster xmlns:a="http://schemas.openxmlformats.org/drawingml/2006/main" xmlns:r="http://schemas.openxmlformats.org/officeDocument/2006/relationships" xmlns:p="http://schemas.openxmlformats.org/presentationml/2006/main">
   <p:cSld>
+    <p:bg>
+      <p:bgRef idx="1001">
+        <a:schemeClr val="bg1"/>
+      </p:bgRef>
+    </p:bg>
     <p:spTree>
       <p:nvGrpSpPr>
         <p:cNvPr id="1" name=""/>
@@ -2728,6 +2492,7 @@
         <a:solidFill>
           <a:srgbClr val="FFFFFF"/>
         </a:solidFill>
+        <a:effectLst/>
       </p:bgPr>
     </p:bg>
     <p:spTree>
@@ -2765,7 +2530,7 @@
           <a:bodyPr wrap="square" lIns="0" tIns="0" rIns="0" bIns="0" rtlCol="0" anchor="ctr"/>
           <a:lstStyle/>
           <a:p>
-            <a:pPr indent="0" marL="0">
+            <a:pPr marL="0" indent="0">
               <a:buNone/>
             </a:pPr>
             <a:r>
@@ -2804,7 +2569,7 @@
           <a:bodyPr wrap="square" lIns="0" tIns="0" rIns="0" bIns="0" rtlCol="0" anchor="ctr"/>
           <a:lstStyle/>
           <a:p>
-            <a:pPr indent="0" marL="0">
+            <a:pPr marL="0" indent="0">
               <a:buNone/>
             </a:pPr>
             <a:r>
@@ -2843,7 +2608,7 @@
           <a:bodyPr wrap="square" lIns="0" tIns="0" rIns="0" bIns="0" rtlCol="0" anchor="ctr"/>
           <a:lstStyle/>
           <a:p>
-            <a:pPr indent="0" marL="0">
+            <a:pPr marL="0" indent="0">
               <a:buNone/>
             </a:pPr>
             <a:r>
@@ -2857,9 +2622,6 @@
               </a:rPr>
               <a:t>수성록 </a:t>
             </a:r>
-            <a:pPr indent="0" marL="0">
-              <a:buNone/>
-            </a:pPr>
             <a:r>
               <a:rPr lang="en-US" sz="4800" b="1" dirty="0">
                 <a:solidFill>
@@ -2896,7 +2658,7 @@
           <a:bodyPr wrap="square" lIns="0" tIns="0" rIns="0" bIns="0" rtlCol="0" anchor="ctr"/>
           <a:lstStyle/>
           <a:p>
-            <a:pPr indent="0" marL="0">
+            <a:pPr marL="0" indent="0">
               <a:buNone/>
             </a:pPr>
             <a:r>
@@ -2935,7 +2697,7 @@
           <a:bodyPr wrap="square" lIns="0" tIns="0" rIns="0" bIns="0" rtlCol="0" anchor="ctr"/>
           <a:lstStyle/>
           <a:p>
-            <a:pPr indent="0" marL="0">
+            <a:pPr marL="0" indent="0">
               <a:buNone/>
             </a:pPr>
             <a:r>
@@ -2974,7 +2736,7 @@
           <a:bodyPr wrap="square" lIns="0" tIns="0" rIns="0" bIns="0" rtlCol="0" anchor="ctr"/>
           <a:lstStyle/>
           <a:p>
-            <a:pPr indent="0" marL="0">
+            <a:pPr marL="0" indent="0">
               <a:buNone/>
             </a:pPr>
             <a:r>
@@ -2991,7 +2753,7 @@
             <a:endParaRPr lang="en-US" sz="1400" dirty="0"/>
           </a:p>
           <a:p>
-            <a:pPr indent="0" marL="0">
+            <a:pPr marL="0" indent="0">
               <a:buNone/>
             </a:pPr>
             <a:r>
@@ -3030,7 +2792,7 @@
           <a:bodyPr wrap="square" lIns="0" tIns="0" rIns="0" bIns="0" rtlCol="0" anchor="ctr"/>
           <a:lstStyle/>
           <a:p>
-            <a:pPr indent="0" marL="0">
+            <a:pPr marL="0" indent="0">
               <a:buNone/>
             </a:pPr>
             <a:r>
@@ -3069,7 +2831,7 @@
           <a:bodyPr wrap="square" lIns="0" tIns="0" rIns="0" bIns="0" rtlCol="0" anchor="ctr"/>
           <a:lstStyle/>
           <a:p>
-            <a:pPr algn="r" indent="0" marL="0">
+            <a:pPr marL="0" indent="0" algn="r">
               <a:buNone/>
             </a:pPr>
             <a:r>
@@ -3103,6 +2865,7 @@
         <a:solidFill>
           <a:srgbClr val="FFFFFF"/>
         </a:solidFill>
+        <a:effectLst/>
       </p:bgPr>
     </p:bg>
     <p:spTree>
@@ -3140,7 +2903,7 @@
           <a:bodyPr wrap="square" lIns="0" tIns="0" rIns="0" bIns="0" rtlCol="0" anchor="ctr"/>
           <a:lstStyle/>
           <a:p>
-            <a:pPr indent="0" marL="0">
+            <a:pPr marL="0" indent="0">
               <a:buNone/>
             </a:pPr>
             <a:r>
@@ -3154,9 +2917,6 @@
               </a:rPr>
               <a:t>04</a:t>
             </a:r>
-            <a:pPr indent="0" marL="0">
-              <a:buNone/>
-            </a:pPr>
             <a:r>
               <a:rPr lang="en-US" sz="1100" dirty="0">
                 <a:solidFill>
@@ -3193,7 +2953,7 @@
           <a:bodyPr wrap="square" lIns="0" tIns="0" rIns="0" bIns="0" rtlCol="0" anchor="t"/>
           <a:lstStyle/>
           <a:p>
-            <a:pPr indent="0" marL="0">
+            <a:pPr marL="0" indent="0">
               <a:buNone/>
             </a:pPr>
             <a:r>
@@ -3232,7 +2992,7 @@
           <a:bodyPr wrap="square" lIns="0" tIns="0" rIns="0" bIns="0" rtlCol="0" anchor="ctr"/>
           <a:lstStyle/>
           <a:p>
-            <a:pPr indent="0" marL="0">
+            <a:pPr marL="0" indent="0">
               <a:buNone/>
             </a:pPr>
             <a:r>
@@ -3271,7 +3031,7 @@
           <a:bodyPr wrap="square" lIns="0" tIns="0" rIns="0" bIns="0" rtlCol="0" anchor="t"/>
           <a:lstStyle/>
           <a:p>
-            <a:pPr indent="0" marL="0">
+            <a:pPr marL="0" indent="0">
               <a:spcAft>
                 <a:spcPts val="600"/>
               </a:spcAft>
@@ -3308,16 +3068,34 @@
         </p:nvGraphicFramePr>
         <p:xfrm>
           <a:off x="640080" y="2377440"/>
-          <a:ext cx="10908792" cy="914400"/>
+          <a:ext cx="10908792" cy="2286000"/>
         </p:xfrm>
         <a:graphic>
           <a:graphicData uri="http://schemas.openxmlformats.org/drawingml/2006/table">
             <a:tbl>
               <a:tblPr/>
               <a:tblGrid>
-                <a:gridCol w="1463040"/>
-                <a:gridCol w="4572000"/>
-                <a:gridCol w="4873752"/>
+                <a:gridCol w="1463040">
+                  <a:extLst>
+                    <a:ext uri="{9D8B030D-6E8A-4147-A177-3AD203B41FA5}">
+                      <a16:colId xmlns:a16="http://schemas.microsoft.com/office/drawing/2014/main" val="20000"/>
+                    </a:ext>
+                  </a:extLst>
+                </a:gridCol>
+                <a:gridCol w="4572000">
+                  <a:extLst>
+                    <a:ext uri="{9D8B030D-6E8A-4147-A177-3AD203B41FA5}">
+                      <a16:colId xmlns:a16="http://schemas.microsoft.com/office/drawing/2014/main" val="20001"/>
+                    </a:ext>
+                  </a:extLst>
+                </a:gridCol>
+                <a:gridCol w="4873752">
+                  <a:extLst>
+                    <a:ext uri="{9D8B030D-6E8A-4147-A177-3AD203B41FA5}">
+                      <a16:colId xmlns:a16="http://schemas.microsoft.com/office/drawing/2014/main" val="20002"/>
+                    </a:ext>
+                  </a:extLst>
+                </a:gridCol>
               </a:tblGrid>
               <a:tr h="457200">
                 <a:tc>
@@ -3325,7 +3103,7 @@
                     <a:bodyPr/>
                     <a:lstStyle/>
                     <a:p>
-                      <a:pPr indent="0" marL="0">
+                      <a:pPr marL="0" indent="0">
                         <a:buNone/>
                       </a:pPr>
                       <a:r>
@@ -3393,7 +3171,7 @@
                     <a:bodyPr/>
                     <a:lstStyle/>
                     <a:p>
-                      <a:pPr indent="0" marL="0">
+                      <a:pPr marL="0" indent="0">
                         <a:buNone/>
                       </a:pPr>
                       <a:r>
@@ -3461,7 +3239,7 @@
                     <a:bodyPr/>
                     <a:lstStyle/>
                     <a:p>
-                      <a:pPr indent="0" marL="0">
+                      <a:pPr marL="0" indent="0">
                         <a:buNone/>
                       </a:pPr>
                       <a:r>
@@ -3524,6 +3302,11 @@
                     </a:solidFill>
                   </a:tcPr>
                 </a:tc>
+                <a:extLst>
+                  <a:ext uri="{0D108BD9-81ED-4DB2-BD59-A6C34878D82A}">
+                    <a16:rowId xmlns:a16="http://schemas.microsoft.com/office/drawing/2014/main" val="10000"/>
+                  </a:ext>
+                </a:extLst>
               </a:tr>
               <a:tr h="457200">
                 <a:tc>
@@ -3531,7 +3314,7 @@
                     <a:bodyPr/>
                     <a:lstStyle/>
                     <a:p>
-                      <a:pPr indent="0" marL="0">
+                      <a:pPr marL="0" indent="0">
                         <a:buNone/>
                       </a:pPr>
                       <a:r>
@@ -3596,7 +3379,7 @@
                     <a:bodyPr/>
                     <a:lstStyle/>
                     <a:p>
-                      <a:pPr indent="0" marL="0">
+                      <a:pPr marL="0" indent="0">
                         <a:buNone/>
                       </a:pPr>
                       <a:r>
@@ -3661,7 +3444,7 @@
                     <a:bodyPr/>
                     <a:lstStyle/>
                     <a:p>
-                      <a:pPr indent="0" marL="0">
+                      <a:pPr marL="0" indent="0">
                         <a:buNone/>
                       </a:pPr>
                       <a:r>
@@ -3721,6 +3504,11 @@
                     </a:lnB>
                   </a:tcPr>
                 </a:tc>
+                <a:extLst>
+                  <a:ext uri="{0D108BD9-81ED-4DB2-BD59-A6C34878D82A}">
+                    <a16:rowId xmlns:a16="http://schemas.microsoft.com/office/drawing/2014/main" val="10001"/>
+                  </a:ext>
+                </a:extLst>
               </a:tr>
               <a:tr h="457200">
                 <a:tc>
@@ -3728,7 +3516,7 @@
                     <a:bodyPr/>
                     <a:lstStyle/>
                     <a:p>
-                      <a:pPr indent="0" marL="0">
+                      <a:pPr marL="0" indent="0">
                         <a:buNone/>
                       </a:pPr>
                       <a:r>
@@ -3793,7 +3581,7 @@
                     <a:bodyPr/>
                     <a:lstStyle/>
                     <a:p>
-                      <a:pPr indent="0" marL="0">
+                      <a:pPr marL="0" indent="0">
                         <a:buNone/>
                       </a:pPr>
                       <a:r>
@@ -3858,7 +3646,7 @@
                     <a:bodyPr/>
                     <a:lstStyle/>
                     <a:p>
-                      <a:pPr indent="0" marL="0">
+                      <a:pPr marL="0" indent="0">
                         <a:buNone/>
                       </a:pPr>
                       <a:r>
@@ -3918,6 +3706,11 @@
                     </a:lnB>
                   </a:tcPr>
                 </a:tc>
+                <a:extLst>
+                  <a:ext uri="{0D108BD9-81ED-4DB2-BD59-A6C34878D82A}">
+                    <a16:rowId xmlns:a16="http://schemas.microsoft.com/office/drawing/2014/main" val="10002"/>
+                  </a:ext>
+                </a:extLst>
               </a:tr>
               <a:tr h="457200">
                 <a:tc>
@@ -3925,7 +3718,7 @@
                     <a:bodyPr/>
                     <a:lstStyle/>
                     <a:p>
-                      <a:pPr indent="0" marL="0">
+                      <a:pPr marL="0" indent="0">
                         <a:buNone/>
                       </a:pPr>
                       <a:r>
@@ -3990,7 +3783,7 @@
                     <a:bodyPr/>
                     <a:lstStyle/>
                     <a:p>
-                      <a:pPr indent="0" marL="0">
+                      <a:pPr marL="0" indent="0">
                         <a:buNone/>
                       </a:pPr>
                       <a:r>
@@ -4055,7 +3848,7 @@
                     <a:bodyPr/>
                     <a:lstStyle/>
                     <a:p>
-                      <a:pPr indent="0" marL="0">
+                      <a:pPr marL="0" indent="0">
                         <a:buNone/>
                       </a:pPr>
                       <a:r>
@@ -4115,6 +3908,11 @@
                     </a:lnB>
                   </a:tcPr>
                 </a:tc>
+                <a:extLst>
+                  <a:ext uri="{0D108BD9-81ED-4DB2-BD59-A6C34878D82A}">
+                    <a16:rowId xmlns:a16="http://schemas.microsoft.com/office/drawing/2014/main" val="10003"/>
+                  </a:ext>
+                </a:extLst>
               </a:tr>
               <a:tr h="457200">
                 <a:tc>
@@ -4122,7 +3920,7 @@
                     <a:bodyPr/>
                     <a:lstStyle/>
                     <a:p>
-                      <a:pPr indent="0" marL="0">
+                      <a:pPr marL="0" indent="0">
                         <a:buNone/>
                       </a:pPr>
                       <a:r>
@@ -4187,7 +3985,7 @@
                     <a:bodyPr/>
                     <a:lstStyle/>
                     <a:p>
-                      <a:pPr indent="0" marL="0">
+                      <a:pPr marL="0" indent="0">
                         <a:buNone/>
                       </a:pPr>
                       <a:r>
@@ -4252,7 +4050,7 @@
                     <a:bodyPr/>
                     <a:lstStyle/>
                     <a:p>
-                      <a:pPr indent="0" marL="0">
+                      <a:pPr marL="0" indent="0">
                         <a:buNone/>
                       </a:pPr>
                       <a:r>
@@ -4312,6 +4110,11 @@
                     </a:lnB>
                   </a:tcPr>
                 </a:tc>
+                <a:extLst>
+                  <a:ext uri="{0D108BD9-81ED-4DB2-BD59-A6C34878D82A}">
+                    <a16:rowId xmlns:a16="http://schemas.microsoft.com/office/drawing/2014/main" val="10004"/>
+                  </a:ext>
+                </a:extLst>
               </a:tr>
             </a:tbl>
           </a:graphicData>
@@ -4338,7 +4141,7 @@
           <a:bodyPr wrap="square" lIns="0" tIns="0" rIns="0" bIns="0" rtlCol="0" anchor="ctr"/>
           <a:lstStyle/>
           <a:p>
-            <a:pPr indent="0" marL="0">
+            <a:pPr marL="0" indent="0">
               <a:buNone/>
             </a:pPr>
             <a:r>
@@ -4377,7 +4180,7 @@
           <a:bodyPr wrap="square" lIns="0" tIns="0" rIns="0" bIns="0" rtlCol="0" anchor="t"/>
           <a:lstStyle/>
           <a:p>
-            <a:pPr indent="0" marL="0">
+            <a:pPr marL="0" indent="0">
               <a:spcAft>
                 <a:spcPts val="600"/>
               </a:spcAft>
@@ -4397,7 +4200,7 @@
             <a:endParaRPr lang="en-US" sz="1250" dirty="0"/>
           </a:p>
           <a:p>
-            <a:pPr indent="0" marL="0">
+            <a:pPr marL="0" indent="0">
               <a:spcAft>
                 <a:spcPts val="600"/>
               </a:spcAft>
@@ -4417,7 +4220,7 @@
             <a:endParaRPr lang="en-US" sz="1250" dirty="0"/>
           </a:p>
           <a:p>
-            <a:pPr indent="0" marL="0">
+            <a:pPr marL="0" indent="0">
               <a:spcAft>
                 <a:spcPts val="600"/>
               </a:spcAft>
@@ -4459,7 +4262,7 @@
           <a:bodyPr wrap="square" lIns="0" tIns="0" rIns="0" bIns="0" rtlCol="0" anchor="ctr"/>
           <a:lstStyle/>
           <a:p>
-            <a:pPr indent="0" marL="0">
+            <a:pPr marL="0" indent="0">
               <a:buNone/>
             </a:pPr>
             <a:r>
@@ -4498,7 +4301,7 @@
           <a:bodyPr wrap="square" lIns="0" tIns="0" rIns="0" bIns="0" rtlCol="0" anchor="ctr"/>
           <a:lstStyle/>
           <a:p>
-            <a:pPr algn="r" indent="0" marL="0">
+            <a:pPr marL="0" indent="0" algn="r">
               <a:buNone/>
             </a:pPr>
             <a:r>
@@ -4532,6 +4335,7 @@
         <a:solidFill>
           <a:srgbClr val="FFFFFF"/>
         </a:solidFill>
+        <a:effectLst/>
       </p:bgPr>
     </p:bg>
     <p:spTree>
@@ -4569,7 +4373,7 @@
           <a:bodyPr wrap="square" lIns="0" tIns="0" rIns="0" bIns="0" rtlCol="0" anchor="ctr"/>
           <a:lstStyle/>
           <a:p>
-            <a:pPr indent="0" marL="0">
+            <a:pPr marL="0" indent="0">
               <a:buNone/>
             </a:pPr>
             <a:r>
@@ -4583,9 +4387,6 @@
               </a:rPr>
               <a:t>04</a:t>
             </a:r>
-            <a:pPr indent="0" marL="0">
-              <a:buNone/>
-            </a:pPr>
             <a:r>
               <a:rPr lang="en-US" sz="1100" dirty="0">
                 <a:solidFill>
@@ -4622,7 +4423,7 @@
           <a:bodyPr wrap="square" lIns="0" tIns="0" rIns="0" bIns="0" rtlCol="0" anchor="t"/>
           <a:lstStyle/>
           <a:p>
-            <a:pPr indent="0" marL="0">
+            <a:pPr marL="0" indent="0">
               <a:buNone/>
             </a:pPr>
             <a:r>
@@ -4661,7 +4462,7 @@
           <a:bodyPr wrap="square" lIns="0" tIns="0" rIns="0" bIns="0" rtlCol="0" anchor="ctr"/>
           <a:lstStyle/>
           <a:p>
-            <a:pPr indent="0" marL="0">
+            <a:pPr marL="0" indent="0">
               <a:buNone/>
             </a:pPr>
             <a:r>
@@ -4700,7 +4501,7 @@
           <a:bodyPr wrap="square" lIns="0" tIns="0" rIns="0" bIns="0" rtlCol="0" anchor="t"/>
           <a:lstStyle/>
           <a:p>
-            <a:pPr indent="0" marL="0">
+            <a:pPr marL="0" indent="0">
               <a:spcAft>
                 <a:spcPts val="600"/>
               </a:spcAft>
@@ -4742,7 +4543,7 @@
           <a:bodyPr wrap="square" lIns="0" tIns="0" rIns="0" bIns="0" rtlCol="0" anchor="ctr"/>
           <a:lstStyle/>
           <a:p>
-            <a:pPr indent="0" marL="0">
+            <a:pPr marL="0" indent="0">
               <a:buNone/>
             </a:pPr>
             <a:r>
@@ -4887,7 +4688,7 @@
           <a:bodyPr wrap="square" lIns="0" tIns="0" rIns="0" bIns="0" rtlCol="0" anchor="ctr"/>
           <a:lstStyle/>
           <a:p>
-            <a:pPr indent="0" marL="0">
+            <a:pPr marL="0" indent="0">
               <a:buNone/>
             </a:pPr>
             <a:r>
@@ -5032,7 +4833,7 @@
           <a:bodyPr wrap="square" lIns="0" tIns="0" rIns="0" bIns="0" rtlCol="0" anchor="ctr"/>
           <a:lstStyle/>
           <a:p>
-            <a:pPr indent="0" marL="0">
+            <a:pPr marL="0" indent="0">
               <a:buNone/>
             </a:pPr>
             <a:r>
@@ -5071,7 +4872,7 @@
           <a:bodyPr wrap="square" lIns="0" tIns="0" rIns="0" bIns="0" rtlCol="0" anchor="t"/>
           <a:lstStyle/>
           <a:p>
-            <a:pPr indent="0" marL="0">
+            <a:pPr marL="0" indent="0">
               <a:spcAft>
                 <a:spcPts val="600"/>
               </a:spcAft>
@@ -5091,7 +4892,7 @@
             <a:endParaRPr lang="en-US" sz="1250" dirty="0"/>
           </a:p>
           <a:p>
-            <a:pPr indent="0" marL="0">
+            <a:pPr marL="0" indent="0">
               <a:spcAft>
                 <a:spcPts val="600"/>
               </a:spcAft>
@@ -5133,7 +4934,7 @@
           <a:bodyPr wrap="square" lIns="0" tIns="0" rIns="0" bIns="0" rtlCol="0" anchor="ctr"/>
           <a:lstStyle/>
           <a:p>
-            <a:pPr indent="0" marL="0">
+            <a:pPr marL="0" indent="0">
               <a:buNone/>
             </a:pPr>
             <a:r>
@@ -5172,7 +4973,7 @@
           <a:bodyPr wrap="square" lIns="0" tIns="0" rIns="0" bIns="0" rtlCol="0" anchor="ctr"/>
           <a:lstStyle/>
           <a:p>
-            <a:pPr algn="r" indent="0" marL="0">
+            <a:pPr marL="0" indent="0" algn="r">
               <a:buNone/>
             </a:pPr>
             <a:r>
@@ -5206,6 +5007,7 @@
         <a:solidFill>
           <a:srgbClr val="FFFFFF"/>
         </a:solidFill>
+        <a:effectLst/>
       </p:bgPr>
     </p:bg>
     <p:spTree>
@@ -5243,7 +5045,7 @@
           <a:bodyPr wrap="square" lIns="0" tIns="0" rIns="0" bIns="0" rtlCol="0" anchor="ctr"/>
           <a:lstStyle/>
           <a:p>
-            <a:pPr indent="0" marL="0">
+            <a:pPr marL="0" indent="0">
               <a:buNone/>
             </a:pPr>
             <a:r>
@@ -5257,9 +5059,6 @@
               </a:rPr>
               <a:t>04</a:t>
             </a:r>
-            <a:pPr indent="0" marL="0">
-              <a:buNone/>
-            </a:pPr>
             <a:r>
               <a:rPr lang="en-US" sz="1100" dirty="0">
                 <a:solidFill>
@@ -5296,7 +5095,7 @@
           <a:bodyPr wrap="square" lIns="0" tIns="0" rIns="0" bIns="0" rtlCol="0" anchor="t"/>
           <a:lstStyle/>
           <a:p>
-            <a:pPr indent="0" marL="0">
+            <a:pPr marL="0" indent="0">
               <a:buNone/>
             </a:pPr>
             <a:r>
@@ -5335,7 +5134,7 @@
           <a:bodyPr wrap="square" lIns="0" tIns="0" rIns="0" bIns="0" rtlCol="0" anchor="ctr"/>
           <a:lstStyle/>
           <a:p>
-            <a:pPr indent="0" marL="0">
+            <a:pPr marL="0" indent="0">
               <a:buNone/>
             </a:pPr>
             <a:r>
@@ -5374,7 +5173,7 @@
           <a:bodyPr wrap="square" lIns="0" tIns="0" rIns="0" bIns="0" rtlCol="0" anchor="t"/>
           <a:lstStyle/>
           <a:p>
-            <a:pPr indent="0" marL="0">
+            <a:pPr marL="0" indent="0">
               <a:spcAft>
                 <a:spcPts val="600"/>
               </a:spcAft>
@@ -5418,8 +5217,20 @@
             <a:tbl>
               <a:tblPr/>
               <a:tblGrid>
-                <a:gridCol w="2377440"/>
-                <a:gridCol w="8531352"/>
+                <a:gridCol w="2377440">
+                  <a:extLst>
+                    <a:ext uri="{9D8B030D-6E8A-4147-A177-3AD203B41FA5}">
+                      <a16:colId xmlns:a16="http://schemas.microsoft.com/office/drawing/2014/main" val="20000"/>
+                    </a:ext>
+                  </a:extLst>
+                </a:gridCol>
+                <a:gridCol w="8531352">
+                  <a:extLst>
+                    <a:ext uri="{9D8B030D-6E8A-4147-A177-3AD203B41FA5}">
+                      <a16:colId xmlns:a16="http://schemas.microsoft.com/office/drawing/2014/main" val="20001"/>
+                    </a:ext>
+                  </a:extLst>
+                </a:gridCol>
               </a:tblGrid>
               <a:tr h="475488">
                 <a:tc>
@@ -5427,7 +5238,7 @@
                     <a:bodyPr/>
                     <a:lstStyle/>
                     <a:p>
-                      <a:pPr indent="0" marL="0">
+                      <a:pPr marL="0" indent="0">
                         <a:buNone/>
                       </a:pPr>
                       <a:r>
@@ -5495,7 +5306,7 @@
                     <a:bodyPr/>
                     <a:lstStyle/>
                     <a:p>
-                      <a:pPr indent="0" marL="0">
+                      <a:pPr marL="0" indent="0">
                         <a:buNone/>
                       </a:pPr>
                       <a:r>
@@ -5558,6 +5369,11 @@
                     </a:solidFill>
                   </a:tcPr>
                 </a:tc>
+                <a:extLst>
+                  <a:ext uri="{0D108BD9-81ED-4DB2-BD59-A6C34878D82A}">
+                    <a16:rowId xmlns:a16="http://schemas.microsoft.com/office/drawing/2014/main" val="10000"/>
+                  </a:ext>
+                </a:extLst>
               </a:tr>
               <a:tr h="475488">
                 <a:tc>
@@ -5565,7 +5381,7 @@
                     <a:bodyPr/>
                     <a:lstStyle/>
                     <a:p>
-                      <a:pPr indent="0" marL="0">
+                      <a:pPr marL="0" indent="0">
                         <a:buNone/>
                       </a:pPr>
                       <a:r>
@@ -5630,7 +5446,7 @@
                     <a:bodyPr/>
                     <a:lstStyle/>
                     <a:p>
-                      <a:pPr indent="0" marL="0">
+                      <a:pPr marL="0" indent="0">
                         <a:buNone/>
                       </a:pPr>
                       <a:r>
@@ -5690,6 +5506,11 @@
                     </a:lnB>
                   </a:tcPr>
                 </a:tc>
+                <a:extLst>
+                  <a:ext uri="{0D108BD9-81ED-4DB2-BD59-A6C34878D82A}">
+                    <a16:rowId xmlns:a16="http://schemas.microsoft.com/office/drawing/2014/main" val="10001"/>
+                  </a:ext>
+                </a:extLst>
               </a:tr>
               <a:tr h="475488">
                 <a:tc>
@@ -5697,7 +5518,7 @@
                     <a:bodyPr/>
                     <a:lstStyle/>
                     <a:p>
-                      <a:pPr indent="0" marL="0">
+                      <a:pPr marL="0" indent="0">
                         <a:buNone/>
                       </a:pPr>
                       <a:r>
@@ -5762,7 +5583,7 @@
                     <a:bodyPr/>
                     <a:lstStyle/>
                     <a:p>
-                      <a:pPr indent="0" marL="0">
+                      <a:pPr marL="0" indent="0">
                         <a:buNone/>
                       </a:pPr>
                       <a:r>
@@ -5822,6 +5643,11 @@
                     </a:lnB>
                   </a:tcPr>
                 </a:tc>
+                <a:extLst>
+                  <a:ext uri="{0D108BD9-81ED-4DB2-BD59-A6C34878D82A}">
+                    <a16:rowId xmlns:a16="http://schemas.microsoft.com/office/drawing/2014/main" val="10002"/>
+                  </a:ext>
+                </a:extLst>
               </a:tr>
               <a:tr h="475488">
                 <a:tc>
@@ -5829,7 +5655,7 @@
                     <a:bodyPr/>
                     <a:lstStyle/>
                     <a:p>
-                      <a:pPr indent="0" marL="0">
+                      <a:pPr marL="0" indent="0">
                         <a:buNone/>
                       </a:pPr>
                       <a:r>
@@ -5894,7 +5720,7 @@
                     <a:bodyPr/>
                     <a:lstStyle/>
                     <a:p>
-                      <a:pPr indent="0" marL="0">
+                      <a:pPr marL="0" indent="0">
                         <a:buNone/>
                       </a:pPr>
                       <a:r>
@@ -5954,6 +5780,11 @@
                     </a:lnB>
                   </a:tcPr>
                 </a:tc>
+                <a:extLst>
+                  <a:ext uri="{0D108BD9-81ED-4DB2-BD59-A6C34878D82A}">
+                    <a16:rowId xmlns:a16="http://schemas.microsoft.com/office/drawing/2014/main" val="10003"/>
+                  </a:ext>
+                </a:extLst>
               </a:tr>
               <a:tr h="475488">
                 <a:tc>
@@ -5961,7 +5792,7 @@
                     <a:bodyPr/>
                     <a:lstStyle/>
                     <a:p>
-                      <a:pPr indent="0" marL="0">
+                      <a:pPr marL="0" indent="0">
                         <a:buNone/>
                       </a:pPr>
                       <a:r>
@@ -6026,7 +5857,7 @@
                     <a:bodyPr/>
                     <a:lstStyle/>
                     <a:p>
-                      <a:pPr indent="0" marL="0">
+                      <a:pPr marL="0" indent="0">
                         <a:buNone/>
                       </a:pPr>
                       <a:r>
@@ -6086,6 +5917,11 @@
                     </a:lnB>
                   </a:tcPr>
                 </a:tc>
+                <a:extLst>
+                  <a:ext uri="{0D108BD9-81ED-4DB2-BD59-A6C34878D82A}">
+                    <a16:rowId xmlns:a16="http://schemas.microsoft.com/office/drawing/2014/main" val="10004"/>
+                  </a:ext>
+                </a:extLst>
               </a:tr>
               <a:tr h="475488">
                 <a:tc>
@@ -6093,7 +5929,7 @@
                     <a:bodyPr/>
                     <a:lstStyle/>
                     <a:p>
-                      <a:pPr indent="0" marL="0">
+                      <a:pPr marL="0" indent="0">
                         <a:buNone/>
                       </a:pPr>
                       <a:r>
@@ -6158,7 +5994,7 @@
                     <a:bodyPr/>
                     <a:lstStyle/>
                     <a:p>
-                      <a:pPr indent="0" marL="0">
+                      <a:pPr marL="0" indent="0">
                         <a:buNone/>
                       </a:pPr>
                       <a:r>
@@ -6218,6 +6054,11 @@
                     </a:lnB>
                   </a:tcPr>
                 </a:tc>
+                <a:extLst>
+                  <a:ext uri="{0D108BD9-81ED-4DB2-BD59-A6C34878D82A}">
+                    <a16:rowId xmlns:a16="http://schemas.microsoft.com/office/drawing/2014/main" val="10005"/>
+                  </a:ext>
+                </a:extLst>
               </a:tr>
             </a:tbl>
           </a:graphicData>
@@ -6244,7 +6085,7 @@
           <a:bodyPr wrap="square" lIns="0" tIns="0" rIns="0" bIns="0" rtlCol="0" anchor="ctr"/>
           <a:lstStyle/>
           <a:p>
-            <a:pPr indent="0" marL="0">
+            <a:pPr marL="0" indent="0">
               <a:buNone/>
             </a:pPr>
             <a:r>
@@ -6283,7 +6124,7 @@
           <a:bodyPr wrap="square" lIns="0" tIns="0" rIns="0" bIns="0" rtlCol="0" anchor="t"/>
           <a:lstStyle/>
           <a:p>
-            <a:pPr indent="0" marL="0">
+            <a:pPr marL="0" indent="0">
               <a:spcAft>
                 <a:spcPts val="600"/>
               </a:spcAft>
@@ -6303,7 +6144,7 @@
             <a:endParaRPr lang="en-US" sz="1250" dirty="0"/>
           </a:p>
           <a:p>
-            <a:pPr indent="0" marL="0">
+            <a:pPr marL="0" indent="0">
               <a:spcAft>
                 <a:spcPts val="600"/>
               </a:spcAft>
@@ -6323,7 +6164,7 @@
             <a:endParaRPr lang="en-US" sz="1250" dirty="0"/>
           </a:p>
           <a:p>
-            <a:pPr indent="0" marL="0">
+            <a:pPr marL="0" indent="0">
               <a:spcAft>
                 <a:spcPts val="600"/>
               </a:spcAft>
@@ -6365,7 +6206,7 @@
           <a:bodyPr wrap="square" lIns="0" tIns="0" rIns="0" bIns="0" rtlCol="0" anchor="ctr"/>
           <a:lstStyle/>
           <a:p>
-            <a:pPr indent="0" marL="0">
+            <a:pPr marL="0" indent="0">
               <a:buNone/>
             </a:pPr>
             <a:r>
@@ -6404,7 +6245,7 @@
           <a:bodyPr wrap="square" lIns="0" tIns="0" rIns="0" bIns="0" rtlCol="0" anchor="ctr"/>
           <a:lstStyle/>
           <a:p>
-            <a:pPr algn="r" indent="0" marL="0">
+            <a:pPr marL="0" indent="0" algn="r">
               <a:buNone/>
             </a:pPr>
             <a:r>
@@ -6438,6 +6279,7 @@
         <a:solidFill>
           <a:srgbClr val="FFFFFF"/>
         </a:solidFill>
+        <a:effectLst/>
       </p:bgPr>
     </p:bg>
     <p:spTree>
@@ -6475,7 +6317,7 @@
           <a:bodyPr wrap="square" lIns="0" tIns="0" rIns="0" bIns="0" rtlCol="0" anchor="ctr"/>
           <a:lstStyle/>
           <a:p>
-            <a:pPr indent="0" marL="0">
+            <a:pPr marL="0" indent="0">
               <a:buNone/>
             </a:pPr>
             <a:r>
@@ -6489,9 +6331,6 @@
               </a:rPr>
               <a:t>04</a:t>
             </a:r>
-            <a:pPr indent="0" marL="0">
-              <a:buNone/>
-            </a:pPr>
             <a:r>
               <a:rPr lang="en-US" sz="1100" dirty="0">
                 <a:solidFill>
@@ -6528,7 +6367,7 @@
           <a:bodyPr wrap="square" lIns="0" tIns="0" rIns="0" bIns="0" rtlCol="0" anchor="t"/>
           <a:lstStyle/>
           <a:p>
-            <a:pPr indent="0" marL="0">
+            <a:pPr marL="0" indent="0">
               <a:buNone/>
             </a:pPr>
             <a:r>
@@ -6567,7 +6406,7 @@
           <a:bodyPr wrap="square" lIns="0" tIns="0" rIns="0" bIns="0" rtlCol="0" anchor="ctr"/>
           <a:lstStyle/>
           <a:p>
-            <a:pPr indent="0" marL="0">
+            <a:pPr marL="0" indent="0">
               <a:buNone/>
             </a:pPr>
             <a:r>
@@ -6606,7 +6445,7 @@
           <a:bodyPr wrap="square" lIns="0" tIns="0" rIns="0" bIns="0" rtlCol="0" anchor="t"/>
           <a:lstStyle/>
           <a:p>
-            <a:pPr indent="0" marL="0">
+            <a:pPr marL="0" indent="0">
               <a:spcAft>
                 <a:spcPts val="600"/>
               </a:spcAft>
@@ -6648,7 +6487,7 @@
           <a:bodyPr wrap="square" lIns="0" tIns="0" rIns="0" bIns="0" rtlCol="0" anchor="ctr"/>
           <a:lstStyle/>
           <a:p>
-            <a:pPr indent="0" marL="0">
+            <a:pPr marL="0" indent="0">
               <a:buNone/>
             </a:pPr>
             <a:r>
@@ -6793,7 +6632,7 @@
           <a:bodyPr wrap="square" lIns="0" tIns="0" rIns="0" bIns="0" rtlCol="0" anchor="ctr"/>
           <a:lstStyle/>
           <a:p>
-            <a:pPr indent="0" marL="0">
+            <a:pPr marL="0" indent="0">
               <a:buNone/>
             </a:pPr>
             <a:r>
@@ -6938,7 +6777,7 @@
           <a:bodyPr wrap="square" lIns="0" tIns="0" rIns="0" bIns="0" rtlCol="0" anchor="ctr"/>
           <a:lstStyle/>
           <a:p>
-            <a:pPr indent="0" marL="0">
+            <a:pPr marL="0" indent="0">
               <a:buNone/>
             </a:pPr>
             <a:r>
@@ -6977,7 +6816,7 @@
           <a:bodyPr wrap="square" lIns="0" tIns="0" rIns="0" bIns="0" rtlCol="0" anchor="t"/>
           <a:lstStyle/>
           <a:p>
-            <a:pPr indent="0" marL="0">
+            <a:pPr marL="0" indent="0">
               <a:spcAft>
                 <a:spcPts val="600"/>
               </a:spcAft>
@@ -6997,7 +6836,7 @@
             <a:endParaRPr lang="en-US" sz="1250" dirty="0"/>
           </a:p>
           <a:p>
-            <a:pPr indent="0" marL="0">
+            <a:pPr marL="0" indent="0">
               <a:spcAft>
                 <a:spcPts val="600"/>
               </a:spcAft>
@@ -7039,7 +6878,7 @@
           <a:bodyPr wrap="square" lIns="0" tIns="0" rIns="0" bIns="0" rtlCol="0" anchor="ctr"/>
           <a:lstStyle/>
           <a:p>
-            <a:pPr indent="0" marL="0">
+            <a:pPr marL="0" indent="0">
               <a:buNone/>
             </a:pPr>
             <a:r>
@@ -7078,7 +6917,7 @@
           <a:bodyPr wrap="square" lIns="0" tIns="0" rIns="0" bIns="0" rtlCol="0" anchor="ctr"/>
           <a:lstStyle/>
           <a:p>
-            <a:pPr algn="r" indent="0" marL="0">
+            <a:pPr marL="0" indent="0" algn="r">
               <a:buNone/>
             </a:pPr>
             <a:r>
@@ -7112,6 +6951,7 @@
         <a:solidFill>
           <a:srgbClr val="FFFFFF"/>
         </a:solidFill>
+        <a:effectLst/>
       </p:bgPr>
     </p:bg>
     <p:spTree>
@@ -7149,7 +6989,7 @@
           <a:bodyPr wrap="square" lIns="0" tIns="0" rIns="0" bIns="0" rtlCol="0" anchor="ctr"/>
           <a:lstStyle/>
           <a:p>
-            <a:pPr indent="0" marL="0">
+            <a:pPr marL="0" indent="0">
               <a:buNone/>
             </a:pPr>
             <a:r>
@@ -7163,9 +7003,6 @@
               </a:rPr>
               <a:t>04</a:t>
             </a:r>
-            <a:pPr indent="0" marL="0">
-              <a:buNone/>
-            </a:pPr>
             <a:r>
               <a:rPr lang="en-US" sz="1100" dirty="0">
                 <a:solidFill>
@@ -7202,7 +7039,7 @@
           <a:bodyPr wrap="square" lIns="0" tIns="0" rIns="0" bIns="0" rtlCol="0" anchor="t"/>
           <a:lstStyle/>
           <a:p>
-            <a:pPr indent="0" marL="0">
+            <a:pPr marL="0" indent="0">
               <a:buNone/>
             </a:pPr>
             <a:r>
@@ -7241,7 +7078,7 @@
           <a:bodyPr wrap="square" lIns="0" tIns="0" rIns="0" bIns="0" rtlCol="0" anchor="ctr"/>
           <a:lstStyle/>
           <a:p>
-            <a:pPr indent="0" marL="0">
+            <a:pPr marL="0" indent="0">
               <a:buNone/>
             </a:pPr>
             <a:r>
@@ -7280,7 +7117,7 @@
           <a:bodyPr wrap="square" lIns="0" tIns="0" rIns="0" bIns="0" rtlCol="0" anchor="t"/>
           <a:lstStyle/>
           <a:p>
-            <a:pPr indent="0" marL="0">
+            <a:pPr marL="0" indent="0">
               <a:spcAft>
                 <a:spcPts val="600"/>
               </a:spcAft>
@@ -7324,9 +7161,27 @@
             <a:tbl>
               <a:tblPr/>
               <a:tblGrid>
-                <a:gridCol w="2194560"/>
-                <a:gridCol w="4937760"/>
-                <a:gridCol w="3776472"/>
+                <a:gridCol w="2194560">
+                  <a:extLst>
+                    <a:ext uri="{9D8B030D-6E8A-4147-A177-3AD203B41FA5}">
+                      <a16:colId xmlns:a16="http://schemas.microsoft.com/office/drawing/2014/main" val="20000"/>
+                    </a:ext>
+                  </a:extLst>
+                </a:gridCol>
+                <a:gridCol w="4937760">
+                  <a:extLst>
+                    <a:ext uri="{9D8B030D-6E8A-4147-A177-3AD203B41FA5}">
+                      <a16:colId xmlns:a16="http://schemas.microsoft.com/office/drawing/2014/main" val="20001"/>
+                    </a:ext>
+                  </a:extLst>
+                </a:gridCol>
+                <a:gridCol w="3776472">
+                  <a:extLst>
+                    <a:ext uri="{9D8B030D-6E8A-4147-A177-3AD203B41FA5}">
+                      <a16:colId xmlns:a16="http://schemas.microsoft.com/office/drawing/2014/main" val="20002"/>
+                    </a:ext>
+                  </a:extLst>
+                </a:gridCol>
               </a:tblGrid>
               <a:tr h="502920">
                 <a:tc>
@@ -7334,7 +7189,7 @@
                     <a:bodyPr/>
                     <a:lstStyle/>
                     <a:p>
-                      <a:pPr indent="0" marL="0">
+                      <a:pPr marL="0" indent="0">
                         <a:buNone/>
                       </a:pPr>
                       <a:r>
@@ -7402,7 +7257,7 @@
                     <a:bodyPr/>
                     <a:lstStyle/>
                     <a:p>
-                      <a:pPr indent="0" marL="0">
+                      <a:pPr marL="0" indent="0">
                         <a:buNone/>
                       </a:pPr>
                       <a:r>
@@ -7470,7 +7325,7 @@
                     <a:bodyPr/>
                     <a:lstStyle/>
                     <a:p>
-                      <a:pPr indent="0" marL="0">
+                      <a:pPr marL="0" indent="0">
                         <a:buNone/>
                       </a:pPr>
                       <a:r>
@@ -7533,6 +7388,11 @@
                     </a:solidFill>
                   </a:tcPr>
                 </a:tc>
+                <a:extLst>
+                  <a:ext uri="{0D108BD9-81ED-4DB2-BD59-A6C34878D82A}">
+                    <a16:rowId xmlns:a16="http://schemas.microsoft.com/office/drawing/2014/main" val="10000"/>
+                  </a:ext>
+                </a:extLst>
               </a:tr>
               <a:tr h="502920">
                 <a:tc>
@@ -7540,7 +7400,7 @@
                     <a:bodyPr/>
                     <a:lstStyle/>
                     <a:p>
-                      <a:pPr indent="0" marL="0">
+                      <a:pPr marL="0" indent="0">
                         <a:buNone/>
                       </a:pPr>
                       <a:r>
@@ -7605,7 +7465,7 @@
                     <a:bodyPr/>
                     <a:lstStyle/>
                     <a:p>
-                      <a:pPr indent="0" marL="0">
+                      <a:pPr marL="0" indent="0">
                         <a:buNone/>
                       </a:pPr>
                       <a:r>
@@ -7670,7 +7530,7 @@
                     <a:bodyPr/>
                     <a:lstStyle/>
                     <a:p>
-                      <a:pPr indent="0" marL="0">
+                      <a:pPr marL="0" indent="0">
                         <a:buNone/>
                       </a:pPr>
                       <a:r>
@@ -7730,6 +7590,11 @@
                     </a:lnB>
                   </a:tcPr>
                 </a:tc>
+                <a:extLst>
+                  <a:ext uri="{0D108BD9-81ED-4DB2-BD59-A6C34878D82A}">
+                    <a16:rowId xmlns:a16="http://schemas.microsoft.com/office/drawing/2014/main" val="10001"/>
+                  </a:ext>
+                </a:extLst>
               </a:tr>
               <a:tr h="502920">
                 <a:tc>
@@ -7737,7 +7602,7 @@
                     <a:bodyPr/>
                     <a:lstStyle/>
                     <a:p>
-                      <a:pPr indent="0" marL="0">
+                      <a:pPr marL="0" indent="0">
                         <a:buNone/>
                       </a:pPr>
                       <a:r>
@@ -7802,7 +7667,7 @@
                     <a:bodyPr/>
                     <a:lstStyle/>
                     <a:p>
-                      <a:pPr indent="0" marL="0">
+                      <a:pPr marL="0" indent="0">
                         <a:buNone/>
                       </a:pPr>
                       <a:r>
@@ -7867,7 +7732,7 @@
                     <a:bodyPr/>
                     <a:lstStyle/>
                     <a:p>
-                      <a:pPr indent="0" marL="0">
+                      <a:pPr marL="0" indent="0">
                         <a:buNone/>
                       </a:pPr>
                       <a:r>
@@ -7927,6 +7792,11 @@
                     </a:lnB>
                   </a:tcPr>
                 </a:tc>
+                <a:extLst>
+                  <a:ext uri="{0D108BD9-81ED-4DB2-BD59-A6C34878D82A}">
+                    <a16:rowId xmlns:a16="http://schemas.microsoft.com/office/drawing/2014/main" val="10002"/>
+                  </a:ext>
+                </a:extLst>
               </a:tr>
               <a:tr h="502920">
                 <a:tc>
@@ -7934,7 +7804,7 @@
                     <a:bodyPr/>
                     <a:lstStyle/>
                     <a:p>
-                      <a:pPr indent="0" marL="0">
+                      <a:pPr marL="0" indent="0">
                         <a:buNone/>
                       </a:pPr>
                       <a:r>
@@ -7999,7 +7869,7 @@
                     <a:bodyPr/>
                     <a:lstStyle/>
                     <a:p>
-                      <a:pPr indent="0" marL="0">
+                      <a:pPr marL="0" indent="0">
                         <a:buNone/>
                       </a:pPr>
                       <a:r>
@@ -8064,7 +7934,7 @@
                     <a:bodyPr/>
                     <a:lstStyle/>
                     <a:p>
-                      <a:pPr indent="0" marL="0">
+                      <a:pPr marL="0" indent="0">
                         <a:buNone/>
                       </a:pPr>
                       <a:r>
@@ -8124,6 +7994,11 @@
                     </a:lnB>
                   </a:tcPr>
                 </a:tc>
+                <a:extLst>
+                  <a:ext uri="{0D108BD9-81ED-4DB2-BD59-A6C34878D82A}">
+                    <a16:rowId xmlns:a16="http://schemas.microsoft.com/office/drawing/2014/main" val="10003"/>
+                  </a:ext>
+                </a:extLst>
               </a:tr>
             </a:tbl>
           </a:graphicData>
@@ -8150,7 +8025,7 @@
           <a:bodyPr wrap="square" lIns="0" tIns="0" rIns="0" bIns="0" rtlCol="0" anchor="ctr"/>
           <a:lstStyle/>
           <a:p>
-            <a:pPr indent="0" marL="0">
+            <a:pPr marL="0" indent="0">
               <a:buNone/>
             </a:pPr>
             <a:r>
@@ -8189,7 +8064,7 @@
           <a:bodyPr wrap="square" lIns="0" tIns="0" rIns="0" bIns="0" rtlCol="0" anchor="t"/>
           <a:lstStyle/>
           <a:p>
-            <a:pPr indent="0" marL="0">
+            <a:pPr marL="0" indent="0">
               <a:spcAft>
                 <a:spcPts val="600"/>
               </a:spcAft>
@@ -8209,7 +8084,7 @@
             <a:endParaRPr lang="en-US" sz="1250" dirty="0"/>
           </a:p>
           <a:p>
-            <a:pPr indent="0" marL="0">
+            <a:pPr marL="0" indent="0">
               <a:spcAft>
                 <a:spcPts val="600"/>
               </a:spcAft>
@@ -8229,7 +8104,7 @@
             <a:endParaRPr lang="en-US" sz="1250" dirty="0"/>
           </a:p>
           <a:p>
-            <a:pPr indent="0" marL="0">
+            <a:pPr marL="0" indent="0">
               <a:spcAft>
                 <a:spcPts val="600"/>
               </a:spcAft>
@@ -8271,7 +8146,7 @@
           <a:bodyPr wrap="square" lIns="0" tIns="0" rIns="0" bIns="0" rtlCol="0" anchor="ctr"/>
           <a:lstStyle/>
           <a:p>
-            <a:pPr indent="0" marL="0">
+            <a:pPr marL="0" indent="0">
               <a:buNone/>
             </a:pPr>
             <a:r>
@@ -8310,7 +8185,7 @@
           <a:bodyPr wrap="square" lIns="0" tIns="0" rIns="0" bIns="0" rtlCol="0" anchor="ctr"/>
           <a:lstStyle/>
           <a:p>
-            <a:pPr indent="0" marL="0">
+            <a:pPr marL="0" indent="0">
               <a:buNone/>
             </a:pPr>
             <a:r>
@@ -8349,7 +8224,7 @@
           <a:bodyPr wrap="square" lIns="0" tIns="0" rIns="0" bIns="0" rtlCol="0" anchor="ctr"/>
           <a:lstStyle/>
           <a:p>
-            <a:pPr algn="r" indent="0" marL="0">
+            <a:pPr marL="0" indent="0" algn="r">
               <a:buNone/>
             </a:pPr>
             <a:r>
@@ -8383,6 +8258,7 @@
         <a:solidFill>
           <a:srgbClr val="FFFFFF"/>
         </a:solidFill>
+        <a:effectLst/>
       </p:bgPr>
     </p:bg>
     <p:spTree>
@@ -8420,7 +8296,7 @@
           <a:bodyPr wrap="square" lIns="0" tIns="0" rIns="0" bIns="0" rtlCol="0" anchor="ctr"/>
           <a:lstStyle/>
           <a:p>
-            <a:pPr indent="0" marL="0">
+            <a:pPr marL="0" indent="0">
               <a:buNone/>
             </a:pPr>
             <a:r>
@@ -8434,9 +8310,6 @@
               </a:rPr>
               <a:t>04</a:t>
             </a:r>
-            <a:pPr indent="0" marL="0">
-              <a:buNone/>
-            </a:pPr>
             <a:r>
               <a:rPr lang="en-US" sz="1100" dirty="0">
                 <a:solidFill>
@@ -8473,7 +8346,7 @@
           <a:bodyPr wrap="square" lIns="0" tIns="0" rIns="0" bIns="0" rtlCol="0" anchor="t"/>
           <a:lstStyle/>
           <a:p>
-            <a:pPr indent="0" marL="0">
+            <a:pPr marL="0" indent="0">
               <a:buNone/>
             </a:pPr>
             <a:r>
@@ -8512,7 +8385,7 @@
           <a:bodyPr wrap="square" lIns="0" tIns="0" rIns="0" bIns="0" rtlCol="0" anchor="ctr"/>
           <a:lstStyle/>
           <a:p>
-            <a:pPr indent="0" marL="0">
+            <a:pPr marL="0" indent="0">
               <a:buNone/>
             </a:pPr>
             <a:r>
@@ -8657,7 +8530,7 @@
           <a:bodyPr wrap="square" lIns="0" tIns="0" rIns="0" bIns="0" rtlCol="0" anchor="ctr"/>
           <a:lstStyle/>
           <a:p>
-            <a:pPr indent="0" marL="0">
+            <a:pPr marL="0" indent="0">
               <a:buNone/>
             </a:pPr>
             <a:r>
@@ -8802,7 +8675,7 @@
           <a:bodyPr wrap="square" lIns="0" tIns="0" rIns="0" bIns="0" rtlCol="0" anchor="ctr"/>
           <a:lstStyle/>
           <a:p>
-            <a:pPr indent="0" marL="0">
+            <a:pPr marL="0" indent="0">
               <a:buNone/>
             </a:pPr>
             <a:r>
@@ -8841,7 +8714,7 @@
           <a:bodyPr wrap="square" lIns="0" tIns="0" rIns="0" bIns="0" rtlCol="0" anchor="t"/>
           <a:lstStyle/>
           <a:p>
-            <a:pPr indent="0" marL="0">
+            <a:pPr marL="0" indent="0">
               <a:spcAft>
                 <a:spcPts val="600"/>
               </a:spcAft>
@@ -8861,7 +8734,7 @@
             <a:endParaRPr lang="en-US" sz="1250" dirty="0"/>
           </a:p>
           <a:p>
-            <a:pPr indent="0" marL="0">
+            <a:pPr marL="0" indent="0">
               <a:spcAft>
                 <a:spcPts val="600"/>
               </a:spcAft>
@@ -8881,7 +8754,7 @@
             <a:endParaRPr lang="en-US" sz="1250" dirty="0"/>
           </a:p>
           <a:p>
-            <a:pPr indent="0" marL="0">
+            <a:pPr marL="0" indent="0">
               <a:spcAft>
                 <a:spcPts val="600"/>
               </a:spcAft>
@@ -8901,7 +8774,7 @@
             <a:endParaRPr lang="en-US" sz="1250" dirty="0"/>
           </a:p>
           <a:p>
-            <a:pPr indent="0" marL="0">
+            <a:pPr marL="0" indent="0">
               <a:spcAft>
                 <a:spcPts val="600"/>
               </a:spcAft>
@@ -8943,7 +8816,7 @@
           <a:bodyPr wrap="square" lIns="0" tIns="0" rIns="0" bIns="0" rtlCol="0" anchor="ctr"/>
           <a:lstStyle/>
           <a:p>
-            <a:pPr indent="0" marL="0">
+            <a:pPr marL="0" indent="0">
               <a:buNone/>
             </a:pPr>
             <a:r>
@@ -8982,7 +8855,7 @@
           <a:bodyPr wrap="square" lIns="0" tIns="0" rIns="0" bIns="0" rtlCol="0" anchor="ctr"/>
           <a:lstStyle/>
           <a:p>
-            <a:pPr algn="r" indent="0" marL="0">
+            <a:pPr marL="0" indent="0" algn="r">
               <a:buNone/>
             </a:pPr>
             <a:r>
@@ -9016,6 +8889,7 @@
         <a:solidFill>
           <a:srgbClr val="FFFFFF"/>
         </a:solidFill>
+        <a:effectLst/>
       </p:bgPr>
     </p:bg>
     <p:spTree>
@@ -9053,7 +8927,7 @@
           <a:bodyPr wrap="square" lIns="0" tIns="0" rIns="0" bIns="0" rtlCol="0" anchor="ctr"/>
           <a:lstStyle/>
           <a:p>
-            <a:pPr indent="0" marL="0">
+            <a:pPr marL="0" indent="0">
               <a:buNone/>
             </a:pPr>
             <a:r>
@@ -9067,9 +8941,6 @@
               </a:rPr>
               <a:t>04</a:t>
             </a:r>
-            <a:pPr indent="0" marL="0">
-              <a:buNone/>
-            </a:pPr>
             <a:r>
               <a:rPr lang="en-US" sz="1100" dirty="0">
                 <a:solidFill>
@@ -9106,7 +8977,7 @@
           <a:bodyPr wrap="square" lIns="0" tIns="0" rIns="0" bIns="0" rtlCol="0" anchor="t"/>
           <a:lstStyle/>
           <a:p>
-            <a:pPr indent="0" marL="0">
+            <a:pPr marL="0" indent="0">
               <a:buNone/>
             </a:pPr>
             <a:r>
@@ -9145,7 +9016,7 @@
           <a:bodyPr wrap="square" lIns="0" tIns="0" rIns="0" bIns="0" rtlCol="0" anchor="ctr"/>
           <a:lstStyle/>
           <a:p>
-            <a:pPr indent="0" marL="0">
+            <a:pPr marL="0" indent="0">
               <a:buNone/>
             </a:pPr>
             <a:r>
@@ -9311,7 +9182,7 @@
           <a:bodyPr wrap="square" lIns="0" tIns="0" rIns="0" bIns="0" rtlCol="0" anchor="ctr"/>
           <a:lstStyle/>
           <a:p>
-            <a:pPr indent="0" marL="0">
+            <a:pPr marL="0" indent="0">
               <a:buNone/>
             </a:pPr>
             <a:r>
@@ -9498,7 +9369,7 @@
           <a:bodyPr wrap="square" lIns="0" tIns="0" rIns="0" bIns="0" rtlCol="0" anchor="ctr"/>
           <a:lstStyle/>
           <a:p>
-            <a:pPr indent="0" marL="0">
+            <a:pPr marL="0" indent="0">
               <a:buNone/>
             </a:pPr>
             <a:r>
@@ -9664,7 +9535,7 @@
           <a:bodyPr wrap="square" lIns="0" tIns="0" rIns="0" bIns="0" rtlCol="0" anchor="ctr"/>
           <a:lstStyle/>
           <a:p>
-            <a:pPr indent="0" marL="0">
+            <a:pPr marL="0" indent="0">
               <a:buNone/>
             </a:pPr>
             <a:r>
@@ -9703,7 +9574,7 @@
           <a:bodyPr wrap="square" lIns="0" tIns="0" rIns="0" bIns="0" rtlCol="0" anchor="ctr"/>
           <a:lstStyle/>
           <a:p>
-            <a:pPr algn="r" indent="0" marL="0">
+            <a:pPr marL="0" indent="0" algn="r">
               <a:buNone/>
             </a:pPr>
             <a:r>
@@ -9737,6 +9608,7 @@
         <a:solidFill>
           <a:srgbClr val="FFFFFF"/>
         </a:solidFill>
+        <a:effectLst/>
       </p:bgPr>
     </p:bg>
     <p:spTree>
@@ -9774,7 +9646,7 @@
           <a:bodyPr wrap="square" lIns="0" tIns="0" rIns="0" bIns="0" rtlCol="0" anchor="ctr"/>
           <a:lstStyle/>
           <a:p>
-            <a:pPr indent="0" marL="0">
+            <a:pPr marL="0" indent="0">
               <a:buNone/>
             </a:pPr>
             <a:r>
@@ -9788,9 +9660,6 @@
               </a:rPr>
               <a:t>04</a:t>
             </a:r>
-            <a:pPr indent="0" marL="0">
-              <a:buNone/>
-            </a:pPr>
             <a:r>
               <a:rPr lang="en-US" sz="1100" dirty="0">
                 <a:solidFill>
@@ -9827,7 +9696,7 @@
           <a:bodyPr wrap="square" lIns="0" tIns="0" rIns="0" bIns="0" rtlCol="0" anchor="t"/>
           <a:lstStyle/>
           <a:p>
-            <a:pPr indent="0" marL="0">
+            <a:pPr marL="0" indent="0">
               <a:buNone/>
             </a:pPr>
             <a:r>
@@ -9866,7 +9735,7 @@
           <a:bodyPr wrap="square" lIns="0" tIns="0" rIns="0" bIns="0" rtlCol="0" anchor="ctr"/>
           <a:lstStyle/>
           <a:p>
-            <a:pPr indent="0" marL="0">
+            <a:pPr marL="0" indent="0">
               <a:buNone/>
             </a:pPr>
             <a:r>
@@ -9905,7 +9774,7 @@
           <a:bodyPr wrap="square" lIns="0" tIns="0" rIns="0" bIns="0" rtlCol="0" anchor="ctr"/>
           <a:lstStyle/>
           <a:p>
-            <a:pPr indent="0" marL="0">
+            <a:pPr marL="0" indent="0">
               <a:buNone/>
             </a:pPr>
             <a:r>
@@ -9944,7 +9813,7 @@
           <a:bodyPr wrap="square" lIns="0" tIns="0" rIns="0" bIns="0" rtlCol="0" anchor="ctr"/>
           <a:lstStyle/>
           <a:p>
-            <a:pPr indent="0" marL="0">
+            <a:pPr marL="0" indent="0">
               <a:buNone/>
             </a:pPr>
             <a:r>
@@ -9983,7 +9852,7 @@
           <a:bodyPr wrap="square" lIns="0" tIns="0" rIns="0" bIns="0" rtlCol="0" anchor="t"/>
           <a:lstStyle/>
           <a:p>
-            <a:pPr indent="0" marL="0">
+            <a:pPr marL="0" indent="0">
               <a:buNone/>
             </a:pPr>
             <a:r>
@@ -10000,7 +9869,7 @@
             <a:endParaRPr lang="en-US" sz="1100" dirty="0"/>
           </a:p>
           <a:p>
-            <a:pPr indent="0" marL="0">
+            <a:pPr marL="0" indent="0">
               <a:buNone/>
             </a:pPr>
             <a:r>
@@ -10039,7 +9908,7 @@
           <a:bodyPr wrap="square" lIns="0" tIns="0" rIns="0" bIns="0" rtlCol="0" anchor="ctr"/>
           <a:lstStyle/>
           <a:p>
-            <a:pPr indent="0" marL="0">
+            <a:pPr marL="0" indent="0">
               <a:buNone/>
             </a:pPr>
             <a:r>
@@ -10078,7 +9947,7 @@
           <a:bodyPr wrap="square" lIns="0" tIns="0" rIns="0" bIns="0" rtlCol="0" anchor="ctr"/>
           <a:lstStyle/>
           <a:p>
-            <a:pPr indent="0" marL="0">
+            <a:pPr marL="0" indent="0">
               <a:buNone/>
             </a:pPr>
             <a:r>
@@ -10117,7 +9986,7 @@
           <a:bodyPr wrap="square" lIns="0" tIns="0" rIns="0" bIns="0" rtlCol="0" anchor="t"/>
           <a:lstStyle/>
           <a:p>
-            <a:pPr indent="0" marL="0">
+            <a:pPr marL="0" indent="0">
               <a:buNone/>
             </a:pPr>
             <a:r>
@@ -10134,7 +10003,7 @@
             <a:endParaRPr lang="en-US" sz="1100" dirty="0"/>
           </a:p>
           <a:p>
-            <a:pPr indent="0" marL="0">
+            <a:pPr marL="0" indent="0">
               <a:buNone/>
             </a:pPr>
             <a:r>
@@ -10173,7 +10042,7 @@
           <a:bodyPr wrap="square" lIns="0" tIns="0" rIns="0" bIns="0" rtlCol="0" anchor="ctr"/>
           <a:lstStyle/>
           <a:p>
-            <a:pPr indent="0" marL="0">
+            <a:pPr marL="0" indent="0">
               <a:buNone/>
             </a:pPr>
             <a:r>
@@ -10212,7 +10081,7 @@
           <a:bodyPr wrap="square" lIns="0" tIns="0" rIns="0" bIns="0" rtlCol="0" anchor="ctr"/>
           <a:lstStyle/>
           <a:p>
-            <a:pPr indent="0" marL="0">
+            <a:pPr marL="0" indent="0">
               <a:buNone/>
             </a:pPr>
             <a:r>
@@ -10251,7 +10120,7 @@
           <a:bodyPr wrap="square" lIns="0" tIns="0" rIns="0" bIns="0" rtlCol="0" anchor="t"/>
           <a:lstStyle/>
           <a:p>
-            <a:pPr indent="0" marL="0">
+            <a:pPr marL="0" indent="0">
               <a:buNone/>
             </a:pPr>
             <a:r>
@@ -10268,7 +10137,7 @@
             <a:endParaRPr lang="en-US" sz="1100" dirty="0"/>
           </a:p>
           <a:p>
-            <a:pPr indent="0" marL="0">
+            <a:pPr marL="0" indent="0">
               <a:buNone/>
             </a:pPr>
             <a:r>
@@ -10307,7 +10176,7 @@
           <a:bodyPr wrap="square" lIns="0" tIns="0" rIns="0" bIns="0" rtlCol="0" anchor="ctr"/>
           <a:lstStyle/>
           <a:p>
-            <a:pPr indent="0" marL="0">
+            <a:pPr marL="0" indent="0">
               <a:buNone/>
             </a:pPr>
             <a:r>
@@ -10346,7 +10215,7 @@
           <a:bodyPr wrap="square" lIns="0" tIns="0" rIns="0" bIns="0" rtlCol="0" anchor="ctr"/>
           <a:lstStyle/>
           <a:p>
-            <a:pPr indent="0" marL="0">
+            <a:pPr marL="0" indent="0">
               <a:buNone/>
             </a:pPr>
             <a:r>
@@ -10385,7 +10254,7 @@
           <a:bodyPr wrap="square" lIns="0" tIns="0" rIns="0" bIns="0" rtlCol="0" anchor="t"/>
           <a:lstStyle/>
           <a:p>
-            <a:pPr indent="0" marL="0">
+            <a:pPr marL="0" indent="0">
               <a:buNone/>
             </a:pPr>
             <a:r>
@@ -10402,7 +10271,7 @@
             <a:endParaRPr lang="en-US" sz="1100" dirty="0"/>
           </a:p>
           <a:p>
-            <a:pPr indent="0" marL="0">
+            <a:pPr marL="0" indent="0">
               <a:buNone/>
             </a:pPr>
             <a:r>
@@ -10443,8 +10312,20 @@
             <a:tbl>
               <a:tblPr/>
               <a:tblGrid>
-                <a:gridCol w="1737360"/>
-                <a:gridCol w="9171432"/>
+                <a:gridCol w="1737360">
+                  <a:extLst>
+                    <a:ext uri="{9D8B030D-6E8A-4147-A177-3AD203B41FA5}">
+                      <a16:colId xmlns:a16="http://schemas.microsoft.com/office/drawing/2014/main" val="20000"/>
+                    </a:ext>
+                  </a:extLst>
+                </a:gridCol>
+                <a:gridCol w="9171432">
+                  <a:extLst>
+                    <a:ext uri="{9D8B030D-6E8A-4147-A177-3AD203B41FA5}">
+                      <a16:colId xmlns:a16="http://schemas.microsoft.com/office/drawing/2014/main" val="20001"/>
+                    </a:ext>
+                  </a:extLst>
+                </a:gridCol>
               </a:tblGrid>
               <a:tr h="338328">
                 <a:tc>
@@ -10452,7 +10333,7 @@
                     <a:bodyPr/>
                     <a:lstStyle/>
                     <a:p>
-                      <a:pPr indent="0" marL="0">
+                      <a:pPr marL="0" indent="0">
                         <a:buNone/>
                       </a:pPr>
                       <a:r>
@@ -10520,7 +10401,7 @@
                     <a:bodyPr/>
                     <a:lstStyle/>
                     <a:p>
-                      <a:pPr indent="0" marL="0">
+                      <a:pPr marL="0" indent="0">
                         <a:buNone/>
                       </a:pPr>
                       <a:r>
@@ -10583,6 +10464,11 @@
                     </a:solidFill>
                   </a:tcPr>
                 </a:tc>
+                <a:extLst>
+                  <a:ext uri="{0D108BD9-81ED-4DB2-BD59-A6C34878D82A}">
+                    <a16:rowId xmlns:a16="http://schemas.microsoft.com/office/drawing/2014/main" val="10000"/>
+                  </a:ext>
+                </a:extLst>
               </a:tr>
               <a:tr h="338328">
                 <a:tc>
@@ -10590,7 +10476,7 @@
                     <a:bodyPr/>
                     <a:lstStyle/>
                     <a:p>
-                      <a:pPr indent="0" marL="0">
+                      <a:pPr marL="0" indent="0">
                         <a:buNone/>
                       </a:pPr>
                       <a:r>
@@ -10655,7 +10541,7 @@
                     <a:bodyPr/>
                     <a:lstStyle/>
                     <a:p>
-                      <a:pPr indent="0" marL="0">
+                      <a:pPr marL="0" indent="0">
                         <a:buNone/>
                       </a:pPr>
                       <a:r>
@@ -10715,6 +10601,11 @@
                     </a:lnB>
                   </a:tcPr>
                 </a:tc>
+                <a:extLst>
+                  <a:ext uri="{0D108BD9-81ED-4DB2-BD59-A6C34878D82A}">
+                    <a16:rowId xmlns:a16="http://schemas.microsoft.com/office/drawing/2014/main" val="10001"/>
+                  </a:ext>
+                </a:extLst>
               </a:tr>
               <a:tr h="338328">
                 <a:tc>
@@ -10722,7 +10613,7 @@
                     <a:bodyPr/>
                     <a:lstStyle/>
                     <a:p>
-                      <a:pPr indent="0" marL="0">
+                      <a:pPr marL="0" indent="0">
                         <a:buNone/>
                       </a:pPr>
                       <a:r>
@@ -10787,7 +10678,7 @@
                     <a:bodyPr/>
                     <a:lstStyle/>
                     <a:p>
-                      <a:pPr indent="0" marL="0">
+                      <a:pPr marL="0" indent="0">
                         <a:buNone/>
                       </a:pPr>
                       <a:r>
@@ -10847,6 +10738,11 @@
                     </a:lnB>
                   </a:tcPr>
                 </a:tc>
+                <a:extLst>
+                  <a:ext uri="{0D108BD9-81ED-4DB2-BD59-A6C34878D82A}">
+                    <a16:rowId xmlns:a16="http://schemas.microsoft.com/office/drawing/2014/main" val="10002"/>
+                  </a:ext>
+                </a:extLst>
               </a:tr>
               <a:tr h="338328">
                 <a:tc>
@@ -10854,7 +10750,7 @@
                     <a:bodyPr/>
                     <a:lstStyle/>
                     <a:p>
-                      <a:pPr indent="0" marL="0">
+                      <a:pPr marL="0" indent="0">
                         <a:buNone/>
                       </a:pPr>
                       <a:r>
@@ -10919,7 +10815,7 @@
                     <a:bodyPr/>
                     <a:lstStyle/>
                     <a:p>
-                      <a:pPr indent="0" marL="0">
+                      <a:pPr marL="0" indent="0">
                         <a:buNone/>
                       </a:pPr>
                       <a:r>
@@ -10979,6 +10875,11 @@
                     </a:lnB>
                   </a:tcPr>
                 </a:tc>
+                <a:extLst>
+                  <a:ext uri="{0D108BD9-81ED-4DB2-BD59-A6C34878D82A}">
+                    <a16:rowId xmlns:a16="http://schemas.microsoft.com/office/drawing/2014/main" val="10003"/>
+                  </a:ext>
+                </a:extLst>
               </a:tr>
               <a:tr h="338328">
                 <a:tc>
@@ -10986,7 +10887,7 @@
                     <a:bodyPr/>
                     <a:lstStyle/>
                     <a:p>
-                      <a:pPr indent="0" marL="0">
+                      <a:pPr marL="0" indent="0">
                         <a:buNone/>
                       </a:pPr>
                       <a:r>
@@ -11051,7 +10952,7 @@
                     <a:bodyPr/>
                     <a:lstStyle/>
                     <a:p>
-                      <a:pPr indent="0" marL="0">
+                      <a:pPr marL="0" indent="0">
                         <a:buNone/>
                       </a:pPr>
                       <a:r>
@@ -11111,6 +11012,11 @@
                     </a:lnB>
                   </a:tcPr>
                 </a:tc>
+                <a:extLst>
+                  <a:ext uri="{0D108BD9-81ED-4DB2-BD59-A6C34878D82A}">
+                    <a16:rowId xmlns:a16="http://schemas.microsoft.com/office/drawing/2014/main" val="10004"/>
+                  </a:ext>
+                </a:extLst>
               </a:tr>
               <a:tr h="338328">
                 <a:tc>
@@ -11118,7 +11024,7 @@
                     <a:bodyPr/>
                     <a:lstStyle/>
                     <a:p>
-                      <a:pPr indent="0" marL="0">
+                      <a:pPr marL="0" indent="0">
                         <a:buNone/>
                       </a:pPr>
                       <a:r>
@@ -11183,7 +11089,7 @@
                     <a:bodyPr/>
                     <a:lstStyle/>
                     <a:p>
-                      <a:pPr indent="0" marL="0">
+                      <a:pPr marL="0" indent="0">
                         <a:buNone/>
                       </a:pPr>
                       <a:r>
@@ -11243,6 +11149,11 @@
                     </a:lnB>
                   </a:tcPr>
                 </a:tc>
+                <a:extLst>
+                  <a:ext uri="{0D108BD9-81ED-4DB2-BD59-A6C34878D82A}">
+                    <a16:rowId xmlns:a16="http://schemas.microsoft.com/office/drawing/2014/main" val="10005"/>
+                  </a:ext>
+                </a:extLst>
               </a:tr>
               <a:tr h="338328">
                 <a:tc>
@@ -11250,7 +11161,7 @@
                     <a:bodyPr/>
                     <a:lstStyle/>
                     <a:p>
-                      <a:pPr indent="0" marL="0">
+                      <a:pPr marL="0" indent="0">
                         <a:buNone/>
                       </a:pPr>
                       <a:r>
@@ -11315,7 +11226,7 @@
                     <a:bodyPr/>
                     <a:lstStyle/>
                     <a:p>
-                      <a:pPr indent="0" marL="0">
+                      <a:pPr marL="0" indent="0">
                         <a:buNone/>
                       </a:pPr>
                       <a:r>
@@ -11375,6 +11286,11 @@
                     </a:lnB>
                   </a:tcPr>
                 </a:tc>
+                <a:extLst>
+                  <a:ext uri="{0D108BD9-81ED-4DB2-BD59-A6C34878D82A}">
+                    <a16:rowId xmlns:a16="http://schemas.microsoft.com/office/drawing/2014/main" val="10006"/>
+                  </a:ext>
+                </a:extLst>
               </a:tr>
               <a:tr h="338328">
                 <a:tc>
@@ -11382,7 +11298,7 @@
                     <a:bodyPr/>
                     <a:lstStyle/>
                     <a:p>
-                      <a:pPr indent="0" marL="0">
+                      <a:pPr marL="0" indent="0">
                         <a:buNone/>
                       </a:pPr>
                       <a:r>
@@ -11447,7 +11363,7 @@
                     <a:bodyPr/>
                     <a:lstStyle/>
                     <a:p>
-                      <a:pPr indent="0" marL="0">
+                      <a:pPr marL="0" indent="0">
                         <a:buNone/>
                       </a:pPr>
                       <a:r>
@@ -11507,6 +11423,11 @@
                     </a:lnB>
                   </a:tcPr>
                 </a:tc>
+                <a:extLst>
+                  <a:ext uri="{0D108BD9-81ED-4DB2-BD59-A6C34878D82A}">
+                    <a16:rowId xmlns:a16="http://schemas.microsoft.com/office/drawing/2014/main" val="10007"/>
+                  </a:ext>
+                </a:extLst>
               </a:tr>
             </a:tbl>
           </a:graphicData>
@@ -11514,7 +11435,7 @@
       </p:graphicFrame>
       <p:sp>
         <p:nvSpPr>
-          <p:cNvPr id="18" name="Text 15"/>
+          <p:cNvPr id="17" name="Text 15"/>
           <p:cNvSpPr txBox="1"/>
           <p:nvPr/>
         </p:nvSpPr>
@@ -11533,7 +11454,7 @@
           <a:bodyPr wrap="square" lIns="0" tIns="0" rIns="0" bIns="0" rtlCol="0" anchor="ctr"/>
           <a:lstStyle/>
           <a:p>
-            <a:pPr indent="0" marL="0">
+            <a:pPr marL="0" indent="0">
               <a:buNone/>
             </a:pPr>
             <a:r>
@@ -11572,7 +11493,7 @@
           <a:bodyPr wrap="square" lIns="0" tIns="0" rIns="0" bIns="0" rtlCol="0" anchor="ctr"/>
           <a:lstStyle/>
           <a:p>
-            <a:pPr algn="r" indent="0" marL="0">
+            <a:pPr marL="0" indent="0" algn="r">
               <a:buNone/>
             </a:pPr>
             <a:r>
@@ -11606,6 +11527,7 @@
         <a:solidFill>
           <a:srgbClr val="FFFFFF"/>
         </a:solidFill>
+        <a:effectLst/>
       </p:bgPr>
     </p:bg>
     <p:spTree>
@@ -11643,7 +11565,7 @@
           <a:bodyPr wrap="square" lIns="0" tIns="0" rIns="0" bIns="0" rtlCol="0" anchor="ctr"/>
           <a:lstStyle/>
           <a:p>
-            <a:pPr indent="0" marL="0">
+            <a:pPr marL="0" indent="0">
               <a:buNone/>
             </a:pPr>
             <a:r>
@@ -11657,9 +11579,6 @@
               </a:rPr>
               <a:t>04</a:t>
             </a:r>
-            <a:pPr indent="0" marL="0">
-              <a:buNone/>
-            </a:pPr>
             <a:r>
               <a:rPr lang="en-US" sz="1100" dirty="0">
                 <a:solidFill>
@@ -11696,7 +11615,7 @@
           <a:bodyPr wrap="square" lIns="0" tIns="0" rIns="0" bIns="0" rtlCol="0" anchor="t"/>
           <a:lstStyle/>
           <a:p>
-            <a:pPr indent="0" marL="0">
+            <a:pPr marL="0" indent="0">
               <a:buNone/>
             </a:pPr>
             <a:r>
@@ -11735,7 +11654,7 @@
           <a:bodyPr wrap="square" lIns="0" tIns="0" rIns="0" bIns="0" rtlCol="0" anchor="ctr"/>
           <a:lstStyle/>
           <a:p>
-            <a:pPr indent="0" marL="0">
+            <a:pPr marL="0" indent="0">
               <a:buNone/>
             </a:pPr>
             <a:r>
@@ -11776,10 +11695,34 @@
             <a:tbl>
               <a:tblPr/>
               <a:tblGrid>
-                <a:gridCol w="1463040"/>
-                <a:gridCol w="2743200"/>
-                <a:gridCol w="2743200"/>
-                <a:gridCol w="3959352"/>
+                <a:gridCol w="1463040">
+                  <a:extLst>
+                    <a:ext uri="{9D8B030D-6E8A-4147-A177-3AD203B41FA5}">
+                      <a16:colId xmlns:a16="http://schemas.microsoft.com/office/drawing/2014/main" val="20000"/>
+                    </a:ext>
+                  </a:extLst>
+                </a:gridCol>
+                <a:gridCol w="2743200">
+                  <a:extLst>
+                    <a:ext uri="{9D8B030D-6E8A-4147-A177-3AD203B41FA5}">
+                      <a16:colId xmlns:a16="http://schemas.microsoft.com/office/drawing/2014/main" val="20001"/>
+                    </a:ext>
+                  </a:extLst>
+                </a:gridCol>
+                <a:gridCol w="2743200">
+                  <a:extLst>
+                    <a:ext uri="{9D8B030D-6E8A-4147-A177-3AD203B41FA5}">
+                      <a16:colId xmlns:a16="http://schemas.microsoft.com/office/drawing/2014/main" val="20002"/>
+                    </a:ext>
+                  </a:extLst>
+                </a:gridCol>
+                <a:gridCol w="3959352">
+                  <a:extLst>
+                    <a:ext uri="{9D8B030D-6E8A-4147-A177-3AD203B41FA5}">
+                      <a16:colId xmlns:a16="http://schemas.microsoft.com/office/drawing/2014/main" val="20003"/>
+                    </a:ext>
+                  </a:extLst>
+                </a:gridCol>
               </a:tblGrid>
               <a:tr h="502920">
                 <a:tc>
@@ -11787,7 +11730,7 @@
                     <a:bodyPr/>
                     <a:lstStyle/>
                     <a:p>
-                      <a:pPr indent="0" marL="0">
+                      <a:pPr marL="0" indent="0">
                         <a:buNone/>
                       </a:pPr>
                       <a:r>
@@ -11855,7 +11798,7 @@
                     <a:bodyPr/>
                     <a:lstStyle/>
                     <a:p>
-                      <a:pPr indent="0" marL="0">
+                      <a:pPr marL="0" indent="0">
                         <a:buNone/>
                       </a:pPr>
                       <a:r>
@@ -11923,7 +11866,7 @@
                     <a:bodyPr/>
                     <a:lstStyle/>
                     <a:p>
-                      <a:pPr indent="0" marL="0">
+                      <a:pPr marL="0" indent="0">
                         <a:buNone/>
                       </a:pPr>
                       <a:r>
@@ -11991,7 +11934,7 @@
                     <a:bodyPr/>
                     <a:lstStyle/>
                     <a:p>
-                      <a:pPr indent="0" marL="0">
+                      <a:pPr marL="0" indent="0">
                         <a:buNone/>
                       </a:pPr>
                       <a:r>
@@ -12054,6 +11997,11 @@
                     </a:solidFill>
                   </a:tcPr>
                 </a:tc>
+                <a:extLst>
+                  <a:ext uri="{0D108BD9-81ED-4DB2-BD59-A6C34878D82A}">
+                    <a16:rowId xmlns:a16="http://schemas.microsoft.com/office/drawing/2014/main" val="10000"/>
+                  </a:ext>
+                </a:extLst>
               </a:tr>
               <a:tr h="502920">
                 <a:tc>
@@ -12061,7 +12009,7 @@
                     <a:bodyPr/>
                     <a:lstStyle/>
                     <a:p>
-                      <a:pPr indent="0" marL="0">
+                      <a:pPr marL="0" indent="0">
                         <a:buNone/>
                       </a:pPr>
                       <a:r>
@@ -12126,7 +12074,7 @@
                     <a:bodyPr/>
                     <a:lstStyle/>
                     <a:p>
-                      <a:pPr indent="0" marL="0">
+                      <a:pPr marL="0" indent="0">
                         <a:buNone/>
                       </a:pPr>
                       <a:r>
@@ -12191,7 +12139,7 @@
                     <a:bodyPr/>
                     <a:lstStyle/>
                     <a:p>
-                      <a:pPr indent="0" marL="0">
+                      <a:pPr marL="0" indent="0">
                         <a:buNone/>
                       </a:pPr>
                       <a:r>
@@ -12256,7 +12204,7 @@
                     <a:bodyPr/>
                     <a:lstStyle/>
                     <a:p>
-                      <a:pPr indent="0" marL="0">
+                      <a:pPr marL="0" indent="0">
                         <a:buNone/>
                       </a:pPr>
                       <a:r>
@@ -12316,6 +12264,11 @@
                     </a:lnB>
                   </a:tcPr>
                 </a:tc>
+                <a:extLst>
+                  <a:ext uri="{0D108BD9-81ED-4DB2-BD59-A6C34878D82A}">
+                    <a16:rowId xmlns:a16="http://schemas.microsoft.com/office/drawing/2014/main" val="10001"/>
+                  </a:ext>
+                </a:extLst>
               </a:tr>
               <a:tr h="502920">
                 <a:tc>
@@ -12323,7 +12276,7 @@
                     <a:bodyPr/>
                     <a:lstStyle/>
                     <a:p>
-                      <a:pPr indent="0" marL="0">
+                      <a:pPr marL="0" indent="0">
                         <a:buNone/>
                       </a:pPr>
                       <a:r>
@@ -12388,7 +12341,7 @@
                     <a:bodyPr/>
                     <a:lstStyle/>
                     <a:p>
-                      <a:pPr indent="0" marL="0">
+                      <a:pPr marL="0" indent="0">
                         <a:buNone/>
                       </a:pPr>
                       <a:r>
@@ -12453,7 +12406,7 @@
                     <a:bodyPr/>
                     <a:lstStyle/>
                     <a:p>
-                      <a:pPr indent="0" marL="0">
+                      <a:pPr marL="0" indent="0">
                         <a:buNone/>
                       </a:pPr>
                       <a:r>
@@ -12518,7 +12471,7 @@
                     <a:bodyPr/>
                     <a:lstStyle/>
                     <a:p>
-                      <a:pPr indent="0" marL="0">
+                      <a:pPr marL="0" indent="0">
                         <a:buNone/>
                       </a:pPr>
                       <a:r>
@@ -12578,6 +12531,11 @@
                     </a:lnB>
                   </a:tcPr>
                 </a:tc>
+                <a:extLst>
+                  <a:ext uri="{0D108BD9-81ED-4DB2-BD59-A6C34878D82A}">
+                    <a16:rowId xmlns:a16="http://schemas.microsoft.com/office/drawing/2014/main" val="10002"/>
+                  </a:ext>
+                </a:extLst>
               </a:tr>
               <a:tr h="502920">
                 <a:tc>
@@ -12585,7 +12543,7 @@
                     <a:bodyPr/>
                     <a:lstStyle/>
                     <a:p>
-                      <a:pPr indent="0" marL="0">
+                      <a:pPr marL="0" indent="0">
                         <a:buNone/>
                       </a:pPr>
                       <a:r>
@@ -12650,7 +12608,7 @@
                     <a:bodyPr/>
                     <a:lstStyle/>
                     <a:p>
-                      <a:pPr indent="0" marL="0">
+                      <a:pPr marL="0" indent="0">
                         <a:buNone/>
                       </a:pPr>
                       <a:r>
@@ -12715,7 +12673,7 @@
                     <a:bodyPr/>
                     <a:lstStyle/>
                     <a:p>
-                      <a:pPr indent="0" marL="0">
+                      <a:pPr marL="0" indent="0">
                         <a:buNone/>
                       </a:pPr>
                       <a:r>
@@ -12780,7 +12738,7 @@
                     <a:bodyPr/>
                     <a:lstStyle/>
                     <a:p>
-                      <a:pPr indent="0" marL="0">
+                      <a:pPr marL="0" indent="0">
                         <a:buNone/>
                       </a:pPr>
                       <a:r>
@@ -12840,6 +12798,11 @@
                     </a:lnB>
                   </a:tcPr>
                 </a:tc>
+                <a:extLst>
+                  <a:ext uri="{0D108BD9-81ED-4DB2-BD59-A6C34878D82A}">
+                    <a16:rowId xmlns:a16="http://schemas.microsoft.com/office/drawing/2014/main" val="10003"/>
+                  </a:ext>
+                </a:extLst>
               </a:tr>
               <a:tr h="502920">
                 <a:tc>
@@ -12847,7 +12810,7 @@
                     <a:bodyPr/>
                     <a:lstStyle/>
                     <a:p>
-                      <a:pPr indent="0" marL="0">
+                      <a:pPr marL="0" indent="0">
                         <a:buNone/>
                       </a:pPr>
                       <a:r>
@@ -12912,7 +12875,7 @@
                     <a:bodyPr/>
                     <a:lstStyle/>
                     <a:p>
-                      <a:pPr indent="0" marL="0">
+                      <a:pPr marL="0" indent="0">
                         <a:buNone/>
                       </a:pPr>
                       <a:r>
@@ -12977,7 +12940,7 @@
                     <a:bodyPr/>
                     <a:lstStyle/>
                     <a:p>
-                      <a:pPr indent="0" marL="0">
+                      <a:pPr marL="0" indent="0">
                         <a:buNone/>
                       </a:pPr>
                       <a:r>
@@ -13042,7 +13005,7 @@
                     <a:bodyPr/>
                     <a:lstStyle/>
                     <a:p>
-                      <a:pPr indent="0" marL="0">
+                      <a:pPr marL="0" indent="0">
                         <a:buNone/>
                       </a:pPr>
                       <a:r>
@@ -13102,6 +13065,11 @@
                     </a:lnB>
                   </a:tcPr>
                 </a:tc>
+                <a:extLst>
+                  <a:ext uri="{0D108BD9-81ED-4DB2-BD59-A6C34878D82A}">
+                    <a16:rowId xmlns:a16="http://schemas.microsoft.com/office/drawing/2014/main" val="10004"/>
+                  </a:ext>
+                </a:extLst>
               </a:tr>
               <a:tr h="502920">
                 <a:tc>
@@ -13109,7 +13077,7 @@
                     <a:bodyPr/>
                     <a:lstStyle/>
                     <a:p>
-                      <a:pPr indent="0" marL="0">
+                      <a:pPr marL="0" indent="0">
                         <a:buNone/>
                       </a:pPr>
                       <a:r>
@@ -13174,7 +13142,7 @@
                     <a:bodyPr/>
                     <a:lstStyle/>
                     <a:p>
-                      <a:pPr indent="0" marL="0">
+                      <a:pPr marL="0" indent="0">
                         <a:buNone/>
                       </a:pPr>
                       <a:r>
@@ -13239,7 +13207,7 @@
                     <a:bodyPr/>
                     <a:lstStyle/>
                     <a:p>
-                      <a:pPr indent="0" marL="0">
+                      <a:pPr marL="0" indent="0">
                         <a:buNone/>
                       </a:pPr>
                       <a:r>
@@ -13304,7 +13272,7 @@
                     <a:bodyPr/>
                     <a:lstStyle/>
                     <a:p>
-                      <a:pPr indent="0" marL="0">
+                      <a:pPr marL="0" indent="0">
                         <a:buNone/>
                       </a:pPr>
                       <a:r>
@@ -13364,6 +13332,11 @@
                     </a:lnB>
                   </a:tcPr>
                 </a:tc>
+                <a:extLst>
+                  <a:ext uri="{0D108BD9-81ED-4DB2-BD59-A6C34878D82A}">
+                    <a16:rowId xmlns:a16="http://schemas.microsoft.com/office/drawing/2014/main" val="10005"/>
+                  </a:ext>
+                </a:extLst>
               </a:tr>
             </a:tbl>
           </a:graphicData>
@@ -13390,7 +13363,7 @@
           <a:bodyPr wrap="square" lIns="0" tIns="0" rIns="0" bIns="0" rtlCol="0" anchor="ctr"/>
           <a:lstStyle/>
           <a:p>
-            <a:pPr indent="0" marL="0">
+            <a:pPr marL="0" indent="0">
               <a:buNone/>
             </a:pPr>
             <a:r>
@@ -13429,7 +13402,7 @@
           <a:bodyPr wrap="square" lIns="0" tIns="0" rIns="0" bIns="0" rtlCol="0" anchor="t"/>
           <a:lstStyle/>
           <a:p>
-            <a:pPr indent="0" marL="0">
+            <a:pPr marL="0" indent="0">
               <a:spcAft>
                 <a:spcPts val="600"/>
               </a:spcAft>
@@ -13471,7 +13444,7 @@
           <a:bodyPr wrap="square" lIns="0" tIns="0" rIns="0" bIns="0" rtlCol="0" anchor="ctr"/>
           <a:lstStyle/>
           <a:p>
-            <a:pPr indent="0" marL="0">
+            <a:pPr marL="0" indent="0">
               <a:buNone/>
             </a:pPr>
             <a:r>
@@ -13510,7 +13483,7 @@
           <a:bodyPr wrap="square" lIns="0" tIns="0" rIns="0" bIns="0" rtlCol="0" anchor="ctr"/>
           <a:lstStyle/>
           <a:p>
-            <a:pPr algn="r" indent="0" marL="0">
+            <a:pPr marL="0" indent="0" algn="r">
               <a:buNone/>
             </a:pPr>
             <a:r>
@@ -13544,6 +13517,7 @@
         <a:solidFill>
           <a:srgbClr val="FFFFFF"/>
         </a:solidFill>
+        <a:effectLst/>
       </p:bgPr>
     </p:bg>
     <p:spTree>
@@ -13581,7 +13555,7 @@
           <a:bodyPr wrap="square" lIns="0" tIns="0" rIns="0" bIns="0" rtlCol="0" anchor="ctr"/>
           <a:lstStyle/>
           <a:p>
-            <a:pPr indent="0" marL="0">
+            <a:pPr marL="0" indent="0">
               <a:buNone/>
             </a:pPr>
             <a:r>
@@ -13595,9 +13569,6 @@
               </a:rPr>
               <a:t>04</a:t>
             </a:r>
-            <a:pPr indent="0" marL="0">
-              <a:buNone/>
-            </a:pPr>
             <a:r>
               <a:rPr lang="en-US" sz="1100" dirty="0">
                 <a:solidFill>
@@ -13634,7 +13605,7 @@
           <a:bodyPr wrap="square" lIns="0" tIns="0" rIns="0" bIns="0" rtlCol="0" anchor="t"/>
           <a:lstStyle/>
           <a:p>
-            <a:pPr indent="0" marL="0">
+            <a:pPr marL="0" indent="0">
               <a:buNone/>
             </a:pPr>
             <a:r>
@@ -13673,7 +13644,7 @@
           <a:bodyPr wrap="square" lIns="0" tIns="0" rIns="0" bIns="0" rtlCol="0" anchor="ctr"/>
           <a:lstStyle/>
           <a:p>
-            <a:pPr indent="0" marL="0">
+            <a:pPr marL="0" indent="0">
               <a:buNone/>
             </a:pPr>
             <a:r>
@@ -13717,7 +13688,7 @@
           <a:bodyPr wrap="square" rtlCol="0" anchor="ctr"/>
           <a:lstStyle/>
           <a:p>
-            <a:pPr algn="ctr" indent="0" marL="0">
+            <a:pPr marL="0" indent="0" algn="ctr">
               <a:buNone/>
             </a:pPr>
             <a:r>
@@ -13756,7 +13727,7 @@
           <a:bodyPr wrap="square" lIns="0" tIns="0" rIns="0" bIns="0" rtlCol="0" anchor="ctr"/>
           <a:lstStyle/>
           <a:p>
-            <a:pPr indent="0" marL="0">
+            <a:pPr marL="0" indent="0">
               <a:buNone/>
             </a:pPr>
             <a:r>
@@ -13795,7 +13766,7 @@
           <a:bodyPr wrap="square" lIns="0" tIns="0" rIns="0" bIns="0" rtlCol="0" anchor="t"/>
           <a:lstStyle/>
           <a:p>
-            <a:pPr indent="0" marL="0">
+            <a:pPr marL="0" indent="0">
               <a:spcAft>
                 <a:spcPts val="600"/>
               </a:spcAft>
@@ -13815,7 +13786,7 @@
             <a:endParaRPr lang="en-US" sz="1250" dirty="0"/>
           </a:p>
           <a:p>
-            <a:pPr indent="0" marL="0">
+            <a:pPr marL="0" indent="0">
               <a:spcAft>
                 <a:spcPts val="600"/>
               </a:spcAft>
@@ -13857,7 +13828,7 @@
           <a:bodyPr wrap="square" lIns="0" tIns="0" rIns="0" bIns="0" rtlCol="0" anchor="ctr"/>
           <a:lstStyle/>
           <a:p>
-            <a:pPr indent="0" marL="0">
+            <a:pPr marL="0" indent="0">
               <a:buNone/>
             </a:pPr>
             <a:r>
@@ -13896,7 +13867,7 @@
           <a:bodyPr wrap="square" lIns="0" tIns="0" rIns="0" bIns="0" rtlCol="0" anchor="ctr"/>
           <a:lstStyle/>
           <a:p>
-            <a:pPr algn="r" indent="0" marL="0">
+            <a:pPr marL="0" indent="0" algn="r">
               <a:buNone/>
             </a:pPr>
             <a:r>
@@ -13930,6 +13901,7 @@
         <a:solidFill>
           <a:srgbClr val="FFFFFF"/>
         </a:solidFill>
+        <a:effectLst/>
       </p:bgPr>
     </p:bg>
     <p:spTree>
@@ -13967,7 +13939,7 @@
           <a:bodyPr wrap="square" lIns="0" tIns="0" rIns="0" bIns="0" rtlCol="0" anchor="ctr"/>
           <a:lstStyle/>
           <a:p>
-            <a:pPr indent="0" marL="0">
+            <a:pPr marL="0" indent="0">
               <a:buNone/>
             </a:pPr>
             <a:r>
@@ -13981,9 +13953,6 @@
               </a:rPr>
               <a:t>00</a:t>
             </a:r>
-            <a:pPr indent="0" marL="0">
-              <a:buNone/>
-            </a:pPr>
             <a:r>
               <a:rPr lang="en-US" sz="1100" dirty="0">
                 <a:solidFill>
@@ -14020,7 +13989,7 @@
           <a:bodyPr wrap="square" lIns="0" tIns="0" rIns="0" bIns="0" rtlCol="0" anchor="t"/>
           <a:lstStyle/>
           <a:p>
-            <a:pPr indent="0" marL="0">
+            <a:pPr marL="0" indent="0">
               <a:buNone/>
             </a:pPr>
             <a:r>
@@ -14040,7 +14009,7 @@
       </p:sp>
       <p:graphicFrame>
         <p:nvGraphicFramePr>
-          <p:cNvPr id="3" name="Table 0"/>
+          <p:cNvPr id="4" name="Table 0"/>
           <p:cNvGraphicFramePr>
             <a:graphicFrameLocks noGrp="1"/>
           </p:cNvGraphicFramePr>
@@ -14054,16 +14023,34 @@
         </p:nvGraphicFramePr>
         <p:xfrm>
           <a:off x="640080" y="1920240"/>
-          <a:ext cx="10908792" cy="914400"/>
+          <a:ext cx="10908792" cy="2834640"/>
         </p:xfrm>
         <a:graphic>
           <a:graphicData uri="http://schemas.openxmlformats.org/drawingml/2006/table">
             <a:tbl>
               <a:tblPr/>
               <a:tblGrid>
-                <a:gridCol w="822960"/>
-                <a:gridCol w="4206240"/>
-                <a:gridCol w="5879592"/>
+                <a:gridCol w="822960">
+                  <a:extLst>
+                    <a:ext uri="{9D8B030D-6E8A-4147-A177-3AD203B41FA5}">
+                      <a16:colId xmlns:a16="http://schemas.microsoft.com/office/drawing/2014/main" val="20000"/>
+                    </a:ext>
+                  </a:extLst>
+                </a:gridCol>
+                <a:gridCol w="4206240">
+                  <a:extLst>
+                    <a:ext uri="{9D8B030D-6E8A-4147-A177-3AD203B41FA5}">
+                      <a16:colId xmlns:a16="http://schemas.microsoft.com/office/drawing/2014/main" val="20001"/>
+                    </a:ext>
+                  </a:extLst>
+                </a:gridCol>
+                <a:gridCol w="5879592">
+                  <a:extLst>
+                    <a:ext uri="{9D8B030D-6E8A-4147-A177-3AD203B41FA5}">
+                      <a16:colId xmlns:a16="http://schemas.microsoft.com/office/drawing/2014/main" val="20002"/>
+                    </a:ext>
+                  </a:extLst>
+                </a:gridCol>
               </a:tblGrid>
               <a:tr h="566928">
                 <a:tc>
@@ -14071,7 +14058,7 @@
                     <a:bodyPr/>
                     <a:lstStyle/>
                     <a:p>
-                      <a:pPr indent="0" marL="0">
+                      <a:pPr marL="0" indent="0">
                         <a:buNone/>
                       </a:pPr>
                       <a:r>
@@ -14136,7 +14123,7 @@
                     <a:bodyPr/>
                     <a:lstStyle/>
                     <a:p>
-                      <a:pPr indent="0" marL="0">
+                      <a:pPr marL="0" indent="0">
                         <a:buNone/>
                       </a:pPr>
                       <a:r>
@@ -14201,7 +14188,7 @@
                     <a:bodyPr/>
                     <a:lstStyle/>
                     <a:p>
-                      <a:pPr algn="r" indent="0" marL="0">
+                      <a:pPr marL="0" indent="0" algn="r">
                         <a:buNone/>
                       </a:pPr>
                       <a:r>
@@ -14261,6 +14248,11 @@
                     </a:lnB>
                   </a:tcPr>
                 </a:tc>
+                <a:extLst>
+                  <a:ext uri="{0D108BD9-81ED-4DB2-BD59-A6C34878D82A}">
+                    <a16:rowId xmlns:a16="http://schemas.microsoft.com/office/drawing/2014/main" val="10000"/>
+                  </a:ext>
+                </a:extLst>
               </a:tr>
               <a:tr h="566928">
                 <a:tc>
@@ -14268,7 +14260,7 @@
                     <a:bodyPr/>
                     <a:lstStyle/>
                     <a:p>
-                      <a:pPr indent="0" marL="0">
+                      <a:pPr marL="0" indent="0">
                         <a:buNone/>
                       </a:pPr>
                       <a:r>
@@ -14333,7 +14325,7 @@
                     <a:bodyPr/>
                     <a:lstStyle/>
                     <a:p>
-                      <a:pPr indent="0" marL="0">
+                      <a:pPr marL="0" indent="0">
                         <a:buNone/>
                       </a:pPr>
                       <a:r>
@@ -14398,7 +14390,7 @@
                     <a:bodyPr/>
                     <a:lstStyle/>
                     <a:p>
-                      <a:pPr algn="r" indent="0" marL="0">
+                      <a:pPr marL="0" indent="0" algn="r">
                         <a:buNone/>
                       </a:pPr>
                       <a:r>
@@ -14458,6 +14450,11 @@
                     </a:lnB>
                   </a:tcPr>
                 </a:tc>
+                <a:extLst>
+                  <a:ext uri="{0D108BD9-81ED-4DB2-BD59-A6C34878D82A}">
+                    <a16:rowId xmlns:a16="http://schemas.microsoft.com/office/drawing/2014/main" val="10001"/>
+                  </a:ext>
+                </a:extLst>
               </a:tr>
               <a:tr h="566928">
                 <a:tc>
@@ -14465,7 +14462,7 @@
                     <a:bodyPr/>
                     <a:lstStyle/>
                     <a:p>
-                      <a:pPr indent="0" marL="0">
+                      <a:pPr marL="0" indent="0">
                         <a:buNone/>
                       </a:pPr>
                       <a:r>
@@ -14530,7 +14527,7 @@
                     <a:bodyPr/>
                     <a:lstStyle/>
                     <a:p>
-                      <a:pPr indent="0" marL="0">
+                      <a:pPr marL="0" indent="0">
                         <a:buNone/>
                       </a:pPr>
                       <a:r>
@@ -14595,7 +14592,7 @@
                     <a:bodyPr/>
                     <a:lstStyle/>
                     <a:p>
-                      <a:pPr algn="r" indent="0" marL="0">
+                      <a:pPr marL="0" indent="0" algn="r">
                         <a:buNone/>
                       </a:pPr>
                       <a:r>
@@ -14655,6 +14652,11 @@
                     </a:lnB>
                   </a:tcPr>
                 </a:tc>
+                <a:extLst>
+                  <a:ext uri="{0D108BD9-81ED-4DB2-BD59-A6C34878D82A}">
+                    <a16:rowId xmlns:a16="http://schemas.microsoft.com/office/drawing/2014/main" val="10002"/>
+                  </a:ext>
+                </a:extLst>
               </a:tr>
               <a:tr h="566928">
                 <a:tc>
@@ -14662,7 +14664,7 @@
                     <a:bodyPr/>
                     <a:lstStyle/>
                     <a:p>
-                      <a:pPr indent="0" marL="0">
+                      <a:pPr marL="0" indent="0">
                         <a:buNone/>
                       </a:pPr>
                       <a:r>
@@ -14727,7 +14729,7 @@
                     <a:bodyPr/>
                     <a:lstStyle/>
                     <a:p>
-                      <a:pPr indent="0" marL="0">
+                      <a:pPr marL="0" indent="0">
                         <a:buNone/>
                       </a:pPr>
                       <a:r>
@@ -14792,7 +14794,7 @@
                     <a:bodyPr/>
                     <a:lstStyle/>
                     <a:p>
-                      <a:pPr algn="r" indent="0" marL="0">
+                      <a:pPr marL="0" indent="0" algn="r">
                         <a:buNone/>
                       </a:pPr>
                       <a:r>
@@ -14852,6 +14854,11 @@
                     </a:lnB>
                   </a:tcPr>
                 </a:tc>
+                <a:extLst>
+                  <a:ext uri="{0D108BD9-81ED-4DB2-BD59-A6C34878D82A}">
+                    <a16:rowId xmlns:a16="http://schemas.microsoft.com/office/drawing/2014/main" val="10003"/>
+                  </a:ext>
+                </a:extLst>
               </a:tr>
               <a:tr h="566928">
                 <a:tc>
@@ -14859,7 +14866,7 @@
                     <a:bodyPr/>
                     <a:lstStyle/>
                     <a:p>
-                      <a:pPr indent="0" marL="0">
+                      <a:pPr marL="0" indent="0">
                         <a:buNone/>
                       </a:pPr>
                       <a:r>
@@ -14924,7 +14931,7 @@
                     <a:bodyPr/>
                     <a:lstStyle/>
                     <a:p>
-                      <a:pPr indent="0" marL="0">
+                      <a:pPr marL="0" indent="0">
                         <a:buNone/>
                       </a:pPr>
                       <a:r>
@@ -14989,7 +14996,7 @@
                     <a:bodyPr/>
                     <a:lstStyle/>
                     <a:p>
-                      <a:pPr algn="r" indent="0" marL="0">
+                      <a:pPr marL="0" indent="0" algn="r">
                         <a:buNone/>
                       </a:pPr>
                       <a:r>
@@ -15049,6 +15056,11 @@
                     </a:lnB>
                   </a:tcPr>
                 </a:tc>
+                <a:extLst>
+                  <a:ext uri="{0D108BD9-81ED-4DB2-BD59-A6C34878D82A}">
+                    <a16:rowId xmlns:a16="http://schemas.microsoft.com/office/drawing/2014/main" val="10004"/>
+                  </a:ext>
+                </a:extLst>
               </a:tr>
             </a:tbl>
           </a:graphicData>
@@ -15075,7 +15087,7 @@
           <a:bodyPr wrap="square" lIns="0" tIns="0" rIns="0" bIns="0" rtlCol="0" anchor="ctr"/>
           <a:lstStyle/>
           <a:p>
-            <a:pPr indent="0" marL="0">
+            <a:pPr marL="0" indent="0">
               <a:buNone/>
             </a:pPr>
             <a:r>
@@ -15114,7 +15126,7 @@
           <a:bodyPr wrap="square" lIns="0" tIns="0" rIns="0" bIns="0" rtlCol="0" anchor="ctr"/>
           <a:lstStyle/>
           <a:p>
-            <a:pPr algn="r" indent="0" marL="0">
+            <a:pPr marL="0" indent="0" algn="r">
               <a:buNone/>
             </a:pPr>
             <a:r>
@@ -15148,6 +15160,7 @@
         <a:solidFill>
           <a:srgbClr val="FFFFFF"/>
         </a:solidFill>
+        <a:effectLst/>
       </p:bgPr>
     </p:bg>
     <p:spTree>
@@ -15185,7 +15198,7 @@
           <a:bodyPr wrap="square" lIns="0" tIns="0" rIns="0" bIns="0" rtlCol="0" anchor="ctr"/>
           <a:lstStyle/>
           <a:p>
-            <a:pPr indent="0" marL="0">
+            <a:pPr marL="0" indent="0">
               <a:buNone/>
             </a:pPr>
             <a:r>
@@ -15199,9 +15212,6 @@
               </a:rPr>
               <a:t>05</a:t>
             </a:r>
-            <a:pPr indent="0" marL="0">
-              <a:buNone/>
-            </a:pPr>
             <a:r>
               <a:rPr lang="en-US" sz="1100" dirty="0">
                 <a:solidFill>
@@ -15238,7 +15248,7 @@
           <a:bodyPr wrap="square" lIns="0" tIns="0" rIns="0" bIns="0" rtlCol="0" anchor="t"/>
           <a:lstStyle/>
           <a:p>
-            <a:pPr indent="0" marL="0">
+            <a:pPr marL="0" indent="0">
               <a:buNone/>
             </a:pPr>
             <a:r>
@@ -15277,7 +15287,7 @@
           <a:bodyPr wrap="square" lIns="0" tIns="0" rIns="0" bIns="0" rtlCol="0" anchor="ctr"/>
           <a:lstStyle/>
           <a:p>
-            <a:pPr algn="ctr" indent="0" marL="0">
+            <a:pPr marL="0" indent="0" algn="ctr">
               <a:buNone/>
             </a:pPr>
             <a:r>
@@ -15316,7 +15326,7 @@
           <a:bodyPr wrap="square" lIns="0" tIns="0" rIns="0" bIns="0" rtlCol="0" anchor="ctr"/>
           <a:lstStyle/>
           <a:p>
-            <a:pPr algn="ctr" indent="0" marL="0">
+            <a:pPr marL="0" indent="0" algn="ctr">
               <a:buNone/>
             </a:pPr>
             <a:r>
@@ -15330,9 +15340,6 @@
               </a:rPr>
               <a:t>8.5</a:t>
             </a:r>
-            <a:pPr algn="ctr" indent="0" marL="0">
-              <a:buNone/>
-            </a:pPr>
             <a:r>
               <a:rPr lang="en-US" sz="2600" b="1" dirty="0">
                 <a:solidFill>
@@ -15374,7 +15381,7 @@
           <a:bodyPr wrap="square" lIns="0" tIns="0" rIns="0" bIns="0" rtlCol="0" anchor="t"/>
           <a:lstStyle/>
           <a:p>
-            <a:pPr indent="0" marL="0">
+            <a:pPr marL="0" indent="0">
               <a:buNone/>
             </a:pPr>
             <a:r>
@@ -15388,9 +15395,6 @@
               </a:rPr>
               <a:t>근거  </a:t>
             </a:r>
-            <a:pPr indent="0" marL="0">
-              <a:buNone/>
-            </a:pPr>
             <a:r>
               <a:rPr lang="en-US" sz="1250" dirty="0">
                 <a:solidFill>
@@ -15427,7 +15431,7 @@
           <a:bodyPr wrap="square" lIns="0" tIns="0" rIns="0" bIns="0" rtlCol="0" anchor="ctr"/>
           <a:lstStyle/>
           <a:p>
-            <a:pPr indent="0" marL="0">
+            <a:pPr marL="0" indent="0">
               <a:buNone/>
             </a:pPr>
             <a:r>
@@ -15466,7 +15470,7 @@
           <a:bodyPr wrap="square" lIns="0" tIns="0" rIns="0" bIns="0" rtlCol="0" anchor="t"/>
           <a:lstStyle/>
           <a:p>
-            <a:pPr indent="0" marL="0">
+            <a:pPr marL="0" indent="0">
               <a:spcAft>
                 <a:spcPts val="600"/>
               </a:spcAft>
@@ -15508,7 +15512,7 @@
           <a:bodyPr wrap="square" lIns="0" tIns="0" rIns="0" bIns="0" rtlCol="0" anchor="ctr"/>
           <a:lstStyle/>
           <a:p>
-            <a:pPr indent="0" marL="0">
+            <a:pPr marL="0" indent="0">
               <a:buNone/>
             </a:pPr>
             <a:r>
@@ -15547,7 +15551,7 @@
           <a:bodyPr wrap="square" lIns="0" tIns="0" rIns="0" bIns="0" rtlCol="0" anchor="t"/>
           <a:lstStyle/>
           <a:p>
-            <a:pPr indent="0" marL="0">
+            <a:pPr marL="0" indent="0">
               <a:spcAft>
                 <a:spcPts val="600"/>
               </a:spcAft>
@@ -15589,7 +15593,7 @@
           <a:bodyPr wrap="square" lIns="0" tIns="0" rIns="0" bIns="0" rtlCol="0" anchor="ctr"/>
           <a:lstStyle/>
           <a:p>
-            <a:pPr indent="0" marL="0">
+            <a:pPr marL="0" indent="0">
               <a:buNone/>
             </a:pPr>
             <a:r>
@@ -15628,7 +15632,7 @@
           <a:bodyPr wrap="square" lIns="0" tIns="0" rIns="0" bIns="0" rtlCol="0" anchor="t"/>
           <a:lstStyle/>
           <a:p>
-            <a:pPr indent="0" marL="0">
+            <a:pPr marL="0" indent="0">
               <a:spcAft>
                 <a:spcPts val="600"/>
               </a:spcAft>
@@ -15670,7 +15674,7 @@
           <a:bodyPr wrap="square" lIns="0" tIns="0" rIns="0" bIns="0" rtlCol="0" anchor="ctr"/>
           <a:lstStyle/>
           <a:p>
-            <a:pPr indent="0" marL="0">
+            <a:pPr marL="0" indent="0">
               <a:buNone/>
             </a:pPr>
             <a:r>
@@ -15709,7 +15713,7 @@
           <a:bodyPr wrap="square" lIns="0" tIns="0" rIns="0" bIns="0" rtlCol="0" anchor="ctr"/>
           <a:lstStyle/>
           <a:p>
-            <a:pPr algn="r" indent="0" marL="0">
+            <a:pPr marL="0" indent="0" algn="r">
               <a:buNone/>
             </a:pPr>
             <a:r>
@@ -15743,6 +15747,7 @@
         <a:solidFill>
           <a:srgbClr val="FFFFFF"/>
         </a:solidFill>
+        <a:effectLst/>
       </p:bgPr>
     </p:bg>
     <p:spTree>
@@ -15780,7 +15785,7 @@
           <a:bodyPr wrap="square" lIns="0" tIns="0" rIns="0" bIns="0" rtlCol="0" anchor="ctr"/>
           <a:lstStyle/>
           <a:p>
-            <a:pPr indent="0" marL="0">
+            <a:pPr marL="0" indent="0">
               <a:buNone/>
             </a:pPr>
             <a:r>
@@ -15794,9 +15799,6 @@
               </a:rPr>
               <a:t>05</a:t>
             </a:r>
-            <a:pPr indent="0" marL="0">
-              <a:buNone/>
-            </a:pPr>
             <a:r>
               <a:rPr lang="en-US" sz="1100" dirty="0">
                 <a:solidFill>
@@ -15833,7 +15835,7 @@
           <a:bodyPr wrap="square" lIns="0" tIns="0" rIns="0" bIns="0" rtlCol="0" anchor="t"/>
           <a:lstStyle/>
           <a:p>
-            <a:pPr indent="0" marL="0">
+            <a:pPr marL="0" indent="0">
               <a:buNone/>
             </a:pPr>
             <a:r>
@@ -15872,7 +15874,7 @@
           <a:bodyPr wrap="square" lIns="0" tIns="0" rIns="0" bIns="0" rtlCol="0" anchor="ctr"/>
           <a:lstStyle/>
           <a:p>
-            <a:pPr indent="0" marL="0">
+            <a:pPr marL="0" indent="0">
               <a:buNone/>
             </a:pPr>
             <a:r>
@@ -15911,7 +15913,7 @@
           <a:bodyPr wrap="square" lIns="0" tIns="0" rIns="0" bIns="0" rtlCol="0" anchor="t"/>
           <a:lstStyle/>
           <a:p>
-            <a:pPr indent="0" marL="0">
+            <a:pPr marL="0" indent="0">
               <a:spcAft>
                 <a:spcPts val="600"/>
               </a:spcAft>
@@ -15931,7 +15933,7 @@
             <a:endParaRPr lang="en-US" sz="1250" dirty="0"/>
           </a:p>
           <a:p>
-            <a:pPr indent="0" marL="0">
+            <a:pPr marL="0" indent="0">
               <a:spcAft>
                 <a:spcPts val="600"/>
               </a:spcAft>
@@ -15951,7 +15953,7 @@
             <a:endParaRPr lang="en-US" sz="1250" dirty="0"/>
           </a:p>
           <a:p>
-            <a:pPr indent="0" marL="0">
+            <a:pPr marL="0" indent="0">
               <a:spcAft>
                 <a:spcPts val="600"/>
               </a:spcAft>
@@ -15971,7 +15973,7 @@
             <a:endParaRPr lang="en-US" sz="1250" dirty="0"/>
           </a:p>
           <a:p>
-            <a:pPr indent="0" marL="0">
+            <a:pPr marL="0" indent="0">
               <a:spcAft>
                 <a:spcPts val="600"/>
               </a:spcAft>
@@ -15991,7 +15993,7 @@
             <a:endParaRPr lang="en-US" sz="1250" dirty="0"/>
           </a:p>
           <a:p>
-            <a:pPr indent="0" marL="0">
+            <a:pPr marL="0" indent="0">
               <a:spcAft>
                 <a:spcPts val="600"/>
               </a:spcAft>
@@ -16033,7 +16035,7 @@
           <a:bodyPr wrap="square" lIns="0" tIns="0" rIns="0" bIns="0" rtlCol="0" anchor="ctr"/>
           <a:lstStyle/>
           <a:p>
-            <a:pPr indent="0" marL="0">
+            <a:pPr marL="0" indent="0">
               <a:buNone/>
             </a:pPr>
             <a:r>
@@ -16072,7 +16074,7 @@
           <a:bodyPr wrap="square" lIns="0" tIns="0" rIns="0" bIns="0" rtlCol="0" anchor="t"/>
           <a:lstStyle/>
           <a:p>
-            <a:pPr indent="0" marL="0">
+            <a:pPr marL="0" indent="0">
               <a:spcAft>
                 <a:spcPts val="600"/>
               </a:spcAft>
@@ -16092,7 +16094,7 @@
             <a:endParaRPr lang="en-US" sz="1300" dirty="0"/>
           </a:p>
           <a:p>
-            <a:pPr indent="0" marL="0">
+            <a:pPr marL="0" indent="0">
               <a:spcAft>
                 <a:spcPts val="600"/>
               </a:spcAft>
@@ -16112,7 +16114,7 @@
             <a:endParaRPr lang="en-US" sz="1300" dirty="0"/>
           </a:p>
           <a:p>
-            <a:pPr indent="0" marL="0">
+            <a:pPr marL="0" indent="0">
               <a:spcAft>
                 <a:spcPts val="600"/>
               </a:spcAft>
@@ -16132,7 +16134,7 @@
             <a:endParaRPr lang="en-US" sz="1300" dirty="0"/>
           </a:p>
           <a:p>
-            <a:pPr indent="0" marL="0">
+            <a:pPr marL="0" indent="0">
               <a:spcAft>
                 <a:spcPts val="600"/>
               </a:spcAft>
@@ -16174,7 +16176,7 @@
           <a:bodyPr wrap="square" lIns="0" tIns="0" rIns="0" bIns="0" rtlCol="0" anchor="ctr"/>
           <a:lstStyle/>
           <a:p>
-            <a:pPr indent="0" marL="0">
+            <a:pPr marL="0" indent="0">
               <a:buNone/>
             </a:pPr>
             <a:r>
@@ -16213,7 +16215,7 @@
           <a:bodyPr wrap="square" lIns="0" tIns="0" rIns="0" bIns="0" rtlCol="0" anchor="ctr"/>
           <a:lstStyle/>
           <a:p>
-            <a:pPr indent="0" marL="0">
+            <a:pPr marL="0" indent="0">
               <a:buNone/>
             </a:pPr>
             <a:r>
@@ -16252,7 +16254,7 @@
           <a:bodyPr wrap="square" lIns="0" tIns="0" rIns="0" bIns="0" rtlCol="0" anchor="ctr"/>
           <a:lstStyle/>
           <a:p>
-            <a:pPr algn="r" indent="0" marL="0">
+            <a:pPr marL="0" indent="0" algn="r">
               <a:buNone/>
             </a:pPr>
             <a:r>
@@ -16286,6 +16288,7 @@
         <a:solidFill>
           <a:srgbClr val="2B2B2B"/>
         </a:solidFill>
+        <a:effectLst/>
       </p:bgPr>
     </p:bg>
     <p:spTree>
@@ -16323,11 +16326,11 @@
           <a:bodyPr wrap="square" lIns="0" tIns="0" rIns="0" bIns="0" rtlCol="0" anchor="ctr"/>
           <a:lstStyle/>
           <a:p>
-            <a:pPr indent="0" marL="0">
+            <a:pPr marL="0" indent="0">
               <a:buNone/>
             </a:pPr>
             <a:r>
-              <a:rPr lang="en-US" sz="1300" spc="300" kern="0" dirty="0">
+              <a:rPr lang="en-US" sz="1300" kern="0" spc="300" dirty="0">
                 <a:solidFill>
                   <a:srgbClr val="B85042"/>
                 </a:solidFill>
@@ -16362,7 +16365,7 @@
           <a:bodyPr wrap="square" lIns="0" tIns="0" rIns="0" bIns="0" rtlCol="0" anchor="ctr"/>
           <a:lstStyle/>
           <a:p>
-            <a:pPr indent="0" marL="0">
+            <a:pPr marL="0" indent="0">
               <a:buNone/>
             </a:pPr>
             <a:r>
@@ -16401,11 +16404,11 @@
           <a:bodyPr wrap="square" lIns="0" tIns="0" rIns="0" bIns="0" rtlCol="0" anchor="ctr"/>
           <a:lstStyle/>
           <a:p>
-            <a:pPr indent="0" marL="0">
+            <a:pPr marL="0" indent="0">
               <a:buNone/>
             </a:pPr>
             <a:r>
-              <a:rPr lang="en-US" sz="2000" spc="200" kern="0" dirty="0">
+              <a:rPr lang="en-US" sz="2000" kern="0" spc="200" dirty="0">
                 <a:solidFill>
                   <a:srgbClr val="CFCFCF"/>
                 </a:solidFill>
@@ -16440,7 +16443,7 @@
           <a:bodyPr wrap="square" lIns="0" tIns="0" rIns="0" bIns="0" rtlCol="0" anchor="ctr"/>
           <a:lstStyle/>
           <a:p>
-            <a:pPr indent="0" marL="0">
+            <a:pPr marL="0" indent="0">
               <a:buNone/>
             </a:pPr>
             <a:r>
@@ -16479,7 +16482,7 @@
           <a:bodyPr wrap="square" lIns="0" tIns="0" rIns="0" bIns="0" rtlCol="0" anchor="ctr"/>
           <a:lstStyle/>
           <a:p>
-            <a:pPr algn="r" indent="0" marL="0">
+            <a:pPr marL="0" indent="0" algn="r">
               <a:buNone/>
             </a:pPr>
             <a:r>
@@ -16513,6 +16516,7 @@
         <a:solidFill>
           <a:srgbClr val="FFFFFF"/>
         </a:solidFill>
+        <a:effectLst/>
       </p:bgPr>
     </p:bg>
     <p:spTree>
@@ -16550,7 +16554,7 @@
           <a:bodyPr wrap="square" lIns="0" tIns="0" rIns="0" bIns="0" rtlCol="0" anchor="ctr"/>
           <a:lstStyle/>
           <a:p>
-            <a:pPr indent="0" marL="0">
+            <a:pPr marL="0" indent="0">
               <a:buNone/>
             </a:pPr>
             <a:r>
@@ -16564,9 +16568,6 @@
               </a:rPr>
               <a:t>01</a:t>
             </a:r>
-            <a:pPr indent="0" marL="0">
-              <a:buNone/>
-            </a:pPr>
             <a:r>
               <a:rPr lang="en-US" sz="1100" dirty="0">
                 <a:solidFill>
@@ -16603,7 +16604,7 @@
           <a:bodyPr wrap="square" lIns="0" tIns="0" rIns="0" bIns="0" rtlCol="0" anchor="t"/>
           <a:lstStyle/>
           <a:p>
-            <a:pPr indent="0" marL="0">
+            <a:pPr marL="0" indent="0">
               <a:buNone/>
             </a:pPr>
             <a:r>
@@ -16642,7 +16643,7 @@
           <a:bodyPr wrap="square" lIns="0" tIns="0" rIns="0" bIns="0" rtlCol="0" anchor="ctr"/>
           <a:lstStyle/>
           <a:p>
-            <a:pPr indent="0" marL="0">
+            <a:pPr marL="0" indent="0">
               <a:buNone/>
             </a:pPr>
             <a:r>
@@ -16681,7 +16682,7 @@
           <a:bodyPr wrap="square" lIns="0" tIns="0" rIns="0" bIns="0" rtlCol="0" anchor="ctr"/>
           <a:lstStyle/>
           <a:p>
-            <a:pPr indent="0" marL="0">
+            <a:pPr marL="0" indent="0">
               <a:buNone/>
             </a:pPr>
             <a:r>
@@ -16720,7 +16721,7 @@
           <a:bodyPr wrap="square" lIns="0" tIns="0" rIns="0" bIns="0" rtlCol="0" anchor="ctr"/>
           <a:lstStyle/>
           <a:p>
-            <a:pPr indent="0" marL="0">
+            <a:pPr marL="0" indent="0">
               <a:buNone/>
             </a:pPr>
             <a:r>
@@ -16759,7 +16760,7 @@
           <a:bodyPr wrap="square" lIns="0" tIns="0" rIns="0" bIns="0" rtlCol="0" anchor="t"/>
           <a:lstStyle/>
           <a:p>
-            <a:pPr indent="0" marL="0">
+            <a:pPr marL="0" indent="0">
               <a:buNone/>
             </a:pPr>
             <a:r>
@@ -16798,7 +16799,7 @@
           <a:bodyPr wrap="square" lIns="0" tIns="0" rIns="0" bIns="0" rtlCol="0" anchor="ctr"/>
           <a:lstStyle/>
           <a:p>
-            <a:pPr indent="0" marL="0">
+            <a:pPr marL="0" indent="0">
               <a:buNone/>
             </a:pPr>
             <a:r>
@@ -16837,7 +16838,7 @@
           <a:bodyPr wrap="square" lIns="0" tIns="0" rIns="0" bIns="0" rtlCol="0" anchor="t"/>
           <a:lstStyle/>
           <a:p>
-            <a:pPr indent="0" marL="0">
+            <a:pPr marL="0" indent="0">
               <a:buNone/>
             </a:pPr>
             <a:r>
@@ -16876,7 +16877,7 @@
           <a:bodyPr wrap="square" lIns="0" tIns="0" rIns="0" bIns="0" rtlCol="0" anchor="ctr"/>
           <a:lstStyle/>
           <a:p>
-            <a:pPr indent="0" marL="0">
+            <a:pPr marL="0" indent="0">
               <a:buNone/>
             </a:pPr>
             <a:r>
@@ -16915,7 +16916,7 @@
           <a:bodyPr wrap="square" lIns="0" tIns="0" rIns="0" bIns="0" rtlCol="0" anchor="t"/>
           <a:lstStyle/>
           <a:p>
-            <a:pPr indent="0" marL="0">
+            <a:pPr marL="0" indent="0">
               <a:buNone/>
             </a:pPr>
             <a:r>
@@ -16954,7 +16955,7 @@
           <a:bodyPr wrap="square" lIns="0" tIns="0" rIns="0" bIns="0" rtlCol="0" anchor="ctr"/>
           <a:lstStyle/>
           <a:p>
-            <a:pPr indent="0" marL="0">
+            <a:pPr marL="0" indent="0">
               <a:buNone/>
             </a:pPr>
             <a:r>
@@ -16993,7 +16994,7 @@
           <a:bodyPr wrap="square" lIns="0" tIns="0" rIns="0" bIns="0" rtlCol="0" anchor="t"/>
           <a:lstStyle/>
           <a:p>
-            <a:pPr indent="0" marL="0">
+            <a:pPr marL="0" indent="0">
               <a:buNone/>
             </a:pPr>
             <a:r>
@@ -17032,7 +17033,7 @@
           <a:bodyPr wrap="square" lIns="0" tIns="0" rIns="0" bIns="0" rtlCol="0" anchor="ctr"/>
           <a:lstStyle/>
           <a:p>
-            <a:pPr indent="0" marL="0">
+            <a:pPr marL="0" indent="0">
               <a:buNone/>
             </a:pPr>
             <a:r>
@@ -17071,7 +17072,7 @@
           <a:bodyPr wrap="square" lIns="0" tIns="0" rIns="0" bIns="0" rtlCol="0" anchor="t"/>
           <a:lstStyle/>
           <a:p>
-            <a:pPr indent="0" marL="0">
+            <a:pPr marL="0" indent="0">
               <a:spcAft>
                 <a:spcPts val="600"/>
               </a:spcAft>
@@ -17091,7 +17092,7 @@
             <a:endParaRPr lang="en-US" sz="1400" dirty="0"/>
           </a:p>
           <a:p>
-            <a:pPr indent="0" marL="0">
+            <a:pPr marL="0" indent="0">
               <a:spcAft>
                 <a:spcPts val="600"/>
               </a:spcAft>
@@ -17133,7 +17134,7 @@
           <a:bodyPr wrap="square" lIns="0" tIns="0" rIns="0" bIns="0" rtlCol="0" anchor="ctr"/>
           <a:lstStyle/>
           <a:p>
-            <a:pPr indent="0" marL="0">
+            <a:pPr marL="0" indent="0">
               <a:buNone/>
             </a:pPr>
             <a:r>
@@ -17172,7 +17173,7 @@
           <a:bodyPr wrap="square" lIns="0" tIns="0" rIns="0" bIns="0" rtlCol="0" anchor="ctr"/>
           <a:lstStyle/>
           <a:p>
-            <a:pPr algn="r" indent="0" marL="0">
+            <a:pPr marL="0" indent="0" algn="r">
               <a:buNone/>
             </a:pPr>
             <a:r>
@@ -17206,6 +17207,7 @@
         <a:solidFill>
           <a:srgbClr val="FFFFFF"/>
         </a:solidFill>
+        <a:effectLst/>
       </p:bgPr>
     </p:bg>
     <p:spTree>
@@ -17243,7 +17245,7 @@
           <a:bodyPr wrap="square" lIns="0" tIns="0" rIns="0" bIns="0" rtlCol="0" anchor="ctr"/>
           <a:lstStyle/>
           <a:p>
-            <a:pPr indent="0" marL="0">
+            <a:pPr marL="0" indent="0">
               <a:buNone/>
             </a:pPr>
             <a:r>
@@ -17257,9 +17259,6 @@
               </a:rPr>
               <a:t>01</a:t>
             </a:r>
-            <a:pPr indent="0" marL="0">
-              <a:buNone/>
-            </a:pPr>
             <a:r>
               <a:rPr lang="en-US" sz="1100" dirty="0">
                 <a:solidFill>
@@ -17296,7 +17295,7 @@
           <a:bodyPr wrap="square" lIns="0" tIns="0" rIns="0" bIns="0" rtlCol="0" anchor="t"/>
           <a:lstStyle/>
           <a:p>
-            <a:pPr indent="0" marL="0">
+            <a:pPr marL="0" indent="0">
               <a:buNone/>
             </a:pPr>
             <a:r>
@@ -17335,7 +17334,7 @@
           <a:bodyPr wrap="square" lIns="0" tIns="0" rIns="0" bIns="0" rtlCol="0" anchor="ctr"/>
           <a:lstStyle/>
           <a:p>
-            <a:pPr indent="0" marL="0">
+            <a:pPr marL="0" indent="0">
               <a:buNone/>
             </a:pPr>
             <a:r>
@@ -17374,7 +17373,7 @@
           <a:bodyPr wrap="square" lIns="0" tIns="0" rIns="0" bIns="0" rtlCol="0" anchor="ctr"/>
           <a:lstStyle/>
           <a:p>
-            <a:pPr indent="0" marL="0">
+            <a:pPr marL="0" indent="0">
               <a:buNone/>
             </a:pPr>
             <a:r>
@@ -17413,7 +17412,7 @@
           <a:bodyPr wrap="square" lIns="0" tIns="0" rIns="0" bIns="0" rtlCol="0" anchor="t"/>
           <a:lstStyle/>
           <a:p>
-            <a:pPr indent="0" marL="0">
+            <a:pPr marL="0" indent="0">
               <a:lnSpc>
                 <a:spcPct val="125000"/>
               </a:lnSpc>
@@ -17433,7 +17432,7 @@
             <a:endParaRPr lang="en-US" sz="1400" dirty="0"/>
           </a:p>
           <a:p>
-            <a:pPr indent="0" marL="0">
+            <a:pPr marL="0" indent="0">
               <a:lnSpc>
                 <a:spcPct val="125000"/>
               </a:lnSpc>
@@ -17453,7 +17452,7 @@
             <a:endParaRPr lang="en-US" sz="1400" dirty="0"/>
           </a:p>
           <a:p>
-            <a:pPr indent="0" marL="0">
+            <a:pPr marL="0" indent="0">
               <a:lnSpc>
                 <a:spcPct val="125000"/>
               </a:lnSpc>
@@ -17495,7 +17494,7 @@
           <a:bodyPr wrap="square" lIns="0" tIns="0" rIns="0" bIns="0" rtlCol="0" anchor="ctr"/>
           <a:lstStyle/>
           <a:p>
-            <a:pPr indent="0" marL="0">
+            <a:pPr marL="0" indent="0">
               <a:buNone/>
             </a:pPr>
             <a:r>
@@ -17534,7 +17533,7 @@
           <a:bodyPr wrap="square" lIns="0" tIns="0" rIns="0" bIns="0" rtlCol="0" anchor="t"/>
           <a:lstStyle/>
           <a:p>
-            <a:pPr indent="0" marL="0">
+            <a:pPr marL="0" indent="0">
               <a:lnSpc>
                 <a:spcPct val="125000"/>
               </a:lnSpc>
@@ -17554,7 +17553,7 @@
             <a:endParaRPr lang="en-US" sz="1400" dirty="0"/>
           </a:p>
           <a:p>
-            <a:pPr indent="0" marL="0">
+            <a:pPr marL="0" indent="0">
               <a:lnSpc>
                 <a:spcPct val="125000"/>
               </a:lnSpc>
@@ -17574,7 +17573,7 @@
             <a:endParaRPr lang="en-US" sz="1400" dirty="0"/>
           </a:p>
           <a:p>
-            <a:pPr indent="0" marL="0">
+            <a:pPr marL="0" indent="0">
               <a:lnSpc>
                 <a:spcPct val="125000"/>
               </a:lnSpc>
@@ -17616,7 +17615,7 @@
           <a:bodyPr wrap="square" lIns="0" tIns="0" rIns="0" bIns="0" rtlCol="0" anchor="ctr"/>
           <a:lstStyle/>
           <a:p>
-            <a:pPr indent="0" marL="0">
+            <a:pPr marL="0" indent="0">
               <a:buNone/>
             </a:pPr>
             <a:r>
@@ -17655,7 +17654,7 @@
           <a:bodyPr wrap="square" lIns="0" tIns="0" rIns="0" bIns="0" rtlCol="0" anchor="t"/>
           <a:lstStyle/>
           <a:p>
-            <a:pPr indent="0" marL="0">
+            <a:pPr marL="0" indent="0">
               <a:lnSpc>
                 <a:spcPct val="125000"/>
               </a:lnSpc>
@@ -17675,7 +17674,7 @@
             <a:endParaRPr lang="en-US" sz="1400" dirty="0"/>
           </a:p>
           <a:p>
-            <a:pPr indent="0" marL="0">
+            <a:pPr marL="0" indent="0">
               <a:lnSpc>
                 <a:spcPct val="125000"/>
               </a:lnSpc>
@@ -17695,7 +17694,7 @@
             <a:endParaRPr lang="en-US" sz="1400" dirty="0"/>
           </a:p>
           <a:p>
-            <a:pPr indent="0" marL="0">
+            <a:pPr marL="0" indent="0">
               <a:lnSpc>
                 <a:spcPct val="125000"/>
               </a:lnSpc>
@@ -17737,7 +17736,7 @@
           <a:bodyPr wrap="square" lIns="0" tIns="0" rIns="0" bIns="0" rtlCol="0" anchor="ctr"/>
           <a:lstStyle/>
           <a:p>
-            <a:pPr indent="0" marL="0">
+            <a:pPr marL="0" indent="0">
               <a:buNone/>
             </a:pPr>
             <a:r>
@@ -17776,7 +17775,7 @@
           <a:bodyPr wrap="square" lIns="0" tIns="0" rIns="0" bIns="0" rtlCol="0" anchor="t"/>
           <a:lstStyle/>
           <a:p>
-            <a:pPr indent="0" marL="0">
+            <a:pPr marL="0" indent="0">
               <a:spcAft>
                 <a:spcPts val="600"/>
               </a:spcAft>
@@ -17796,7 +17795,7 @@
             <a:endParaRPr lang="en-US" sz="1400" dirty="0"/>
           </a:p>
           <a:p>
-            <a:pPr indent="0" marL="0">
+            <a:pPr marL="0" indent="0">
               <a:spcAft>
                 <a:spcPts val="600"/>
               </a:spcAft>
@@ -17838,7 +17837,7 @@
           <a:bodyPr wrap="square" lIns="0" tIns="0" rIns="0" bIns="0" rtlCol="0" anchor="ctr"/>
           <a:lstStyle/>
           <a:p>
-            <a:pPr indent="0" marL="0">
+            <a:pPr marL="0" indent="0">
               <a:buNone/>
             </a:pPr>
             <a:r>
@@ -17877,7 +17876,7 @@
           <a:bodyPr wrap="square" lIns="0" tIns="0" rIns="0" bIns="0" rtlCol="0" anchor="ctr"/>
           <a:lstStyle/>
           <a:p>
-            <a:pPr algn="r" indent="0" marL="0">
+            <a:pPr marL="0" indent="0" algn="r">
               <a:buNone/>
             </a:pPr>
             <a:r>
@@ -17911,6 +17910,7 @@
         <a:solidFill>
           <a:srgbClr val="FFFFFF"/>
         </a:solidFill>
+        <a:effectLst/>
       </p:bgPr>
     </p:bg>
     <p:spTree>
@@ -17948,7 +17948,7 @@
           <a:bodyPr wrap="square" lIns="0" tIns="0" rIns="0" bIns="0" rtlCol="0" anchor="ctr"/>
           <a:lstStyle/>
           <a:p>
-            <a:pPr indent="0" marL="0">
+            <a:pPr marL="0" indent="0">
               <a:buNone/>
             </a:pPr>
             <a:r>
@@ -17962,9 +17962,6 @@
               </a:rPr>
               <a:t>02</a:t>
             </a:r>
-            <a:pPr indent="0" marL="0">
-              <a:buNone/>
-            </a:pPr>
             <a:r>
               <a:rPr lang="en-US" sz="1100" dirty="0">
                 <a:solidFill>
@@ -18001,7 +17998,7 @@
           <a:bodyPr wrap="square" lIns="0" tIns="0" rIns="0" bIns="0" rtlCol="0" anchor="t"/>
           <a:lstStyle/>
           <a:p>
-            <a:pPr indent="0" marL="0">
+            <a:pPr marL="0" indent="0">
               <a:buNone/>
             </a:pPr>
             <a:r>
@@ -18040,7 +18037,7 @@
           <a:bodyPr wrap="square" lIns="0" tIns="0" rIns="0" bIns="0" rtlCol="0" anchor="ctr"/>
           <a:lstStyle/>
           <a:p>
-            <a:pPr indent="0" marL="0">
+            <a:pPr marL="0" indent="0">
               <a:buNone/>
             </a:pPr>
             <a:r>
@@ -18074,16 +18071,34 @@
         </p:nvGraphicFramePr>
         <p:xfrm>
           <a:off x="640080" y="2103120"/>
-          <a:ext cx="10908792" cy="914400"/>
+          <a:ext cx="10908792" cy="3291840"/>
         </p:xfrm>
         <a:graphic>
           <a:graphicData uri="http://schemas.openxmlformats.org/drawingml/2006/table">
             <a:tbl>
               <a:tblPr/>
               <a:tblGrid>
-                <a:gridCol w="1463040"/>
-                <a:gridCol w="1920240"/>
-                <a:gridCol w="7525512"/>
+                <a:gridCol w="1463040">
+                  <a:extLst>
+                    <a:ext uri="{9D8B030D-6E8A-4147-A177-3AD203B41FA5}">
+                      <a16:colId xmlns:a16="http://schemas.microsoft.com/office/drawing/2014/main" val="20000"/>
+                    </a:ext>
+                  </a:extLst>
+                </a:gridCol>
+                <a:gridCol w="1920240">
+                  <a:extLst>
+                    <a:ext uri="{9D8B030D-6E8A-4147-A177-3AD203B41FA5}">
+                      <a16:colId xmlns:a16="http://schemas.microsoft.com/office/drawing/2014/main" val="20001"/>
+                    </a:ext>
+                  </a:extLst>
+                </a:gridCol>
+                <a:gridCol w="7525512">
+                  <a:extLst>
+                    <a:ext uri="{9D8B030D-6E8A-4147-A177-3AD203B41FA5}">
+                      <a16:colId xmlns:a16="http://schemas.microsoft.com/office/drawing/2014/main" val="20002"/>
+                    </a:ext>
+                  </a:extLst>
+                </a:gridCol>
               </a:tblGrid>
               <a:tr h="658368">
                 <a:tc>
@@ -18091,7 +18106,7 @@
                     <a:bodyPr/>
                     <a:lstStyle/>
                     <a:p>
-                      <a:pPr indent="0" marL="0">
+                      <a:pPr marL="0" indent="0">
                         <a:buNone/>
                       </a:pPr>
                       <a:r>
@@ -18159,7 +18174,7 @@
                     <a:bodyPr/>
                     <a:lstStyle/>
                     <a:p>
-                      <a:pPr indent="0" marL="0">
+                      <a:pPr marL="0" indent="0">
                         <a:buNone/>
                       </a:pPr>
                       <a:r>
@@ -18227,7 +18242,7 @@
                     <a:bodyPr/>
                     <a:lstStyle/>
                     <a:p>
-                      <a:pPr indent="0" marL="0">
+                      <a:pPr marL="0" indent="0">
                         <a:buNone/>
                       </a:pPr>
                       <a:r>
@@ -18290,6 +18305,11 @@
                     </a:solidFill>
                   </a:tcPr>
                 </a:tc>
+                <a:extLst>
+                  <a:ext uri="{0D108BD9-81ED-4DB2-BD59-A6C34878D82A}">
+                    <a16:rowId xmlns:a16="http://schemas.microsoft.com/office/drawing/2014/main" val="10000"/>
+                  </a:ext>
+                </a:extLst>
               </a:tr>
               <a:tr h="658368">
                 <a:tc>
@@ -18297,7 +18317,7 @@
                     <a:bodyPr/>
                     <a:lstStyle/>
                     <a:p>
-                      <a:pPr indent="0" marL="0">
+                      <a:pPr marL="0" indent="0">
                         <a:buNone/>
                       </a:pPr>
                       <a:r>
@@ -18362,7 +18382,7 @@
                     <a:bodyPr/>
                     <a:lstStyle/>
                     <a:p>
-                      <a:pPr indent="0" marL="0">
+                      <a:pPr marL="0" indent="0">
                         <a:buNone/>
                       </a:pPr>
                       <a:r>
@@ -18383,7 +18403,7 @@
                       </a:endParaRPr>
                     </a:p>
                     <a:p>
-                      <a:pPr indent="0" marL="0">
+                      <a:pPr marL="0" indent="0">
                         <a:buNone/>
                       </a:pPr>
                       <a:r>
@@ -18448,7 +18468,7 @@
                     <a:bodyPr/>
                     <a:lstStyle/>
                     <a:p>
-                      <a:pPr indent="0" marL="0">
+                      <a:pPr marL="0" indent="0">
                         <a:buNone/>
                       </a:pPr>
                       <a:r>
@@ -18508,6 +18528,11 @@
                     </a:lnB>
                   </a:tcPr>
                 </a:tc>
+                <a:extLst>
+                  <a:ext uri="{0D108BD9-81ED-4DB2-BD59-A6C34878D82A}">
+                    <a16:rowId xmlns:a16="http://schemas.microsoft.com/office/drawing/2014/main" val="10001"/>
+                  </a:ext>
+                </a:extLst>
               </a:tr>
               <a:tr h="658368">
                 <a:tc>
@@ -18515,7 +18540,7 @@
                     <a:bodyPr/>
                     <a:lstStyle/>
                     <a:p>
-                      <a:pPr indent="0" marL="0">
+                      <a:pPr marL="0" indent="0">
                         <a:buNone/>
                       </a:pPr>
                       <a:r>
@@ -18580,7 +18605,7 @@
                     <a:bodyPr/>
                     <a:lstStyle/>
                     <a:p>
-                      <a:pPr indent="0" marL="0">
+                      <a:pPr marL="0" indent="0">
                         <a:buNone/>
                       </a:pPr>
                       <a:r>
@@ -18645,7 +18670,7 @@
                     <a:bodyPr/>
                     <a:lstStyle/>
                     <a:p>
-                      <a:pPr indent="0" marL="0">
+                      <a:pPr marL="0" indent="0">
                         <a:buNone/>
                       </a:pPr>
                       <a:r>
@@ -18705,6 +18730,11 @@
                     </a:lnB>
                   </a:tcPr>
                 </a:tc>
+                <a:extLst>
+                  <a:ext uri="{0D108BD9-81ED-4DB2-BD59-A6C34878D82A}">
+                    <a16:rowId xmlns:a16="http://schemas.microsoft.com/office/drawing/2014/main" val="10002"/>
+                  </a:ext>
+                </a:extLst>
               </a:tr>
               <a:tr h="658368">
                 <a:tc>
@@ -18712,7 +18742,7 @@
                     <a:bodyPr/>
                     <a:lstStyle/>
                     <a:p>
-                      <a:pPr indent="0" marL="0">
+                      <a:pPr marL="0" indent="0">
                         <a:buNone/>
                       </a:pPr>
                       <a:r>
@@ -18777,7 +18807,7 @@
                     <a:bodyPr/>
                     <a:lstStyle/>
                     <a:p>
-                      <a:pPr indent="0" marL="0">
+                      <a:pPr marL="0" indent="0">
                         <a:buNone/>
                       </a:pPr>
                       <a:r>
@@ -18842,7 +18872,7 @@
                     <a:bodyPr/>
                     <a:lstStyle/>
                     <a:p>
-                      <a:pPr indent="0" marL="0">
+                      <a:pPr marL="0" indent="0">
                         <a:buNone/>
                       </a:pPr>
                       <a:r>
@@ -18902,6 +18932,11 @@
                     </a:lnB>
                   </a:tcPr>
                 </a:tc>
+                <a:extLst>
+                  <a:ext uri="{0D108BD9-81ED-4DB2-BD59-A6C34878D82A}">
+                    <a16:rowId xmlns:a16="http://schemas.microsoft.com/office/drawing/2014/main" val="10003"/>
+                  </a:ext>
+                </a:extLst>
               </a:tr>
               <a:tr h="658368">
                 <a:tc>
@@ -18909,7 +18944,7 @@
                     <a:bodyPr/>
                     <a:lstStyle/>
                     <a:p>
-                      <a:pPr indent="0" marL="0">
+                      <a:pPr marL="0" indent="0">
                         <a:buNone/>
                       </a:pPr>
                       <a:r>
@@ -18974,7 +19009,7 @@
                     <a:bodyPr/>
                     <a:lstStyle/>
                     <a:p>
-                      <a:pPr indent="0" marL="0">
+                      <a:pPr marL="0" indent="0">
                         <a:buNone/>
                       </a:pPr>
                       <a:r>
@@ -19039,7 +19074,7 @@
                     <a:bodyPr/>
                     <a:lstStyle/>
                     <a:p>
-                      <a:pPr indent="0" marL="0">
+                      <a:pPr marL="0" indent="0">
                         <a:buNone/>
                       </a:pPr>
                       <a:r>
@@ -19099,6 +19134,11 @@
                     </a:lnB>
                   </a:tcPr>
                 </a:tc>
+                <a:extLst>
+                  <a:ext uri="{0D108BD9-81ED-4DB2-BD59-A6C34878D82A}">
+                    <a16:rowId xmlns:a16="http://schemas.microsoft.com/office/drawing/2014/main" val="10004"/>
+                  </a:ext>
+                </a:extLst>
               </a:tr>
             </a:tbl>
           </a:graphicData>
@@ -19106,7 +19146,7 @@
       </p:graphicFrame>
       <p:sp>
         <p:nvSpPr>
-          <p:cNvPr id="6" name="Text 3"/>
+          <p:cNvPr id="5" name="Text 3"/>
           <p:cNvSpPr txBox="1"/>
           <p:nvPr/>
         </p:nvSpPr>
@@ -19125,7 +19165,7 @@
           <a:bodyPr wrap="square" lIns="0" tIns="0" rIns="0" bIns="0" rtlCol="0" anchor="ctr"/>
           <a:lstStyle/>
           <a:p>
-            <a:pPr indent="0" marL="0">
+            <a:pPr marL="0" indent="0">
               <a:buNone/>
             </a:pPr>
             <a:r>
@@ -19164,7 +19204,7 @@
           <a:bodyPr wrap="square" lIns="0" tIns="0" rIns="0" bIns="0" rtlCol="0" anchor="ctr"/>
           <a:lstStyle/>
           <a:p>
-            <a:pPr algn="r" indent="0" marL="0">
+            <a:pPr marL="0" indent="0" algn="r">
               <a:buNone/>
             </a:pPr>
             <a:r>
@@ -19198,6 +19238,7 @@
         <a:solidFill>
           <a:srgbClr val="FFFFFF"/>
         </a:solidFill>
+        <a:effectLst/>
       </p:bgPr>
     </p:bg>
     <p:spTree>
@@ -19235,7 +19276,7 @@
           <a:bodyPr wrap="square" lIns="0" tIns="0" rIns="0" bIns="0" rtlCol="0" anchor="ctr"/>
           <a:lstStyle/>
           <a:p>
-            <a:pPr indent="0" marL="0">
+            <a:pPr marL="0" indent="0">
               <a:buNone/>
             </a:pPr>
             <a:r>
@@ -19249,9 +19290,6 @@
               </a:rPr>
               <a:t>02</a:t>
             </a:r>
-            <a:pPr indent="0" marL="0">
-              <a:buNone/>
-            </a:pPr>
             <a:r>
               <a:rPr lang="en-US" sz="1100" dirty="0">
                 <a:solidFill>
@@ -19288,7 +19326,7 @@
           <a:bodyPr wrap="square" lIns="0" tIns="0" rIns="0" bIns="0" rtlCol="0" anchor="t"/>
           <a:lstStyle/>
           <a:p>
-            <a:pPr indent="0" marL="0">
+            <a:pPr marL="0" indent="0">
               <a:buNone/>
             </a:pPr>
             <a:r>
@@ -19327,19 +19365,18 @@
           <a:bodyPr wrap="square" lIns="0" tIns="0" rIns="0" bIns="0" rtlCol="0" anchor="ctr"/>
           <a:lstStyle/>
           <a:p>
-            <a:pPr indent="0" marL="0">
+            <a:pPr marL="0" indent="0">
               <a:buNone/>
             </a:pPr>
             <a:r>
-              <a:rPr lang="en-US" sz="1300" dirty="0">
+              <a:rPr lang="ko-KR" altLang="en-US" sz="1300" dirty="0" smtClean="0">
                 <a:solidFill>
                   <a:srgbClr val="6E6E6E"/>
                 </a:solidFill>
                 <a:latin typeface="Calibri" pitchFamily="34" charset="0"/>
-                <a:ea typeface="Calibri" pitchFamily="34" charset="-122"/>
-                <a:cs typeface="Calibri" pitchFamily="34" charset="-120"/>
-              </a:rPr>
-              <a:t>Git 전체 이력 기준 (2026-07-03 ~ 08-28) · 팀원 직접 작성 커밋 976건 · PR 110건</a:t>
+                <a:cs typeface="Calibri" pitchFamily="34" charset="-120"/>
+              </a:rPr>
+              <a:t>체계적인 역할 분담</a:t>
             </a:r>
             <a:endParaRPr lang="en-US" sz="1300" dirty="0"/>
           </a:p>
@@ -19361,17 +19398,41 @@
         </p:nvGraphicFramePr>
         <p:xfrm>
           <a:off x="640080" y="1965960"/>
-          <a:ext cx="10908792" cy="914400"/>
+          <a:ext cx="10908792" cy="2834640"/>
         </p:xfrm>
         <a:graphic>
           <a:graphicData uri="http://schemas.openxmlformats.org/drawingml/2006/table">
             <a:tbl>
               <a:tblPr/>
               <a:tblGrid>
-                <a:gridCol w="1188720"/>
-                <a:gridCol w="1005840"/>
-                <a:gridCol w="1280160"/>
-                <a:gridCol w="7434072"/>
+                <a:gridCol w="1188720">
+                  <a:extLst>
+                    <a:ext uri="{9D8B030D-6E8A-4147-A177-3AD203B41FA5}">
+                      <a16:colId xmlns:a16="http://schemas.microsoft.com/office/drawing/2014/main" val="20000"/>
+                    </a:ext>
+                  </a:extLst>
+                </a:gridCol>
+                <a:gridCol w="1005840">
+                  <a:extLst>
+                    <a:ext uri="{9D8B030D-6E8A-4147-A177-3AD203B41FA5}">
+                      <a16:colId xmlns:a16="http://schemas.microsoft.com/office/drawing/2014/main" val="20001"/>
+                    </a:ext>
+                  </a:extLst>
+                </a:gridCol>
+                <a:gridCol w="1280160">
+                  <a:extLst>
+                    <a:ext uri="{9D8B030D-6E8A-4147-A177-3AD203B41FA5}">
+                      <a16:colId xmlns:a16="http://schemas.microsoft.com/office/drawing/2014/main" val="20002"/>
+                    </a:ext>
+                  </a:extLst>
+                </a:gridCol>
+                <a:gridCol w="7434072">
+                  <a:extLst>
+                    <a:ext uri="{9D8B030D-6E8A-4147-A177-3AD203B41FA5}">
+                      <a16:colId xmlns:a16="http://schemas.microsoft.com/office/drawing/2014/main" val="20003"/>
+                    </a:ext>
+                  </a:extLst>
+                </a:gridCol>
               </a:tblGrid>
               <a:tr h="566928">
                 <a:tc>
@@ -19379,7 +19440,7 @@
                     <a:bodyPr/>
                     <a:lstStyle/>
                     <a:p>
-                      <a:pPr indent="0" marL="0">
+                      <a:pPr marL="0" indent="0">
                         <a:buNone/>
                       </a:pPr>
                       <a:r>
@@ -19447,7 +19508,7 @@
                     <a:bodyPr/>
                     <a:lstStyle/>
                     <a:p>
-                      <a:pPr indent="0" marL="0">
+                      <a:pPr marL="0" indent="0">
                         <a:buNone/>
                       </a:pPr>
                       <a:r>
@@ -19515,7 +19576,7 @@
                     <a:bodyPr/>
                     <a:lstStyle/>
                     <a:p>
-                      <a:pPr indent="0" marL="0">
+                      <a:pPr marL="0" indent="0">
                         <a:buNone/>
                       </a:pPr>
                       <a:r>
@@ -19583,7 +19644,7 @@
                     <a:bodyPr/>
                     <a:lstStyle/>
                     <a:p>
-                      <a:pPr indent="0" marL="0">
+                      <a:pPr marL="0" indent="0">
                         <a:buNone/>
                       </a:pPr>
                       <a:r>
@@ -19646,6 +19707,11 @@
                     </a:solidFill>
                   </a:tcPr>
                 </a:tc>
+                <a:extLst>
+                  <a:ext uri="{0D108BD9-81ED-4DB2-BD59-A6C34878D82A}">
+                    <a16:rowId xmlns:a16="http://schemas.microsoft.com/office/drawing/2014/main" val="10000"/>
+                  </a:ext>
+                </a:extLst>
               </a:tr>
               <a:tr h="566928">
                 <a:tc>
@@ -19653,7 +19719,7 @@
                     <a:bodyPr/>
                     <a:lstStyle/>
                     <a:p>
-                      <a:pPr indent="0" marL="0">
+                      <a:pPr marL="0" indent="0">
                         <a:buNone/>
                       </a:pPr>
                       <a:r>
@@ -19718,7 +19784,7 @@
                     <a:bodyPr/>
                     <a:lstStyle/>
                     <a:p>
-                      <a:pPr indent="0" marL="0">
+                      <a:pPr marL="0" indent="0">
                         <a:buNone/>
                       </a:pPr>
                       <a:r>
@@ -19783,7 +19849,7 @@
                     <a:bodyPr/>
                     <a:lstStyle/>
                     <a:p>
-                      <a:pPr indent="0" marL="0">
+                      <a:pPr marL="0" indent="0">
                         <a:buNone/>
                       </a:pPr>
                       <a:r>
@@ -19848,7 +19914,7 @@
                     <a:bodyPr/>
                     <a:lstStyle/>
                     <a:p>
-                      <a:pPr indent="0" marL="0">
+                      <a:pPr marL="0" indent="0">
                         <a:buNone/>
                       </a:pPr>
                       <a:r>
@@ -19908,6 +19974,11 @@
                     </a:lnB>
                   </a:tcPr>
                 </a:tc>
+                <a:extLst>
+                  <a:ext uri="{0D108BD9-81ED-4DB2-BD59-A6C34878D82A}">
+                    <a16:rowId xmlns:a16="http://schemas.microsoft.com/office/drawing/2014/main" val="10001"/>
+                  </a:ext>
+                </a:extLst>
               </a:tr>
               <a:tr h="566928">
                 <a:tc>
@@ -19915,7 +19986,7 @@
                     <a:bodyPr/>
                     <a:lstStyle/>
                     <a:p>
-                      <a:pPr indent="0" marL="0">
+                      <a:pPr marL="0" indent="0">
                         <a:buNone/>
                       </a:pPr>
                       <a:r>
@@ -19980,7 +20051,7 @@
                     <a:bodyPr/>
                     <a:lstStyle/>
                     <a:p>
-                      <a:pPr indent="0" marL="0">
+                      <a:pPr marL="0" indent="0">
                         <a:buNone/>
                       </a:pPr>
                       <a:r>
@@ -20045,7 +20116,7 @@
                     <a:bodyPr/>
                     <a:lstStyle/>
                     <a:p>
-                      <a:pPr indent="0" marL="0">
+                      <a:pPr marL="0" indent="0">
                         <a:buNone/>
                       </a:pPr>
                       <a:r>
@@ -20110,7 +20181,7 @@
                     <a:bodyPr/>
                     <a:lstStyle/>
                     <a:p>
-                      <a:pPr indent="0" marL="0">
+                      <a:pPr marL="0" indent="0">
                         <a:buNone/>
                       </a:pPr>
                       <a:r>
@@ -20170,6 +20241,11 @@
                     </a:lnB>
                   </a:tcPr>
                 </a:tc>
+                <a:extLst>
+                  <a:ext uri="{0D108BD9-81ED-4DB2-BD59-A6C34878D82A}">
+                    <a16:rowId xmlns:a16="http://schemas.microsoft.com/office/drawing/2014/main" val="10002"/>
+                  </a:ext>
+                </a:extLst>
               </a:tr>
               <a:tr h="566928">
                 <a:tc>
@@ -20177,7 +20253,7 @@
                     <a:bodyPr/>
                     <a:lstStyle/>
                     <a:p>
-                      <a:pPr indent="0" marL="0">
+                      <a:pPr marL="0" indent="0">
                         <a:buNone/>
                       </a:pPr>
                       <a:r>
@@ -20242,7 +20318,7 @@
                     <a:bodyPr/>
                     <a:lstStyle/>
                     <a:p>
-                      <a:pPr indent="0" marL="0">
+                      <a:pPr marL="0" indent="0">
                         <a:buNone/>
                       </a:pPr>
                       <a:r>
@@ -20307,7 +20383,7 @@
                     <a:bodyPr/>
                     <a:lstStyle/>
                     <a:p>
-                      <a:pPr indent="0" marL="0">
+                      <a:pPr marL="0" indent="0">
                         <a:buNone/>
                       </a:pPr>
                       <a:r>
@@ -20372,7 +20448,7 @@
                     <a:bodyPr/>
                     <a:lstStyle/>
                     <a:p>
-                      <a:pPr indent="0" marL="0">
+                      <a:pPr marL="0" indent="0">
                         <a:buNone/>
                       </a:pPr>
                       <a:r>
@@ -20432,6 +20508,11 @@
                     </a:lnB>
                   </a:tcPr>
                 </a:tc>
+                <a:extLst>
+                  <a:ext uri="{0D108BD9-81ED-4DB2-BD59-A6C34878D82A}">
+                    <a16:rowId xmlns:a16="http://schemas.microsoft.com/office/drawing/2014/main" val="10003"/>
+                  </a:ext>
+                </a:extLst>
               </a:tr>
               <a:tr h="566928">
                 <a:tc>
@@ -20439,7 +20520,7 @@
                     <a:bodyPr/>
                     <a:lstStyle/>
                     <a:p>
-                      <a:pPr indent="0" marL="0">
+                      <a:pPr marL="0" indent="0">
                         <a:buNone/>
                       </a:pPr>
                       <a:r>
@@ -20504,7 +20585,7 @@
                     <a:bodyPr/>
                     <a:lstStyle/>
                     <a:p>
-                      <a:pPr indent="0" marL="0">
+                      <a:pPr marL="0" indent="0">
                         <a:buNone/>
                       </a:pPr>
                       <a:r>
@@ -20569,7 +20650,7 @@
                     <a:bodyPr/>
                     <a:lstStyle/>
                     <a:p>
-                      <a:pPr indent="0" marL="0">
+                      <a:pPr marL="0" indent="0">
                         <a:buNone/>
                       </a:pPr>
                       <a:r>
@@ -20634,7 +20715,7 @@
                     <a:bodyPr/>
                     <a:lstStyle/>
                     <a:p>
-                      <a:pPr indent="0" marL="0">
+                      <a:pPr marL="0" indent="0">
                         <a:buNone/>
                       </a:pPr>
                       <a:r>
@@ -20694,6 +20775,11 @@
                     </a:lnB>
                   </a:tcPr>
                 </a:tc>
+                <a:extLst>
+                  <a:ext uri="{0D108BD9-81ED-4DB2-BD59-A6C34878D82A}">
+                    <a16:rowId xmlns:a16="http://schemas.microsoft.com/office/drawing/2014/main" val="10004"/>
+                  </a:ext>
+                </a:extLst>
               </a:tr>
             </a:tbl>
           </a:graphicData>
@@ -20720,7 +20806,7 @@
           <a:bodyPr wrap="square" lIns="0" tIns="0" rIns="0" bIns="0" rtlCol="0" anchor="ctr"/>
           <a:lstStyle/>
           <a:p>
-            <a:pPr indent="0" marL="0">
+            <a:pPr marL="0" indent="0">
               <a:buNone/>
             </a:pPr>
             <a:r>
@@ -20740,7 +20826,7 @@
       </p:sp>
       <p:sp>
         <p:nvSpPr>
-          <p:cNvPr id="7" name="Text 4"/>
+          <p:cNvPr id="5" name="Text 4"/>
           <p:cNvSpPr txBox="1"/>
           <p:nvPr/>
         </p:nvSpPr>
@@ -20759,7 +20845,7 @@
           <a:bodyPr wrap="square" lIns="0" tIns="0" rIns="0" bIns="0" rtlCol="0" anchor="t"/>
           <a:lstStyle/>
           <a:p>
-            <a:pPr indent="0" marL="0">
+            <a:pPr marL="0" indent="0">
               <a:spcAft>
                 <a:spcPts val="600"/>
               </a:spcAft>
@@ -20779,7 +20865,7 @@
             <a:endParaRPr lang="en-US" sz="1200" dirty="0"/>
           </a:p>
           <a:p>
-            <a:pPr indent="0" marL="0">
+            <a:pPr marL="0" indent="0">
               <a:spcAft>
                 <a:spcPts val="600"/>
               </a:spcAft>
@@ -20799,7 +20885,7 @@
             <a:endParaRPr lang="en-US" sz="1200" dirty="0"/>
           </a:p>
           <a:p>
-            <a:pPr indent="0" marL="0">
+            <a:pPr marL="0" indent="0">
               <a:spcAft>
                 <a:spcPts val="600"/>
               </a:spcAft>
@@ -20841,7 +20927,7 @@
           <a:bodyPr wrap="square" lIns="0" tIns="0" rIns="0" bIns="0" rtlCol="0" anchor="ctr"/>
           <a:lstStyle/>
           <a:p>
-            <a:pPr indent="0" marL="0">
+            <a:pPr marL="0" indent="0">
               <a:buNone/>
             </a:pPr>
             <a:r>
@@ -20880,7 +20966,7 @@
           <a:bodyPr wrap="square" lIns="0" tIns="0" rIns="0" bIns="0" rtlCol="0" anchor="ctr"/>
           <a:lstStyle/>
           <a:p>
-            <a:pPr indent="0" marL="0">
+            <a:pPr marL="0" indent="0">
               <a:buNone/>
             </a:pPr>
             <a:r>
@@ -20919,7 +21005,7 @@
           <a:bodyPr wrap="square" lIns="0" tIns="0" rIns="0" bIns="0" rtlCol="0" anchor="ctr"/>
           <a:lstStyle/>
           <a:p>
-            <a:pPr algn="r" indent="0" marL="0">
+            <a:pPr marL="0" indent="0" algn="r">
               <a:buNone/>
             </a:pPr>
             <a:r>
@@ -20953,6 +21039,7 @@
         <a:solidFill>
           <a:srgbClr val="FFFFFF"/>
         </a:solidFill>
+        <a:effectLst/>
       </p:bgPr>
     </p:bg>
     <p:spTree>
@@ -20990,7 +21077,7 @@
           <a:bodyPr wrap="square" lIns="0" tIns="0" rIns="0" bIns="0" rtlCol="0" anchor="ctr"/>
           <a:lstStyle/>
           <a:p>
-            <a:pPr indent="0" marL="0">
+            <a:pPr marL="0" indent="0">
               <a:buNone/>
             </a:pPr>
             <a:r>
@@ -21004,9 +21091,6 @@
               </a:rPr>
               <a:t>03</a:t>
             </a:r>
-            <a:pPr indent="0" marL="0">
-              <a:buNone/>
-            </a:pPr>
             <a:r>
               <a:rPr lang="en-US" sz="1100" dirty="0">
                 <a:solidFill>
@@ -21043,7 +21127,7 @@
           <a:bodyPr wrap="square" lIns="0" tIns="0" rIns="0" bIns="0" rtlCol="0" anchor="t"/>
           <a:lstStyle/>
           <a:p>
-            <a:pPr indent="0" marL="0">
+            <a:pPr marL="0" indent="0">
               <a:buNone/>
             </a:pPr>
             <a:r>
@@ -21082,7 +21166,7 @@
           <a:bodyPr wrap="square" lIns="0" tIns="0" rIns="0" bIns="0" rtlCol="0" anchor="ctr"/>
           <a:lstStyle/>
           <a:p>
-            <a:pPr indent="0" marL="0">
+            <a:pPr marL="0" indent="0">
               <a:buNone/>
             </a:pPr>
             <a:r>
@@ -21116,17 +21200,41 @@
         </p:nvGraphicFramePr>
         <p:xfrm>
           <a:off x="640080" y="2011680"/>
-          <a:ext cx="10908792" cy="914400"/>
+          <a:ext cx="10908792" cy="3200400"/>
         </p:xfrm>
         <a:graphic>
           <a:graphicData uri="http://schemas.openxmlformats.org/drawingml/2006/table">
             <a:tbl>
               <a:tblPr/>
               <a:tblGrid>
-                <a:gridCol w="1737360"/>
-                <a:gridCol w="2194560"/>
-                <a:gridCol w="4690872"/>
-                <a:gridCol w="2286000"/>
+                <a:gridCol w="1737360">
+                  <a:extLst>
+                    <a:ext uri="{9D8B030D-6E8A-4147-A177-3AD203B41FA5}">
+                      <a16:colId xmlns:a16="http://schemas.microsoft.com/office/drawing/2014/main" val="20000"/>
+                    </a:ext>
+                  </a:extLst>
+                </a:gridCol>
+                <a:gridCol w="2194560">
+                  <a:extLst>
+                    <a:ext uri="{9D8B030D-6E8A-4147-A177-3AD203B41FA5}">
+                      <a16:colId xmlns:a16="http://schemas.microsoft.com/office/drawing/2014/main" val="20001"/>
+                    </a:ext>
+                  </a:extLst>
+                </a:gridCol>
+                <a:gridCol w="4690872">
+                  <a:extLst>
+                    <a:ext uri="{9D8B030D-6E8A-4147-A177-3AD203B41FA5}">
+                      <a16:colId xmlns:a16="http://schemas.microsoft.com/office/drawing/2014/main" val="20002"/>
+                    </a:ext>
+                  </a:extLst>
+                </a:gridCol>
+                <a:gridCol w="2286000">
+                  <a:extLst>
+                    <a:ext uri="{9D8B030D-6E8A-4147-A177-3AD203B41FA5}">
+                      <a16:colId xmlns:a16="http://schemas.microsoft.com/office/drawing/2014/main" val="20003"/>
+                    </a:ext>
+                  </a:extLst>
+                </a:gridCol>
               </a:tblGrid>
               <a:tr h="457200">
                 <a:tc>
@@ -21134,7 +21242,7 @@
                     <a:bodyPr/>
                     <a:lstStyle/>
                     <a:p>
-                      <a:pPr indent="0" marL="0">
+                      <a:pPr marL="0" indent="0">
                         <a:buNone/>
                       </a:pPr>
                       <a:r>
@@ -21202,7 +21310,7 @@
                     <a:bodyPr/>
                     <a:lstStyle/>
                     <a:p>
-                      <a:pPr indent="0" marL="0">
+                      <a:pPr marL="0" indent="0">
                         <a:buNone/>
                       </a:pPr>
                       <a:r>
@@ -21270,7 +21378,7 @@
                     <a:bodyPr/>
                     <a:lstStyle/>
                     <a:p>
-                      <a:pPr indent="0" marL="0">
+                      <a:pPr marL="0" indent="0">
                         <a:buNone/>
                       </a:pPr>
                       <a:r>
@@ -21338,7 +21446,7 @@
                     <a:bodyPr/>
                     <a:lstStyle/>
                     <a:p>
-                      <a:pPr indent="0" marL="0">
+                      <a:pPr marL="0" indent="0">
                         <a:buNone/>
                       </a:pPr>
                       <a:r>
@@ -21401,6 +21509,11 @@
                     </a:solidFill>
                   </a:tcPr>
                 </a:tc>
+                <a:extLst>
+                  <a:ext uri="{0D108BD9-81ED-4DB2-BD59-A6C34878D82A}">
+                    <a16:rowId xmlns:a16="http://schemas.microsoft.com/office/drawing/2014/main" val="10000"/>
+                  </a:ext>
+                </a:extLst>
               </a:tr>
               <a:tr h="457200">
                 <a:tc>
@@ -21408,7 +21521,7 @@
                     <a:bodyPr/>
                     <a:lstStyle/>
                     <a:p>
-                      <a:pPr indent="0" marL="0">
+                      <a:pPr marL="0" indent="0">
                         <a:buNone/>
                       </a:pPr>
                       <a:r>
@@ -21473,7 +21586,7 @@
                     <a:bodyPr/>
                     <a:lstStyle/>
                     <a:p>
-                      <a:pPr indent="0" marL="0">
+                      <a:pPr marL="0" indent="0">
                         <a:buNone/>
                       </a:pPr>
                       <a:r>
@@ -21538,7 +21651,7 @@
                     <a:bodyPr/>
                     <a:lstStyle/>
                     <a:p>
-                      <a:pPr indent="0" marL="0">
+                      <a:pPr marL="0" indent="0">
                         <a:buNone/>
                       </a:pPr>
                       <a:r>
@@ -21603,7 +21716,7 @@
                     <a:bodyPr/>
                     <a:lstStyle/>
                     <a:p>
-                      <a:pPr indent="0" marL="0">
+                      <a:pPr marL="0" indent="0">
                         <a:buNone/>
                       </a:pPr>
                       <a:r>
@@ -21663,6 +21776,11 @@
                     </a:lnB>
                   </a:tcPr>
                 </a:tc>
+                <a:extLst>
+                  <a:ext uri="{0D108BD9-81ED-4DB2-BD59-A6C34878D82A}">
+                    <a16:rowId xmlns:a16="http://schemas.microsoft.com/office/drawing/2014/main" val="10001"/>
+                  </a:ext>
+                </a:extLst>
               </a:tr>
               <a:tr h="457200">
                 <a:tc>
@@ -21670,7 +21788,7 @@
                     <a:bodyPr/>
                     <a:lstStyle/>
                     <a:p>
-                      <a:pPr indent="0" marL="0">
+                      <a:pPr marL="0" indent="0">
                         <a:buNone/>
                       </a:pPr>
                       <a:r>
@@ -21735,7 +21853,7 @@
                     <a:bodyPr/>
                     <a:lstStyle/>
                     <a:p>
-                      <a:pPr indent="0" marL="0">
+                      <a:pPr marL="0" indent="0">
                         <a:buNone/>
                       </a:pPr>
                       <a:r>
@@ -21800,7 +21918,7 @@
                     <a:bodyPr/>
                     <a:lstStyle/>
                     <a:p>
-                      <a:pPr indent="0" marL="0">
+                      <a:pPr marL="0" indent="0">
                         <a:buNone/>
                       </a:pPr>
                       <a:r>
@@ -21865,7 +21983,7 @@
                     <a:bodyPr/>
                     <a:lstStyle/>
                     <a:p>
-                      <a:pPr indent="0" marL="0">
+                      <a:pPr marL="0" indent="0">
                         <a:buNone/>
                       </a:pPr>
                       <a:r>
@@ -21925,6 +22043,11 @@
                     </a:lnB>
                   </a:tcPr>
                 </a:tc>
+                <a:extLst>
+                  <a:ext uri="{0D108BD9-81ED-4DB2-BD59-A6C34878D82A}">
+                    <a16:rowId xmlns:a16="http://schemas.microsoft.com/office/drawing/2014/main" val="10002"/>
+                  </a:ext>
+                </a:extLst>
               </a:tr>
               <a:tr h="457200">
                 <a:tc>
@@ -21932,7 +22055,7 @@
                     <a:bodyPr/>
                     <a:lstStyle/>
                     <a:p>
-                      <a:pPr indent="0" marL="0">
+                      <a:pPr marL="0" indent="0">
                         <a:buNone/>
                       </a:pPr>
                       <a:r>
@@ -21997,7 +22120,7 @@
                     <a:bodyPr/>
                     <a:lstStyle/>
                     <a:p>
-                      <a:pPr indent="0" marL="0">
+                      <a:pPr marL="0" indent="0">
                         <a:buNone/>
                       </a:pPr>
                       <a:r>
@@ -22062,7 +22185,7 @@
                     <a:bodyPr/>
                     <a:lstStyle/>
                     <a:p>
-                      <a:pPr indent="0" marL="0">
+                      <a:pPr marL="0" indent="0">
                         <a:buNone/>
                       </a:pPr>
                       <a:r>
@@ -22127,7 +22250,7 @@
                     <a:bodyPr/>
                     <a:lstStyle/>
                     <a:p>
-                      <a:pPr indent="0" marL="0">
+                      <a:pPr marL="0" indent="0">
                         <a:buNone/>
                       </a:pPr>
                       <a:r>
@@ -22187,6 +22310,11 @@
                     </a:lnB>
                   </a:tcPr>
                 </a:tc>
+                <a:extLst>
+                  <a:ext uri="{0D108BD9-81ED-4DB2-BD59-A6C34878D82A}">
+                    <a16:rowId xmlns:a16="http://schemas.microsoft.com/office/drawing/2014/main" val="10003"/>
+                  </a:ext>
+                </a:extLst>
               </a:tr>
               <a:tr h="457200">
                 <a:tc>
@@ -22194,7 +22322,7 @@
                     <a:bodyPr/>
                     <a:lstStyle/>
                     <a:p>
-                      <a:pPr indent="0" marL="0">
+                      <a:pPr marL="0" indent="0">
                         <a:buNone/>
                       </a:pPr>
                       <a:r>
@@ -22259,7 +22387,7 @@
                     <a:bodyPr/>
                     <a:lstStyle/>
                     <a:p>
-                      <a:pPr indent="0" marL="0">
+                      <a:pPr marL="0" indent="0">
                         <a:buNone/>
                       </a:pPr>
                       <a:r>
@@ -22324,7 +22452,7 @@
                     <a:bodyPr/>
                     <a:lstStyle/>
                     <a:p>
-                      <a:pPr indent="0" marL="0">
+                      <a:pPr marL="0" indent="0">
                         <a:buNone/>
                       </a:pPr>
                       <a:r>
@@ -22389,7 +22517,7 @@
                     <a:bodyPr/>
                     <a:lstStyle/>
                     <a:p>
-                      <a:pPr indent="0" marL="0">
+                      <a:pPr marL="0" indent="0">
                         <a:buNone/>
                       </a:pPr>
                       <a:r>
@@ -22449,6 +22577,11 @@
                     </a:lnB>
                   </a:tcPr>
                 </a:tc>
+                <a:extLst>
+                  <a:ext uri="{0D108BD9-81ED-4DB2-BD59-A6C34878D82A}">
+                    <a16:rowId xmlns:a16="http://schemas.microsoft.com/office/drawing/2014/main" val="10004"/>
+                  </a:ext>
+                </a:extLst>
               </a:tr>
               <a:tr h="457200">
                 <a:tc>
@@ -22456,7 +22589,7 @@
                     <a:bodyPr/>
                     <a:lstStyle/>
                     <a:p>
-                      <a:pPr indent="0" marL="0">
+                      <a:pPr marL="0" indent="0">
                         <a:buNone/>
                       </a:pPr>
                       <a:r>
@@ -22521,7 +22654,7 @@
                     <a:bodyPr/>
                     <a:lstStyle/>
                     <a:p>
-                      <a:pPr indent="0" marL="0">
+                      <a:pPr marL="0" indent="0">
                         <a:buNone/>
                       </a:pPr>
                       <a:r>
@@ -22586,7 +22719,7 @@
                     <a:bodyPr/>
                     <a:lstStyle/>
                     <a:p>
-                      <a:pPr indent="0" marL="0">
+                      <a:pPr marL="0" indent="0">
                         <a:buNone/>
                       </a:pPr>
                       <a:r>
@@ -22651,7 +22784,7 @@
                     <a:bodyPr/>
                     <a:lstStyle/>
                     <a:p>
-                      <a:pPr indent="0" marL="0">
+                      <a:pPr marL="0" indent="0">
                         <a:buNone/>
                       </a:pPr>
                       <a:r>
@@ -22711,6 +22844,11 @@
                     </a:lnB>
                   </a:tcPr>
                 </a:tc>
+                <a:extLst>
+                  <a:ext uri="{0D108BD9-81ED-4DB2-BD59-A6C34878D82A}">
+                    <a16:rowId xmlns:a16="http://schemas.microsoft.com/office/drawing/2014/main" val="10005"/>
+                  </a:ext>
+                </a:extLst>
               </a:tr>
               <a:tr h="457200">
                 <a:tc>
@@ -22718,7 +22856,7 @@
                     <a:bodyPr/>
                     <a:lstStyle/>
                     <a:p>
-                      <a:pPr indent="0" marL="0">
+                      <a:pPr marL="0" indent="0">
                         <a:buNone/>
                       </a:pPr>
                       <a:r>
@@ -22783,7 +22921,7 @@
                     <a:bodyPr/>
                     <a:lstStyle/>
                     <a:p>
-                      <a:pPr indent="0" marL="0">
+                      <a:pPr marL="0" indent="0">
                         <a:buNone/>
                       </a:pPr>
                       <a:r>
@@ -22848,7 +22986,7 @@
                     <a:bodyPr/>
                     <a:lstStyle/>
                     <a:p>
-                      <a:pPr indent="0" marL="0">
+                      <a:pPr marL="0" indent="0">
                         <a:buNone/>
                       </a:pPr>
                       <a:r>
@@ -22913,7 +23051,7 @@
                     <a:bodyPr/>
                     <a:lstStyle/>
                     <a:p>
-                      <a:pPr indent="0" marL="0">
+                      <a:pPr marL="0" indent="0">
                         <a:buNone/>
                       </a:pPr>
                       <a:r>
@@ -22973,6 +23111,11 @@
                     </a:lnB>
                   </a:tcPr>
                 </a:tc>
+                <a:extLst>
+                  <a:ext uri="{0D108BD9-81ED-4DB2-BD59-A6C34878D82A}">
+                    <a16:rowId xmlns:a16="http://schemas.microsoft.com/office/drawing/2014/main" val="10006"/>
+                  </a:ext>
+                </a:extLst>
               </a:tr>
             </a:tbl>
           </a:graphicData>
@@ -22999,7 +23142,7 @@
           <a:bodyPr wrap="square" lIns="0" tIns="0" rIns="0" bIns="0" rtlCol="0" anchor="ctr"/>
           <a:lstStyle/>
           <a:p>
-            <a:pPr indent="0" marL="0">
+            <a:pPr marL="0" indent="0">
               <a:buNone/>
             </a:pPr>
             <a:r>
@@ -23038,7 +23181,7 @@
           <a:bodyPr wrap="square" lIns="0" tIns="0" rIns="0" bIns="0" rtlCol="0" anchor="ctr"/>
           <a:lstStyle/>
           <a:p>
-            <a:pPr algn="r" indent="0" marL="0">
+            <a:pPr marL="0" indent="0" algn="r">
               <a:buNone/>
             </a:pPr>
             <a:r>
@@ -23072,6 +23215,7 @@
         <a:solidFill>
           <a:srgbClr val="2B2B2B"/>
         </a:solidFill>
+        <a:effectLst/>
       </p:bgPr>
     </p:bg>
     <p:spTree>
@@ -23109,7 +23253,7 @@
           <a:bodyPr wrap="square" lIns="0" tIns="0" rIns="0" bIns="0" rtlCol="0" anchor="ctr"/>
           <a:lstStyle/>
           <a:p>
-            <a:pPr indent="0" marL="0">
+            <a:pPr marL="0" indent="0">
               <a:buNone/>
             </a:pPr>
             <a:r>
@@ -23148,7 +23292,7 @@
           <a:bodyPr wrap="square" lIns="0" tIns="0" rIns="0" bIns="0" rtlCol="0" anchor="ctr"/>
           <a:lstStyle/>
           <a:p>
-            <a:pPr indent="0" marL="0">
+            <a:pPr marL="0" indent="0">
               <a:buNone/>
             </a:pPr>
             <a:r>
@@ -23187,7 +23331,7 @@
           <a:bodyPr wrap="square" lIns="0" tIns="0" rIns="0" bIns="0" rtlCol="0" anchor="ctr"/>
           <a:lstStyle/>
           <a:p>
-            <a:pPr indent="0" marL="0">
+            <a:pPr marL="0" indent="0">
               <a:buNone/>
             </a:pPr>
             <a:r>
@@ -23221,6 +23365,7 @@
         <a:solidFill>
           <a:srgbClr val="FFFFFF"/>
         </a:solidFill>
+        <a:effectLst/>
       </p:bgPr>
     </p:bg>
     <p:spTree>
@@ -23258,7 +23403,7 @@
           <a:bodyPr wrap="square" lIns="0" tIns="0" rIns="0" bIns="0" rtlCol="0" anchor="ctr"/>
           <a:lstStyle/>
           <a:p>
-            <a:pPr indent="0" marL="0">
+            <a:pPr marL="0" indent="0">
               <a:buNone/>
             </a:pPr>
             <a:r>
@@ -23272,9 +23417,6 @@
               </a:rPr>
               <a:t>04</a:t>
             </a:r>
-            <a:pPr indent="0" marL="0">
-              <a:buNone/>
-            </a:pPr>
             <a:r>
               <a:rPr lang="en-US" sz="1100" dirty="0">
                 <a:solidFill>
@@ -23311,7 +23453,7 @@
           <a:bodyPr wrap="square" lIns="0" tIns="0" rIns="0" bIns="0" rtlCol="0" anchor="t"/>
           <a:lstStyle/>
           <a:p>
-            <a:pPr indent="0" marL="0">
+            <a:pPr marL="0" indent="0">
               <a:buNone/>
             </a:pPr>
             <a:r>
@@ -23350,7 +23492,7 @@
           <a:bodyPr wrap="square" lIns="0" tIns="0" rIns="0" bIns="0" rtlCol="0" anchor="ctr"/>
           <a:lstStyle/>
           <a:p>
-            <a:pPr indent="0" marL="0">
+            <a:pPr marL="0" indent="0">
               <a:buNone/>
             </a:pPr>
             <a:r>
@@ -23389,7 +23531,7 @@
           <a:bodyPr wrap="square" lIns="0" tIns="0" rIns="0" bIns="0" rtlCol="0" anchor="t"/>
           <a:lstStyle/>
           <a:p>
-            <a:pPr indent="0" marL="0">
+            <a:pPr marL="0" indent="0">
               <a:spcAft>
                 <a:spcPts val="600"/>
               </a:spcAft>
@@ -23431,7 +23573,7 @@
           <a:bodyPr wrap="square" lIns="0" tIns="0" rIns="0" bIns="0" rtlCol="0" anchor="ctr"/>
           <a:lstStyle/>
           <a:p>
-            <a:pPr indent="0" marL="0">
+            <a:pPr marL="0" indent="0">
               <a:buNone/>
             </a:pPr>
             <a:r>
@@ -23576,7 +23718,7 @@
           <a:bodyPr wrap="square" lIns="0" tIns="0" rIns="0" bIns="0" rtlCol="0" anchor="ctr"/>
           <a:lstStyle/>
           <a:p>
-            <a:pPr indent="0" marL="0">
+            <a:pPr marL="0" indent="0">
               <a:buNone/>
             </a:pPr>
             <a:r>
@@ -23700,7 +23842,7 @@
           <a:bodyPr wrap="square" lIns="0" tIns="0" rIns="0" bIns="0" rtlCol="0" anchor="ctr"/>
           <a:lstStyle/>
           <a:p>
-            <a:pPr indent="0" marL="0">
+            <a:pPr marL="0" indent="0">
               <a:buNone/>
             </a:pPr>
             <a:r>
@@ -23739,7 +23881,7 @@
           <a:bodyPr wrap="square" lIns="0" tIns="0" rIns="0" bIns="0" rtlCol="0" anchor="t"/>
           <a:lstStyle/>
           <a:p>
-            <a:pPr indent="0" marL="0">
+            <a:pPr marL="0" indent="0">
               <a:spcAft>
                 <a:spcPts val="600"/>
               </a:spcAft>
@@ -23759,7 +23901,7 @@
             <a:endParaRPr lang="en-US" sz="1250" dirty="0"/>
           </a:p>
           <a:p>
-            <a:pPr indent="0" marL="0">
+            <a:pPr marL="0" indent="0">
               <a:spcAft>
                 <a:spcPts val="600"/>
               </a:spcAft>
@@ -23801,7 +23943,7 @@
           <a:bodyPr wrap="square" lIns="0" tIns="0" rIns="0" bIns="0" rtlCol="0" anchor="ctr"/>
           <a:lstStyle/>
           <a:p>
-            <a:pPr indent="0" marL="0">
+            <a:pPr marL="0" indent="0">
               <a:buNone/>
             </a:pPr>
             <a:r>
@@ -23840,7 +23982,7 @@
           <a:bodyPr wrap="square" lIns="0" tIns="0" rIns="0" bIns="0" rtlCol="0" anchor="ctr"/>
           <a:lstStyle/>
           <a:p>
-            <a:pPr algn="r" indent="0" marL="0">
+            <a:pPr marL="0" indent="0" algn="r">
               <a:buNone/>
             </a:pPr>
             <a:r>
@@ -24159,4 +24301,265 @@
     </a:ext>
   </a:extLst>
 </a:theme>
+</file>
+
+<file path=ppt/theme/theme2.xml><?xml version="1.0" encoding="utf-8"?>
+<a:theme xmlns:a="http://schemas.openxmlformats.org/drawingml/2006/main" name="Office 테마">
+  <a:themeElements>
+    <a:clrScheme name="Office">
+      <a:dk1>
+        <a:sysClr val="windowText" lastClr="000000"/>
+      </a:dk1>
+      <a:lt1>
+        <a:sysClr val="window" lastClr="FFFFFF"/>
+      </a:lt1>
+      <a:dk2>
+        <a:srgbClr val="44546A"/>
+      </a:dk2>
+      <a:lt2>
+        <a:srgbClr val="E7E6E6"/>
+      </a:lt2>
+      <a:accent1>
+        <a:srgbClr val="5B9BD5"/>
+      </a:accent1>
+      <a:accent2>
+        <a:srgbClr val="ED7D31"/>
+      </a:accent2>
+      <a:accent3>
+        <a:srgbClr val="A5A5A5"/>
+      </a:accent3>
+      <a:accent4>
+        <a:srgbClr val="FFC000"/>
+      </a:accent4>
+      <a:accent5>
+        <a:srgbClr val="4472C4"/>
+      </a:accent5>
+      <a:accent6>
+        <a:srgbClr val="70AD47"/>
+      </a:accent6>
+      <a:hlink>
+        <a:srgbClr val="0563C1"/>
+      </a:hlink>
+      <a:folHlink>
+        <a:srgbClr val="954F72"/>
+      </a:folHlink>
+    </a:clrScheme>
+    <a:fontScheme name="Office">
+      <a:majorFont>
+        <a:latin typeface="맑은 고딕" panose="020F0302020204030204"/>
+        <a:ea typeface=""/>
+        <a:cs typeface=""/>
+        <a:font script="Jpan" typeface="游ゴシック Light"/>
+        <a:font script="Hang" typeface="맑은 고딕"/>
+        <a:font script="Hans" typeface="等线 Light"/>
+        <a:font script="Hant" typeface="新細明體"/>
+        <a:font script="Arab" typeface="Times New Roman"/>
+        <a:font script="Hebr" typeface="Times New Roman"/>
+        <a:font script="Thai" typeface="Angsana New"/>
+        <a:font script="Ethi" typeface="Nyala"/>
+        <a:font script="Beng" typeface="Vrinda"/>
+        <a:font script="Gujr" typeface="Shruti"/>
+        <a:font script="Khmr" typeface="MoolBoran"/>
+        <a:font script="Knda" typeface="Tunga"/>
+        <a:font script="Guru" typeface="Raavi"/>
+        <a:font script="Cans" typeface="Euphemia"/>
+        <a:font script="Cher" typeface="Plantagenet Cherokee"/>
+        <a:font script="Yiii" typeface="Microsoft Yi Baiti"/>
+        <a:font script="Tibt" typeface="Microsoft Himalaya"/>
+        <a:font script="Thaa" typeface="MV Boli"/>
+        <a:font script="Deva" typeface="Mangal"/>
+        <a:font script="Telu" typeface="Gautami"/>
+        <a:font script="Taml" typeface="Latha"/>
+        <a:font script="Syrc" typeface="Estrangelo Edessa"/>
+        <a:font script="Orya" typeface="Kalinga"/>
+        <a:font script="Mlym" typeface="Kartika"/>
+        <a:font script="Laoo" typeface="DokChampa"/>
+        <a:font script="Sinh" typeface="Iskoola Pota"/>
+        <a:font script="Mong" typeface="Mongolian Baiti"/>
+        <a:font script="Viet" typeface="Times New Roman"/>
+        <a:font script="Uigh" typeface="Microsoft Uighur"/>
+        <a:font script="Geor" typeface="Sylfaen"/>
+      </a:majorFont>
+      <a:minorFont>
+        <a:latin typeface="맑은 고딕" panose="020F0502020204030204"/>
+        <a:ea typeface=""/>
+        <a:cs typeface=""/>
+        <a:font script="Jpan" typeface="游ゴシック"/>
+        <a:font script="Hang" typeface="맑은 고딕"/>
+        <a:font script="Hans" typeface="等线"/>
+        <a:font script="Hant" typeface="新細明體"/>
+        <a:font script="Arab" typeface="Arial"/>
+        <a:font script="Hebr" typeface="Arial"/>
+        <a:font script="Thai" typeface="Cordia New"/>
+        <a:font script="Ethi" typeface="Nyala"/>
+        <a:font script="Beng" typeface="Vrinda"/>
+        <a:font script="Gujr" typeface="Shruti"/>
+        <a:font script="Khmr" typeface="DaunPenh"/>
+        <a:font script="Knda" typeface="Tunga"/>
+        <a:font script="Guru" typeface="Raavi"/>
+        <a:font script="Cans" typeface="Euphemia"/>
+        <a:font script="Cher" typeface="Plantagenet Cherokee"/>
+        <a:font script="Yiii" typeface="Microsoft Yi Baiti"/>
+        <a:font script="Tibt" typeface="Microsoft Himalaya"/>
+        <a:font script="Thaa" typeface="MV Boli"/>
+        <a:font script="Deva" typeface="Mangal"/>
+        <a:font script="Telu" typeface="Gautami"/>
+        <a:font script="Taml" typeface="Latha"/>
+        <a:font script="Syrc" typeface="Estrangelo Edessa"/>
+        <a:font script="Orya" typeface="Kalinga"/>
+        <a:font script="Mlym" typeface="Kartika"/>
+        <a:font script="Laoo" typeface="DokChampa"/>
+        <a:font script="Sinh" typeface="Iskoola Pota"/>
+        <a:font script="Mong" typeface="Mongolian Baiti"/>
+        <a:font script="Viet" typeface="Arial"/>
+        <a:font script="Uigh" typeface="Microsoft Uighur"/>
+        <a:font script="Geor" typeface="Sylfaen"/>
+      </a:minorFont>
+    </a:fontScheme>
+    <a:fmtScheme name="Office">
+      <a:fillStyleLst>
+        <a:solidFill>
+          <a:schemeClr val="phClr"/>
+        </a:solidFill>
+        <a:gradFill rotWithShape="1">
+          <a:gsLst>
+            <a:gs pos="0">
+              <a:schemeClr val="phClr">
+                <a:lumMod val="110000"/>
+                <a:satMod val="105000"/>
+                <a:tint val="67000"/>
+              </a:schemeClr>
+            </a:gs>
+            <a:gs pos="50000">
+              <a:schemeClr val="phClr">
+                <a:lumMod val="105000"/>
+                <a:satMod val="103000"/>
+                <a:tint val="73000"/>
+              </a:schemeClr>
+            </a:gs>
+            <a:gs pos="100000">
+              <a:schemeClr val="phClr">
+                <a:lumMod val="105000"/>
+                <a:satMod val="109000"/>
+                <a:tint val="81000"/>
+              </a:schemeClr>
+            </a:gs>
+          </a:gsLst>
+          <a:lin ang="5400000" scaled="0"/>
+        </a:gradFill>
+        <a:gradFill rotWithShape="1">
+          <a:gsLst>
+            <a:gs pos="0">
+              <a:schemeClr val="phClr">
+                <a:satMod val="103000"/>
+                <a:lumMod val="102000"/>
+                <a:tint val="94000"/>
+              </a:schemeClr>
+            </a:gs>
+            <a:gs pos="50000">
+              <a:schemeClr val="phClr">
+                <a:satMod val="110000"/>
+                <a:lumMod val="100000"/>
+                <a:shade val="100000"/>
+              </a:schemeClr>
+            </a:gs>
+            <a:gs pos="100000">
+              <a:schemeClr val="phClr">
+                <a:lumMod val="99000"/>
+                <a:satMod val="120000"/>
+                <a:shade val="78000"/>
+              </a:schemeClr>
+            </a:gs>
+          </a:gsLst>
+          <a:lin ang="5400000" scaled="0"/>
+        </a:gradFill>
+      </a:fillStyleLst>
+      <a:lnStyleLst>
+        <a:ln w="6350" cap="flat" cmpd="sng" algn="ctr">
+          <a:solidFill>
+            <a:schemeClr val="phClr"/>
+          </a:solidFill>
+          <a:prstDash val="solid"/>
+          <a:miter lim="800000"/>
+        </a:ln>
+        <a:ln w="12700" cap="flat" cmpd="sng" algn="ctr">
+          <a:solidFill>
+            <a:schemeClr val="phClr"/>
+          </a:solidFill>
+          <a:prstDash val="solid"/>
+          <a:miter lim="800000"/>
+        </a:ln>
+        <a:ln w="19050" cap="flat" cmpd="sng" algn="ctr">
+          <a:solidFill>
+            <a:schemeClr val="phClr"/>
+          </a:solidFill>
+          <a:prstDash val="solid"/>
+          <a:miter lim="800000"/>
+        </a:ln>
+      </a:lnStyleLst>
+      <a:effectStyleLst>
+        <a:effectStyle>
+          <a:effectLst/>
+        </a:effectStyle>
+        <a:effectStyle>
+          <a:effectLst/>
+        </a:effectStyle>
+        <a:effectStyle>
+          <a:effectLst>
+            <a:outerShdw blurRad="57150" dist="19050" dir="5400000" algn="ctr" rotWithShape="0">
+              <a:srgbClr val="000000">
+                <a:alpha val="63000"/>
+              </a:srgbClr>
+            </a:outerShdw>
+          </a:effectLst>
+        </a:effectStyle>
+      </a:effectStyleLst>
+      <a:bgFillStyleLst>
+        <a:solidFill>
+          <a:schemeClr val="phClr"/>
+        </a:solidFill>
+        <a:solidFill>
+          <a:schemeClr val="phClr">
+            <a:tint val="95000"/>
+            <a:satMod val="170000"/>
+          </a:schemeClr>
+        </a:solidFill>
+        <a:gradFill rotWithShape="1">
+          <a:gsLst>
+            <a:gs pos="0">
+              <a:schemeClr val="phClr">
+                <a:tint val="93000"/>
+                <a:satMod val="150000"/>
+                <a:shade val="98000"/>
+                <a:lumMod val="102000"/>
+              </a:schemeClr>
+            </a:gs>
+            <a:gs pos="50000">
+              <a:schemeClr val="phClr">
+                <a:tint val="98000"/>
+                <a:satMod val="130000"/>
+                <a:shade val="90000"/>
+                <a:lumMod val="103000"/>
+              </a:schemeClr>
+            </a:gs>
+            <a:gs pos="100000">
+              <a:schemeClr val="phClr">
+                <a:shade val="63000"/>
+                <a:satMod val="120000"/>
+              </a:schemeClr>
+            </a:gs>
+          </a:gsLst>
+          <a:lin ang="5400000" scaled="0"/>
+        </a:gradFill>
+      </a:bgFillStyleLst>
+    </a:fmtScheme>
+  </a:themeElements>
+  <a:objectDefaults/>
+  <a:extraClrSchemeLst/>
+  <a:extLst>
+    <a:ext uri="{05A4C25C-085E-4340-85A3-A5531E510DB2}">
+      <thm15:themeFamily xmlns:thm15="http://schemas.microsoft.com/office/thememl/2012/main" name="Office Theme" id="{62F939B6-93AF-4DB8-9C6B-D6C7DFDC589F}" vid="{4A3C46E8-61CC-4603-A589-7422A47A8E4A}"/>
+    </a:ext>
+  </a:extLst>
+</a:theme>
 </file>
--- a/Docs/수성록_최종결과보고_초안.pptx
+++ b/Docs/수성록_최종결과보고_초안.pptx
@@ -158,7 +158,7 @@
     </p:spTree>
     <p:extLst>
       <p:ext uri="{BB962C8B-B14F-4D97-AF65-F5344CB8AC3E}">
-        <p14:creationId xmlns:p14="http://schemas.microsoft.com/office/powerpoint/2010/main" val="794443701"/>
+        <p14:creationId xmlns:p14="http://schemas.microsoft.com/office/powerpoint/2010/main" val="1818359357"/>
       </p:ext>
     </p:extLst>
   </p:cSld>
@@ -1870,7 +1870,7 @@
           <a:p>
             <a:r>
               <a:rPr lang="en-US" dirty="0"/>
-              <a:t>기여도는 감이 아니라 Git 이력을 실제로 집계해 정리했습니다. 주목할 점은 전담 디렉터리 점유율이 대부분 70%를 넘는다는 것입니다. 담당 경계가 명확했다는 뜻이고, 그래서 네 명이 동시에 작업해도 충돌이 씬과 건물 스크립트 정도로 한정됐습니다. 커밋 수 자체는 기여량이 아닙니다 — 데이터 에셋을 다루면 늘고 스크립트를 깊게 파면 줄어들기 때문에, 커밋 수보다 전담 영역을 함께 보셔야 합니다.</a:t>
+              <a:t>기여도는 감이 아니라 Git 이력을 실제로 집계해서 확인했습니다. 여기서 저희가 의미 있다고 본 것은 세 가지입니다. 첫째, 전담 영역 점유율이 대부분 70퍼센트를 넘습니다. 세이브·로드는 100퍼센트, 튜토리얼은 99퍼센트입니다. 담당 경계가 그만큼 명확했다는 뜻입니다. 둘째, 그래서 충돌 지점이 좁았습니다. 네 명이 동시에 작업했는데도 공동 구역은 씬 배선과 건물 스크립트 정도로 한정됐습니다. 셋째, 통합 창구를 하나로 뒀습니다. 전체 PR의 83.6퍼센트를 팀장이 직접 리뷰하고 머지해서 master 품질을 한 사람이 책임지는 구조로 운영했습니다.</a:t>
             </a:r>
           </a:p>
         </p:txBody>
@@ -2748,16 +2748,10 @@
                 <a:ea typeface="Calibri" pitchFamily="34" charset="-122"/>
                 <a:cs typeface="Calibri" pitchFamily="34" charset="-120"/>
               </a:rPr>
-              <a:t>조강현, 김지해, 이하늘, 나상욱</a:t>
-            </a:r>
-            <a:endParaRPr lang="en-US" sz="1400" dirty="0"/>
-          </a:p>
-          <a:p>
-            <a:pPr marL="0" indent="0">
-              <a:buNone/>
-            </a:pPr>
-            <a:r>
-              <a:rPr lang="en-US" sz="1400" dirty="0">
+              <a:t>조강현, 김지해, 이하늘, </a:t>
+            </a:r>
+            <a:r>
+              <a:rPr lang="en-US" sz="1400" dirty="0" smtClean="0">
                 <a:solidFill>
                   <a:srgbClr val="1A1A1A"/>
                 </a:solidFill>
@@ -2765,7 +2759,7 @@
                 <a:ea typeface="Calibri" pitchFamily="34" charset="-122"/>
                 <a:cs typeface="Calibri" pitchFamily="34" charset="-120"/>
               </a:rPr>
-              <a:t>[멘토] [작성 필요]</a:t>
+              <a:t>나상욱</a:t>
             </a:r>
             <a:endParaRPr lang="en-US" sz="1400" dirty="0"/>
           </a:p>
@@ -3068,7 +3062,7 @@
         </p:nvGraphicFramePr>
         <p:xfrm>
           <a:off x="640080" y="2377440"/>
-          <a:ext cx="10908792" cy="2286000"/>
+          <a:ext cx="10908792" cy="914400"/>
         </p:xfrm>
         <a:graphic>
           <a:graphicData uri="http://schemas.openxmlformats.org/drawingml/2006/table">
@@ -17006,7 +17000,7 @@
                 <a:ea typeface="Calibri" pitchFamily="34" charset="-122"/>
                 <a:cs typeface="Calibri" pitchFamily="34" charset="-120"/>
               </a:rPr>
-              <a:t>9주 · 4인 · 1회차 28일 분량</a:t>
+              <a:t>9주 · 4인 </a:t>
             </a:r>
             <a:endParaRPr lang="en-US" sz="1400" dirty="0"/>
           </a:p>
@@ -17467,7 +17461,40 @@
                 <a:ea typeface="Calibri" pitchFamily="34" charset="-122"/>
                 <a:cs typeface="Calibri" pitchFamily="34" charset="-120"/>
               </a:rPr>
-              <a:t>플레이어마다 다른 빌드가 나온다.</a:t>
+              <a:t>플레이어마다 다른 </a:t>
+            </a:r>
+            <a:r>
+              <a:rPr lang="en-US" sz="1400" dirty="0" err="1">
+                <a:solidFill>
+                  <a:srgbClr val="1A1A1A"/>
+                </a:solidFill>
+                <a:latin typeface="Calibri" pitchFamily="34" charset="0"/>
+                <a:ea typeface="Calibri" pitchFamily="34" charset="-122"/>
+                <a:cs typeface="Calibri" pitchFamily="34" charset="-120"/>
+              </a:rPr>
+              <a:t>빌드가</a:t>
+            </a:r>
+            <a:r>
+              <a:rPr lang="en-US" sz="1400" dirty="0">
+                <a:solidFill>
+                  <a:srgbClr val="1A1A1A"/>
+                </a:solidFill>
+                <a:latin typeface="Calibri" pitchFamily="34" charset="0"/>
+                <a:ea typeface="Calibri" pitchFamily="34" charset="-122"/>
+                <a:cs typeface="Calibri" pitchFamily="34" charset="-120"/>
+              </a:rPr>
+              <a:t> </a:t>
+            </a:r>
+            <a:r>
+              <a:rPr lang="ko-KR" altLang="en-US" sz="1400" dirty="0" smtClean="0">
+                <a:solidFill>
+                  <a:srgbClr val="1A1A1A"/>
+                </a:solidFill>
+                <a:latin typeface="Calibri" pitchFamily="34" charset="0"/>
+                <a:ea typeface="Calibri" pitchFamily="34" charset="-122"/>
+                <a:cs typeface="Calibri" pitchFamily="34" charset="-120"/>
+              </a:rPr>
+              <a:t>나올 수 있도록 의도</a:t>
             </a:r>
             <a:endParaRPr lang="en-US" sz="1400" dirty="0"/>
           </a:p>
@@ -17588,7 +17615,51 @@
                 <a:ea typeface="Calibri" pitchFamily="34" charset="-122"/>
                 <a:cs typeface="Calibri" pitchFamily="34" charset="-120"/>
               </a:rPr>
-              <a:t>한쪽에 넣으면 다른 쪽에 구멍이 생긴다.</a:t>
+              <a:t>한쪽에 넣으면 다른 쪽에 </a:t>
+            </a:r>
+            <a:r>
+              <a:rPr lang="en-US" sz="1400" dirty="0" err="1">
+                <a:solidFill>
+                  <a:srgbClr val="1A1A1A"/>
+                </a:solidFill>
+                <a:latin typeface="Calibri" pitchFamily="34" charset="0"/>
+                <a:ea typeface="Calibri" pitchFamily="34" charset="-122"/>
+                <a:cs typeface="Calibri" pitchFamily="34" charset="-120"/>
+              </a:rPr>
+              <a:t>구멍이</a:t>
+            </a:r>
+            <a:r>
+              <a:rPr lang="en-US" sz="1400" dirty="0">
+                <a:solidFill>
+                  <a:srgbClr val="1A1A1A"/>
+                </a:solidFill>
+                <a:latin typeface="Calibri" pitchFamily="34" charset="0"/>
+                <a:ea typeface="Calibri" pitchFamily="34" charset="-122"/>
+                <a:cs typeface="Calibri" pitchFamily="34" charset="-120"/>
+              </a:rPr>
+              <a:t> </a:t>
+            </a:r>
+            <a:r>
+              <a:rPr lang="en-US" sz="1400" dirty="0" err="1" smtClean="0">
+                <a:solidFill>
+                  <a:srgbClr val="1A1A1A"/>
+                </a:solidFill>
+                <a:latin typeface="Calibri" pitchFamily="34" charset="0"/>
+                <a:ea typeface="Calibri" pitchFamily="34" charset="-122"/>
+                <a:cs typeface="Calibri" pitchFamily="34" charset="-120"/>
+              </a:rPr>
+              <a:t>생긴다</a:t>
+            </a:r>
+            <a:r>
+              <a:rPr lang="en-US" sz="1400" dirty="0" smtClean="0">
+                <a:solidFill>
+                  <a:srgbClr val="1A1A1A"/>
+                </a:solidFill>
+                <a:latin typeface="Calibri" pitchFamily="34" charset="0"/>
+                <a:ea typeface="Calibri" pitchFamily="34" charset="-122"/>
+                <a:cs typeface="Calibri" pitchFamily="34" charset="-120"/>
+              </a:rPr>
+              <a:t>.</a:t>
             </a:r>
             <a:endParaRPr lang="en-US" sz="1400" dirty="0"/>
           </a:p>
@@ -17709,7 +17780,40 @@
                 <a:ea typeface="Calibri" pitchFamily="34" charset="-122"/>
                 <a:cs typeface="Calibri" pitchFamily="34" charset="-120"/>
               </a:rPr>
-              <a:t>성장과 위험이 같은 축에 묶여 있다.</a:t>
+              <a:t>성장과 </a:t>
+            </a:r>
+            <a:r>
+              <a:rPr lang="en-US" sz="1400" dirty="0" err="1">
+                <a:solidFill>
+                  <a:srgbClr val="1A1A1A"/>
+                </a:solidFill>
+                <a:latin typeface="Calibri" pitchFamily="34" charset="0"/>
+                <a:ea typeface="Calibri" pitchFamily="34" charset="-122"/>
+                <a:cs typeface="Calibri" pitchFamily="34" charset="-120"/>
+              </a:rPr>
+              <a:t>위험이</a:t>
+            </a:r>
+            <a:r>
+              <a:rPr lang="en-US" sz="1400" dirty="0">
+                <a:solidFill>
+                  <a:srgbClr val="1A1A1A"/>
+                </a:solidFill>
+                <a:latin typeface="Calibri" pitchFamily="34" charset="0"/>
+                <a:ea typeface="Calibri" pitchFamily="34" charset="-122"/>
+                <a:cs typeface="Calibri" pitchFamily="34" charset="-120"/>
+              </a:rPr>
+              <a:t> </a:t>
+            </a:r>
+            <a:r>
+              <a:rPr lang="ko-KR" altLang="en-US" sz="1400" dirty="0" smtClean="0">
+                <a:solidFill>
+                  <a:srgbClr val="1A1A1A"/>
+                </a:solidFill>
+                <a:latin typeface="Calibri" pitchFamily="34" charset="0"/>
+                <a:ea typeface="Calibri" pitchFamily="34" charset="-122"/>
+                <a:cs typeface="Calibri" pitchFamily="34" charset="-120"/>
+              </a:rPr>
+              <a:t>같은 축에 공존</a:t>
             </a:r>
             <a:endParaRPr lang="en-US" sz="1400" dirty="0"/>
           </a:p>
@@ -19330,6 +19434,28 @@
               <a:buNone/>
             </a:pPr>
             <a:r>
+              <a:rPr lang="en-US" sz="3000" b="1" dirty="0" err="1" smtClean="0">
+                <a:solidFill>
+                  <a:srgbClr val="1A1A1A"/>
+                </a:solidFill>
+                <a:latin typeface="Calibri" pitchFamily="34" charset="0"/>
+                <a:ea typeface="Calibri" pitchFamily="34" charset="-122"/>
+                <a:cs typeface="Calibri" pitchFamily="34" charset="-120"/>
+              </a:rPr>
+              <a:t>협업</a:t>
+            </a:r>
+            <a:r>
+              <a:rPr lang="en-US" sz="3000" b="1" dirty="0" smtClean="0">
+                <a:solidFill>
+                  <a:srgbClr val="1A1A1A"/>
+                </a:solidFill>
+                <a:latin typeface="Calibri" pitchFamily="34" charset="0"/>
+                <a:ea typeface="Calibri" pitchFamily="34" charset="-122"/>
+                <a:cs typeface="Calibri" pitchFamily="34" charset="-120"/>
+              </a:rPr>
+              <a:t> </a:t>
+            </a:r>
+            <a:r>
               <a:rPr lang="en-US" sz="3000" b="1" dirty="0">
                 <a:solidFill>
                   <a:srgbClr val="1A1A1A"/>
@@ -19338,7 +19464,7 @@
                 <a:ea typeface="Calibri" pitchFamily="34" charset="-122"/>
                 <a:cs typeface="Calibri" pitchFamily="34" charset="-120"/>
               </a:rPr>
-              <a:t>팀원별 기여 분석</a:t>
+              <a:t>구조</a:t>
             </a:r>
             <a:endParaRPr lang="en-US" sz="3000" dirty="0"/>
           </a:p>
@@ -19374,1427 +19500,25 @@
                   <a:srgbClr val="6E6E6E"/>
                 </a:solidFill>
                 <a:latin typeface="Calibri" pitchFamily="34" charset="0"/>
-                <a:cs typeface="Calibri" pitchFamily="34" charset="-120"/>
-              </a:rPr>
-              <a:t>체계적인 역할 분담</a:t>
+                <a:ea typeface="Calibri" pitchFamily="34" charset="-122"/>
+                <a:cs typeface="Calibri" pitchFamily="34" charset="-120"/>
+              </a:rPr>
+              <a:t>업무 분담</a:t>
             </a:r>
             <a:endParaRPr lang="en-US" sz="1300" dirty="0"/>
           </a:p>
         </p:txBody>
       </p:sp>
-      <p:graphicFrame>
-        <p:nvGraphicFramePr>
-          <p:cNvPr id="7" name="Table 0"/>
-          <p:cNvGraphicFramePr>
-            <a:graphicFrameLocks noGrp="1"/>
-          </p:cNvGraphicFramePr>
-          <p:nvPr>
-            <p:extLst>
-              <p:ext uri="{D42A27DB-BD31-4B8C-83A1-F6EECF244321}">
-                <p14:modId xmlns:p14="http://schemas.microsoft.com/office/powerpoint/2010/main" val="1579011935"/>
-              </p:ext>
-            </p:extLst>
-          </p:nvPr>
-        </p:nvGraphicFramePr>
-        <p:xfrm>
-          <a:off x="640080" y="1965960"/>
-          <a:ext cx="10908792" cy="2834640"/>
-        </p:xfrm>
-        <a:graphic>
-          <a:graphicData uri="http://schemas.openxmlformats.org/drawingml/2006/table">
-            <a:tbl>
-              <a:tblPr/>
-              <a:tblGrid>
-                <a:gridCol w="1188720">
-                  <a:extLst>
-                    <a:ext uri="{9D8B030D-6E8A-4147-A177-3AD203B41FA5}">
-                      <a16:colId xmlns:a16="http://schemas.microsoft.com/office/drawing/2014/main" val="20000"/>
-                    </a:ext>
-                  </a:extLst>
-                </a:gridCol>
-                <a:gridCol w="1005840">
-                  <a:extLst>
-                    <a:ext uri="{9D8B030D-6E8A-4147-A177-3AD203B41FA5}">
-                      <a16:colId xmlns:a16="http://schemas.microsoft.com/office/drawing/2014/main" val="20001"/>
-                    </a:ext>
-                  </a:extLst>
-                </a:gridCol>
-                <a:gridCol w="1280160">
-                  <a:extLst>
-                    <a:ext uri="{9D8B030D-6E8A-4147-A177-3AD203B41FA5}">
-                      <a16:colId xmlns:a16="http://schemas.microsoft.com/office/drawing/2014/main" val="20002"/>
-                    </a:ext>
-                  </a:extLst>
-                </a:gridCol>
-                <a:gridCol w="7434072">
-                  <a:extLst>
-                    <a:ext uri="{9D8B030D-6E8A-4147-A177-3AD203B41FA5}">
-                      <a16:colId xmlns:a16="http://schemas.microsoft.com/office/drawing/2014/main" val="20003"/>
-                    </a:ext>
-                  </a:extLst>
-                </a:gridCol>
-              </a:tblGrid>
-              <a:tr h="566928">
-                <a:tc>
-                  <a:txBody>
-                    <a:bodyPr/>
-                    <a:lstStyle/>
-                    <a:p>
-                      <a:pPr marL="0" indent="0">
-                        <a:buNone/>
-                      </a:pPr>
-                      <a:r>
-                        <a:rPr lang="en-US" sz="1150" b="1" dirty="0">
-                          <a:solidFill>
-                            <a:srgbClr val="FFFFFF"/>
-                          </a:solidFill>
-                          <a:latin typeface="Calibri" pitchFamily="34" charset="0"/>
-                          <a:ea typeface="Calibri" pitchFamily="34" charset="-122"/>
-                          <a:cs typeface="Calibri" pitchFamily="34" charset="-120"/>
-                        </a:rPr>
-                        <a:t>이름</a:t>
-                      </a:r>
-                      <a:endParaRPr lang="en-US" sz="1150" dirty="0">
-                        <a:latin typeface="Calibri" charset="0"/>
-                        <a:ea typeface="Calibri" charset="0"/>
-                        <a:cs typeface="Calibri" charset="0"/>
-                      </a:endParaRPr>
-                    </a:p>
-                  </a:txBody>
-                  <a:tcPr marL="101600" marR="101600" marT="50800" marB="50800" anchor="ctr">
-                    <a:lnL w="6350" cap="flat" cmpd="sng" algn="ctr">
-                      <a:solidFill>
-                        <a:srgbClr val="D8D8D8"/>
-                      </a:solidFill>
-                      <a:prstDash val="solid"/>
-                      <a:round/>
-                      <a:headEnd type="none" w="med" len="med"/>
-                      <a:tailEnd type="none" w="med" len="med"/>
-                    </a:lnL>
-                    <a:lnR w="6350" cap="flat" cmpd="sng" algn="ctr">
-                      <a:solidFill>
-                        <a:srgbClr val="D8D8D8"/>
-                      </a:solidFill>
-                      <a:prstDash val="solid"/>
-                      <a:round/>
-                      <a:headEnd type="none" w="med" len="med"/>
-                      <a:tailEnd type="none" w="med" len="med"/>
-                    </a:lnR>
-                    <a:lnT w="6350" cap="flat" cmpd="sng" algn="ctr">
-                      <a:solidFill>
-                        <a:srgbClr val="D8D8D8"/>
-                      </a:solidFill>
-                      <a:prstDash val="solid"/>
-                      <a:round/>
-                      <a:headEnd type="none" w="med" len="med"/>
-                      <a:tailEnd type="none" w="med" len="med"/>
-                    </a:lnT>
-                    <a:lnB w="6350" cap="flat" cmpd="sng" algn="ctr">
-                      <a:solidFill>
-                        <a:srgbClr val="D8D8D8"/>
-                      </a:solidFill>
-                      <a:prstDash val="solid"/>
-                      <a:round/>
-                      <a:headEnd type="none" w="med" len="med"/>
-                      <a:tailEnd type="none" w="med" len="med"/>
-                    </a:lnB>
-                    <a:solidFill>
-                      <a:srgbClr val="2B2B2B"/>
-                    </a:solidFill>
-                  </a:tcPr>
-                </a:tc>
-                <a:tc>
-                  <a:txBody>
-                    <a:bodyPr/>
-                    <a:lstStyle/>
-                    <a:p>
-                      <a:pPr marL="0" indent="0">
-                        <a:buNone/>
-                      </a:pPr>
-                      <a:r>
-                        <a:rPr lang="en-US" sz="1150" b="1" dirty="0">
-                          <a:solidFill>
-                            <a:srgbClr val="FFFFFF"/>
-                          </a:solidFill>
-                          <a:latin typeface="Calibri" pitchFamily="34" charset="0"/>
-                          <a:ea typeface="Calibri" pitchFamily="34" charset="-122"/>
-                          <a:cs typeface="Calibri" pitchFamily="34" charset="-120"/>
-                        </a:rPr>
-                        <a:t>커밋</a:t>
-                      </a:r>
-                      <a:endParaRPr lang="en-US" sz="1150" dirty="0">
-                        <a:latin typeface="Calibri" charset="0"/>
-                        <a:ea typeface="Calibri" charset="0"/>
-                        <a:cs typeface="Calibri" charset="0"/>
-                      </a:endParaRPr>
-                    </a:p>
-                  </a:txBody>
-                  <a:tcPr marL="101600" marR="101600" marT="50800" marB="50800" anchor="ctr">
-                    <a:lnL w="6350" cap="flat" cmpd="sng" algn="ctr">
-                      <a:solidFill>
-                        <a:srgbClr val="D8D8D8"/>
-                      </a:solidFill>
-                      <a:prstDash val="solid"/>
-                      <a:round/>
-                      <a:headEnd type="none" w="med" len="med"/>
-                      <a:tailEnd type="none" w="med" len="med"/>
-                    </a:lnL>
-                    <a:lnR w="6350" cap="flat" cmpd="sng" algn="ctr">
-                      <a:solidFill>
-                        <a:srgbClr val="D8D8D8"/>
-                      </a:solidFill>
-                      <a:prstDash val="solid"/>
-                      <a:round/>
-                      <a:headEnd type="none" w="med" len="med"/>
-                      <a:tailEnd type="none" w="med" len="med"/>
-                    </a:lnR>
-                    <a:lnT w="6350" cap="flat" cmpd="sng" algn="ctr">
-                      <a:solidFill>
-                        <a:srgbClr val="D8D8D8"/>
-                      </a:solidFill>
-                      <a:prstDash val="solid"/>
-                      <a:round/>
-                      <a:headEnd type="none" w="med" len="med"/>
-                      <a:tailEnd type="none" w="med" len="med"/>
-                    </a:lnT>
-                    <a:lnB w="6350" cap="flat" cmpd="sng" algn="ctr">
-                      <a:solidFill>
-                        <a:srgbClr val="D8D8D8"/>
-                      </a:solidFill>
-                      <a:prstDash val="solid"/>
-                      <a:round/>
-                      <a:headEnd type="none" w="med" len="med"/>
-                      <a:tailEnd type="none" w="med" len="med"/>
-                    </a:lnB>
-                    <a:solidFill>
-                      <a:srgbClr val="2B2B2B"/>
-                    </a:solidFill>
-                  </a:tcPr>
-                </a:tc>
-                <a:tc>
-                  <a:txBody>
-                    <a:bodyPr/>
-                    <a:lstStyle/>
-                    <a:p>
-                      <a:pPr marL="0" indent="0">
-                        <a:buNone/>
-                      </a:pPr>
-                      <a:r>
-                        <a:rPr lang="en-US" sz="1150" b="1" dirty="0">
-                          <a:solidFill>
-                            <a:srgbClr val="FFFFFF"/>
-                          </a:solidFill>
-                          <a:latin typeface="Calibri" pitchFamily="34" charset="0"/>
-                          <a:ea typeface="Calibri" pitchFamily="34" charset="-122"/>
-                          <a:cs typeface="Calibri" pitchFamily="34" charset="-120"/>
-                        </a:rPr>
-                        <a:t>담당 PR</a:t>
-                      </a:r>
-                      <a:endParaRPr lang="en-US" sz="1150" dirty="0">
-                        <a:latin typeface="Calibri" charset="0"/>
-                        <a:ea typeface="Calibri" charset="0"/>
-                        <a:cs typeface="Calibri" charset="0"/>
-                      </a:endParaRPr>
-                    </a:p>
-                  </a:txBody>
-                  <a:tcPr marL="101600" marR="101600" marT="50800" marB="50800" anchor="ctr">
-                    <a:lnL w="6350" cap="flat" cmpd="sng" algn="ctr">
-                      <a:solidFill>
-                        <a:srgbClr val="D8D8D8"/>
-                      </a:solidFill>
-                      <a:prstDash val="solid"/>
-                      <a:round/>
-                      <a:headEnd type="none" w="med" len="med"/>
-                      <a:tailEnd type="none" w="med" len="med"/>
-                    </a:lnL>
-                    <a:lnR w="6350" cap="flat" cmpd="sng" algn="ctr">
-                      <a:solidFill>
-                        <a:srgbClr val="D8D8D8"/>
-                      </a:solidFill>
-                      <a:prstDash val="solid"/>
-                      <a:round/>
-                      <a:headEnd type="none" w="med" len="med"/>
-                      <a:tailEnd type="none" w="med" len="med"/>
-                    </a:lnR>
-                    <a:lnT w="6350" cap="flat" cmpd="sng" algn="ctr">
-                      <a:solidFill>
-                        <a:srgbClr val="D8D8D8"/>
-                      </a:solidFill>
-                      <a:prstDash val="solid"/>
-                      <a:round/>
-                      <a:headEnd type="none" w="med" len="med"/>
-                      <a:tailEnd type="none" w="med" len="med"/>
-                    </a:lnT>
-                    <a:lnB w="6350" cap="flat" cmpd="sng" algn="ctr">
-                      <a:solidFill>
-                        <a:srgbClr val="D8D8D8"/>
-                      </a:solidFill>
-                      <a:prstDash val="solid"/>
-                      <a:round/>
-                      <a:headEnd type="none" w="med" len="med"/>
-                      <a:tailEnd type="none" w="med" len="med"/>
-                    </a:lnB>
-                    <a:solidFill>
-                      <a:srgbClr val="2B2B2B"/>
-                    </a:solidFill>
-                  </a:tcPr>
-                </a:tc>
-                <a:tc>
-                  <a:txBody>
-                    <a:bodyPr/>
-                    <a:lstStyle/>
-                    <a:p>
-                      <a:pPr marL="0" indent="0">
-                        <a:buNone/>
-                      </a:pPr>
-                      <a:r>
-                        <a:rPr lang="en-US" sz="1150" b="1" dirty="0">
-                          <a:solidFill>
-                            <a:srgbClr val="FFFFFF"/>
-                          </a:solidFill>
-                          <a:latin typeface="Calibri" pitchFamily="34" charset="0"/>
-                          <a:ea typeface="Calibri" pitchFamily="34" charset="-122"/>
-                          <a:cs typeface="Calibri" pitchFamily="34" charset="-120"/>
-                        </a:rPr>
-                        <a:t>전담 영역 (기여 점유율)</a:t>
-                      </a:r>
-                      <a:endParaRPr lang="en-US" sz="1150" dirty="0">
-                        <a:latin typeface="Calibri" charset="0"/>
-                        <a:ea typeface="Calibri" charset="0"/>
-                        <a:cs typeface="Calibri" charset="0"/>
-                      </a:endParaRPr>
-                    </a:p>
-                  </a:txBody>
-                  <a:tcPr marL="101600" marR="101600" marT="50800" marB="50800" anchor="ctr">
-                    <a:lnL w="6350" cap="flat" cmpd="sng" algn="ctr">
-                      <a:solidFill>
-                        <a:srgbClr val="D8D8D8"/>
-                      </a:solidFill>
-                      <a:prstDash val="solid"/>
-                      <a:round/>
-                      <a:headEnd type="none" w="med" len="med"/>
-                      <a:tailEnd type="none" w="med" len="med"/>
-                    </a:lnL>
-                    <a:lnR w="6350" cap="flat" cmpd="sng" algn="ctr">
-                      <a:solidFill>
-                        <a:srgbClr val="D8D8D8"/>
-                      </a:solidFill>
-                      <a:prstDash val="solid"/>
-                      <a:round/>
-                      <a:headEnd type="none" w="med" len="med"/>
-                      <a:tailEnd type="none" w="med" len="med"/>
-                    </a:lnR>
-                    <a:lnT w="6350" cap="flat" cmpd="sng" algn="ctr">
-                      <a:solidFill>
-                        <a:srgbClr val="D8D8D8"/>
-                      </a:solidFill>
-                      <a:prstDash val="solid"/>
-                      <a:round/>
-                      <a:headEnd type="none" w="med" len="med"/>
-                      <a:tailEnd type="none" w="med" len="med"/>
-                    </a:lnT>
-                    <a:lnB w="6350" cap="flat" cmpd="sng" algn="ctr">
-                      <a:solidFill>
-                        <a:srgbClr val="D8D8D8"/>
-                      </a:solidFill>
-                      <a:prstDash val="solid"/>
-                      <a:round/>
-                      <a:headEnd type="none" w="med" len="med"/>
-                      <a:tailEnd type="none" w="med" len="med"/>
-                    </a:lnB>
-                    <a:solidFill>
-                      <a:srgbClr val="2B2B2B"/>
-                    </a:solidFill>
-                  </a:tcPr>
-                </a:tc>
-                <a:extLst>
-                  <a:ext uri="{0D108BD9-81ED-4DB2-BD59-A6C34878D82A}">
-                    <a16:rowId xmlns:a16="http://schemas.microsoft.com/office/drawing/2014/main" val="10000"/>
-                  </a:ext>
-                </a:extLst>
-              </a:tr>
-              <a:tr h="566928">
-                <a:tc>
-                  <a:txBody>
-                    <a:bodyPr/>
-                    <a:lstStyle/>
-                    <a:p>
-                      <a:pPr marL="0" indent="0">
-                        <a:buNone/>
-                      </a:pPr>
-                      <a:r>
-                        <a:rPr lang="en-US" sz="1150" dirty="0">
-                          <a:solidFill>
-                            <a:srgbClr val="1A1A1A"/>
-                          </a:solidFill>
-                          <a:latin typeface="Calibri" pitchFamily="34" charset="0"/>
-                          <a:ea typeface="Calibri" pitchFamily="34" charset="-122"/>
-                          <a:cs typeface="Calibri" pitchFamily="34" charset="-120"/>
-                        </a:rPr>
-                        <a:t>조강현</a:t>
-                      </a:r>
-                      <a:endParaRPr lang="en-US" sz="1150" dirty="0">
-                        <a:latin typeface="Calibri" charset="0"/>
-                        <a:ea typeface="Calibri" charset="0"/>
-                        <a:cs typeface="Calibri" charset="0"/>
-                      </a:endParaRPr>
-                    </a:p>
-                  </a:txBody>
-                  <a:tcPr marL="101600" marR="101600" marT="50800" marB="50800" anchor="ctr">
-                    <a:lnL w="6350" cap="flat" cmpd="sng" algn="ctr">
-                      <a:solidFill>
-                        <a:srgbClr val="D8D8D8"/>
-                      </a:solidFill>
-                      <a:prstDash val="solid"/>
-                      <a:round/>
-                      <a:headEnd type="none" w="med" len="med"/>
-                      <a:tailEnd type="none" w="med" len="med"/>
-                    </a:lnL>
-                    <a:lnR w="6350" cap="flat" cmpd="sng" algn="ctr">
-                      <a:solidFill>
-                        <a:srgbClr val="D8D8D8"/>
-                      </a:solidFill>
-                      <a:prstDash val="solid"/>
-                      <a:round/>
-                      <a:headEnd type="none" w="med" len="med"/>
-                      <a:tailEnd type="none" w="med" len="med"/>
-                    </a:lnR>
-                    <a:lnT w="6350" cap="flat" cmpd="sng" algn="ctr">
-                      <a:solidFill>
-                        <a:srgbClr val="D8D8D8"/>
-                      </a:solidFill>
-                      <a:prstDash val="solid"/>
-                      <a:round/>
-                      <a:headEnd type="none" w="med" len="med"/>
-                      <a:tailEnd type="none" w="med" len="med"/>
-                    </a:lnT>
-                    <a:lnB w="6350" cap="flat" cmpd="sng" algn="ctr">
-                      <a:solidFill>
-                        <a:srgbClr val="D8D8D8"/>
-                      </a:solidFill>
-                      <a:prstDash val="solid"/>
-                      <a:round/>
-                      <a:headEnd type="none" w="med" len="med"/>
-                      <a:tailEnd type="none" w="med" len="med"/>
-                    </a:lnB>
-                  </a:tcPr>
-                </a:tc>
-                <a:tc>
-                  <a:txBody>
-                    <a:bodyPr/>
-                    <a:lstStyle/>
-                    <a:p>
-                      <a:pPr marL="0" indent="0">
-                        <a:buNone/>
-                      </a:pPr>
-                      <a:r>
-                        <a:rPr lang="en-US" sz="1150" dirty="0">
-                          <a:solidFill>
-                            <a:srgbClr val="1A1A1A"/>
-                          </a:solidFill>
-                          <a:latin typeface="Calibri" pitchFamily="34" charset="0"/>
-                          <a:ea typeface="Calibri" pitchFamily="34" charset="-122"/>
-                          <a:cs typeface="Calibri" pitchFamily="34" charset="-120"/>
-                        </a:rPr>
-                        <a:t>180</a:t>
-                      </a:r>
-                      <a:endParaRPr lang="en-US" sz="1150" dirty="0">
-                        <a:latin typeface="Calibri" charset="0"/>
-                        <a:ea typeface="Calibri" charset="0"/>
-                        <a:cs typeface="Calibri" charset="0"/>
-                      </a:endParaRPr>
-                    </a:p>
-                  </a:txBody>
-                  <a:tcPr marL="101600" marR="101600" marT="50800" marB="50800" anchor="ctr">
-                    <a:lnL w="6350" cap="flat" cmpd="sng" algn="ctr">
-                      <a:solidFill>
-                        <a:srgbClr val="D8D8D8"/>
-                      </a:solidFill>
-                      <a:prstDash val="solid"/>
-                      <a:round/>
-                      <a:headEnd type="none" w="med" len="med"/>
-                      <a:tailEnd type="none" w="med" len="med"/>
-                    </a:lnL>
-                    <a:lnR w="6350" cap="flat" cmpd="sng" algn="ctr">
-                      <a:solidFill>
-                        <a:srgbClr val="D8D8D8"/>
-                      </a:solidFill>
-                      <a:prstDash val="solid"/>
-                      <a:round/>
-                      <a:headEnd type="none" w="med" len="med"/>
-                      <a:tailEnd type="none" w="med" len="med"/>
-                    </a:lnR>
-                    <a:lnT w="6350" cap="flat" cmpd="sng" algn="ctr">
-                      <a:solidFill>
-                        <a:srgbClr val="D8D8D8"/>
-                      </a:solidFill>
-                      <a:prstDash val="solid"/>
-                      <a:round/>
-                      <a:headEnd type="none" w="med" len="med"/>
-                      <a:tailEnd type="none" w="med" len="med"/>
-                    </a:lnT>
-                    <a:lnB w="6350" cap="flat" cmpd="sng" algn="ctr">
-                      <a:solidFill>
-                        <a:srgbClr val="D8D8D8"/>
-                      </a:solidFill>
-                      <a:prstDash val="solid"/>
-                      <a:round/>
-                      <a:headEnd type="none" w="med" len="med"/>
-                      <a:tailEnd type="none" w="med" len="med"/>
-                    </a:lnB>
-                  </a:tcPr>
-                </a:tc>
-                <a:tc>
-                  <a:txBody>
-                    <a:bodyPr/>
-                    <a:lstStyle/>
-                    <a:p>
-                      <a:pPr marL="0" indent="0">
-                        <a:buNone/>
-                      </a:pPr>
-                      <a:r>
-                        <a:rPr lang="en-US" sz="1150" dirty="0">
-                          <a:solidFill>
-                            <a:srgbClr val="1A1A1A"/>
-                          </a:solidFill>
-                          <a:latin typeface="Calibri" pitchFamily="34" charset="0"/>
-                          <a:ea typeface="Calibri" pitchFamily="34" charset="-122"/>
-                          <a:cs typeface="Calibri" pitchFamily="34" charset="-120"/>
-                        </a:rPr>
-                        <a:t>머지 92건</a:t>
-                      </a:r>
-                      <a:endParaRPr lang="en-US" sz="1150" dirty="0">
-                        <a:latin typeface="Calibri" charset="0"/>
-                        <a:ea typeface="Calibri" charset="0"/>
-                        <a:cs typeface="Calibri" charset="0"/>
-                      </a:endParaRPr>
-                    </a:p>
-                  </a:txBody>
-                  <a:tcPr marL="101600" marR="101600" marT="50800" marB="50800" anchor="ctr">
-                    <a:lnL w="6350" cap="flat" cmpd="sng" algn="ctr">
-                      <a:solidFill>
-                        <a:srgbClr val="D8D8D8"/>
-                      </a:solidFill>
-                      <a:prstDash val="solid"/>
-                      <a:round/>
-                      <a:headEnd type="none" w="med" len="med"/>
-                      <a:tailEnd type="none" w="med" len="med"/>
-                    </a:lnL>
-                    <a:lnR w="6350" cap="flat" cmpd="sng" algn="ctr">
-                      <a:solidFill>
-                        <a:srgbClr val="D8D8D8"/>
-                      </a:solidFill>
-                      <a:prstDash val="solid"/>
-                      <a:round/>
-                      <a:headEnd type="none" w="med" len="med"/>
-                      <a:tailEnd type="none" w="med" len="med"/>
-                    </a:lnR>
-                    <a:lnT w="6350" cap="flat" cmpd="sng" algn="ctr">
-                      <a:solidFill>
-                        <a:srgbClr val="D8D8D8"/>
-                      </a:solidFill>
-                      <a:prstDash val="solid"/>
-                      <a:round/>
-                      <a:headEnd type="none" w="med" len="med"/>
-                      <a:tailEnd type="none" w="med" len="med"/>
-                    </a:lnT>
-                    <a:lnB w="6350" cap="flat" cmpd="sng" algn="ctr">
-                      <a:solidFill>
-                        <a:srgbClr val="D8D8D8"/>
-                      </a:solidFill>
-                      <a:prstDash val="solid"/>
-                      <a:round/>
-                      <a:headEnd type="none" w="med" len="med"/>
-                      <a:tailEnd type="none" w="med" len="med"/>
-                    </a:lnB>
-                  </a:tcPr>
-                </a:tc>
-                <a:tc>
-                  <a:txBody>
-                    <a:bodyPr/>
-                    <a:lstStyle/>
-                    <a:p>
-                      <a:pPr marL="0" indent="0">
-                        <a:buNone/>
-                      </a:pPr>
-                      <a:r>
-                        <a:rPr lang="en-US" sz="1150" dirty="0">
-                          <a:solidFill>
-                            <a:srgbClr val="1A1A1A"/>
-                          </a:solidFill>
-                          <a:latin typeface="Calibri" pitchFamily="34" charset="0"/>
-                          <a:ea typeface="Calibri" pitchFamily="34" charset="-122"/>
-                          <a:cs typeface="Calibri" pitchFamily="34" charset="-120"/>
-                        </a:rPr>
-                        <a:t>세이브/로드 100% · 프로젝트 설정 66% · UI 42% · 게임 매니저 38%</a:t>
-                      </a:r>
-                      <a:endParaRPr lang="en-US" sz="1150" dirty="0">
-                        <a:latin typeface="Calibri" charset="0"/>
-                        <a:ea typeface="Calibri" charset="0"/>
-                        <a:cs typeface="Calibri" charset="0"/>
-                      </a:endParaRPr>
-                    </a:p>
-                  </a:txBody>
-                  <a:tcPr marL="101600" marR="101600" marT="50800" marB="50800" anchor="ctr">
-                    <a:lnL w="6350" cap="flat" cmpd="sng" algn="ctr">
-                      <a:solidFill>
-                        <a:srgbClr val="D8D8D8"/>
-                      </a:solidFill>
-                      <a:prstDash val="solid"/>
-                      <a:round/>
-                      <a:headEnd type="none" w="med" len="med"/>
-                      <a:tailEnd type="none" w="med" len="med"/>
-                    </a:lnL>
-                    <a:lnR w="6350" cap="flat" cmpd="sng" algn="ctr">
-                      <a:solidFill>
-                        <a:srgbClr val="D8D8D8"/>
-                      </a:solidFill>
-                      <a:prstDash val="solid"/>
-                      <a:round/>
-                      <a:headEnd type="none" w="med" len="med"/>
-                      <a:tailEnd type="none" w="med" len="med"/>
-                    </a:lnR>
-                    <a:lnT w="6350" cap="flat" cmpd="sng" algn="ctr">
-                      <a:solidFill>
-                        <a:srgbClr val="D8D8D8"/>
-                      </a:solidFill>
-                      <a:prstDash val="solid"/>
-                      <a:round/>
-                      <a:headEnd type="none" w="med" len="med"/>
-                      <a:tailEnd type="none" w="med" len="med"/>
-                    </a:lnT>
-                    <a:lnB w="6350" cap="flat" cmpd="sng" algn="ctr">
-                      <a:solidFill>
-                        <a:srgbClr val="D8D8D8"/>
-                      </a:solidFill>
-                      <a:prstDash val="solid"/>
-                      <a:round/>
-                      <a:headEnd type="none" w="med" len="med"/>
-                      <a:tailEnd type="none" w="med" len="med"/>
-                    </a:lnB>
-                  </a:tcPr>
-                </a:tc>
-                <a:extLst>
-                  <a:ext uri="{0D108BD9-81ED-4DB2-BD59-A6C34878D82A}">
-                    <a16:rowId xmlns:a16="http://schemas.microsoft.com/office/drawing/2014/main" val="10001"/>
-                  </a:ext>
-                </a:extLst>
-              </a:tr>
-              <a:tr h="566928">
-                <a:tc>
-                  <a:txBody>
-                    <a:bodyPr/>
-                    <a:lstStyle/>
-                    <a:p>
-                      <a:pPr marL="0" indent="0">
-                        <a:buNone/>
-                      </a:pPr>
-                      <a:r>
-                        <a:rPr lang="en-US" sz="1150" dirty="0">
-                          <a:solidFill>
-                            <a:srgbClr val="1A1A1A"/>
-                          </a:solidFill>
-                          <a:latin typeface="Calibri" pitchFamily="34" charset="0"/>
-                          <a:ea typeface="Calibri" pitchFamily="34" charset="-122"/>
-                          <a:cs typeface="Calibri" pitchFamily="34" charset="-120"/>
-                        </a:rPr>
-                        <a:t>김지해</a:t>
-                      </a:r>
-                      <a:endParaRPr lang="en-US" sz="1150" dirty="0">
-                        <a:latin typeface="Calibri" charset="0"/>
-                        <a:ea typeface="Calibri" charset="0"/>
-                        <a:cs typeface="Calibri" charset="0"/>
-                      </a:endParaRPr>
-                    </a:p>
-                  </a:txBody>
-                  <a:tcPr marL="101600" marR="101600" marT="50800" marB="50800" anchor="ctr">
-                    <a:lnL w="6350" cap="flat" cmpd="sng" algn="ctr">
-                      <a:solidFill>
-                        <a:srgbClr val="D8D8D8"/>
-                      </a:solidFill>
-                      <a:prstDash val="solid"/>
-                      <a:round/>
-                      <a:headEnd type="none" w="med" len="med"/>
-                      <a:tailEnd type="none" w="med" len="med"/>
-                    </a:lnL>
-                    <a:lnR w="6350" cap="flat" cmpd="sng" algn="ctr">
-                      <a:solidFill>
-                        <a:srgbClr val="D8D8D8"/>
-                      </a:solidFill>
-                      <a:prstDash val="solid"/>
-                      <a:round/>
-                      <a:headEnd type="none" w="med" len="med"/>
-                      <a:tailEnd type="none" w="med" len="med"/>
-                    </a:lnR>
-                    <a:lnT w="6350" cap="flat" cmpd="sng" algn="ctr">
-                      <a:solidFill>
-                        <a:srgbClr val="D8D8D8"/>
-                      </a:solidFill>
-                      <a:prstDash val="solid"/>
-                      <a:round/>
-                      <a:headEnd type="none" w="med" len="med"/>
-                      <a:tailEnd type="none" w="med" len="med"/>
-                    </a:lnT>
-                    <a:lnB w="6350" cap="flat" cmpd="sng" algn="ctr">
-                      <a:solidFill>
-                        <a:srgbClr val="D8D8D8"/>
-                      </a:solidFill>
-                      <a:prstDash val="solid"/>
-                      <a:round/>
-                      <a:headEnd type="none" w="med" len="med"/>
-                      <a:tailEnd type="none" w="med" len="med"/>
-                    </a:lnB>
-                  </a:tcPr>
-                </a:tc>
-                <a:tc>
-                  <a:txBody>
-                    <a:bodyPr/>
-                    <a:lstStyle/>
-                    <a:p>
-                      <a:pPr marL="0" indent="0">
-                        <a:buNone/>
-                      </a:pPr>
-                      <a:r>
-                        <a:rPr lang="en-US" sz="1150" dirty="0">
-                          <a:solidFill>
-                            <a:srgbClr val="1A1A1A"/>
-                          </a:solidFill>
-                          <a:latin typeface="Calibri" pitchFamily="34" charset="0"/>
-                          <a:ea typeface="Calibri" pitchFamily="34" charset="-122"/>
-                          <a:cs typeface="Calibri" pitchFamily="34" charset="-120"/>
-                        </a:rPr>
-                        <a:t>169</a:t>
-                      </a:r>
-                      <a:endParaRPr lang="en-US" sz="1150" dirty="0">
-                        <a:latin typeface="Calibri" charset="0"/>
-                        <a:ea typeface="Calibri" charset="0"/>
-                        <a:cs typeface="Calibri" charset="0"/>
-                      </a:endParaRPr>
-                    </a:p>
-                  </a:txBody>
-                  <a:tcPr marL="101600" marR="101600" marT="50800" marB="50800" anchor="ctr">
-                    <a:lnL w="6350" cap="flat" cmpd="sng" algn="ctr">
-                      <a:solidFill>
-                        <a:srgbClr val="D8D8D8"/>
-                      </a:solidFill>
-                      <a:prstDash val="solid"/>
-                      <a:round/>
-                      <a:headEnd type="none" w="med" len="med"/>
-                      <a:tailEnd type="none" w="med" len="med"/>
-                    </a:lnL>
-                    <a:lnR w="6350" cap="flat" cmpd="sng" algn="ctr">
-                      <a:solidFill>
-                        <a:srgbClr val="D8D8D8"/>
-                      </a:solidFill>
-                      <a:prstDash val="solid"/>
-                      <a:round/>
-                      <a:headEnd type="none" w="med" len="med"/>
-                      <a:tailEnd type="none" w="med" len="med"/>
-                    </a:lnR>
-                    <a:lnT w="6350" cap="flat" cmpd="sng" algn="ctr">
-                      <a:solidFill>
-                        <a:srgbClr val="D8D8D8"/>
-                      </a:solidFill>
-                      <a:prstDash val="solid"/>
-                      <a:round/>
-                      <a:headEnd type="none" w="med" len="med"/>
-                      <a:tailEnd type="none" w="med" len="med"/>
-                    </a:lnT>
-                    <a:lnB w="6350" cap="flat" cmpd="sng" algn="ctr">
-                      <a:solidFill>
-                        <a:srgbClr val="D8D8D8"/>
-                      </a:solidFill>
-                      <a:prstDash val="solid"/>
-                      <a:round/>
-                      <a:headEnd type="none" w="med" len="med"/>
-                      <a:tailEnd type="none" w="med" len="med"/>
-                    </a:lnB>
-                  </a:tcPr>
-                </a:tc>
-                <a:tc>
-                  <a:txBody>
-                    <a:bodyPr/>
-                    <a:lstStyle/>
-                    <a:p>
-                      <a:pPr marL="0" indent="0">
-                        <a:buNone/>
-                      </a:pPr>
-                      <a:r>
-                        <a:rPr lang="en-US" sz="1150" dirty="0">
-                          <a:solidFill>
-                            <a:srgbClr val="1A1A1A"/>
-                          </a:solidFill>
-                          <a:latin typeface="Calibri" pitchFamily="34" charset="0"/>
-                          <a:ea typeface="Calibri" pitchFamily="34" charset="-122"/>
-                          <a:cs typeface="Calibri" pitchFamily="34" charset="-120"/>
-                        </a:rPr>
-                        <a:t>25건</a:t>
-                      </a:r>
-                      <a:endParaRPr lang="en-US" sz="1150" dirty="0">
-                        <a:latin typeface="Calibri" charset="0"/>
-                        <a:ea typeface="Calibri" charset="0"/>
-                        <a:cs typeface="Calibri" charset="0"/>
-                      </a:endParaRPr>
-                    </a:p>
-                  </a:txBody>
-                  <a:tcPr marL="101600" marR="101600" marT="50800" marB="50800" anchor="ctr">
-                    <a:lnL w="6350" cap="flat" cmpd="sng" algn="ctr">
-                      <a:solidFill>
-                        <a:srgbClr val="D8D8D8"/>
-                      </a:solidFill>
-                      <a:prstDash val="solid"/>
-                      <a:round/>
-                      <a:headEnd type="none" w="med" len="med"/>
-                      <a:tailEnd type="none" w="med" len="med"/>
-                    </a:lnL>
-                    <a:lnR w="6350" cap="flat" cmpd="sng" algn="ctr">
-                      <a:solidFill>
-                        <a:srgbClr val="D8D8D8"/>
-                      </a:solidFill>
-                      <a:prstDash val="solid"/>
-                      <a:round/>
-                      <a:headEnd type="none" w="med" len="med"/>
-                      <a:tailEnd type="none" w="med" len="med"/>
-                    </a:lnR>
-                    <a:lnT w="6350" cap="flat" cmpd="sng" algn="ctr">
-                      <a:solidFill>
-                        <a:srgbClr val="D8D8D8"/>
-                      </a:solidFill>
-                      <a:prstDash val="solid"/>
-                      <a:round/>
-                      <a:headEnd type="none" w="med" len="med"/>
-                      <a:tailEnd type="none" w="med" len="med"/>
-                    </a:lnT>
-                    <a:lnB w="6350" cap="flat" cmpd="sng" algn="ctr">
-                      <a:solidFill>
-                        <a:srgbClr val="D8D8D8"/>
-                      </a:solidFill>
-                      <a:prstDash val="solid"/>
-                      <a:round/>
-                      <a:headEnd type="none" w="med" len="med"/>
-                      <a:tailEnd type="none" w="med" len="med"/>
-                    </a:lnB>
-                  </a:tcPr>
-                </a:tc>
-                <a:tc>
-                  <a:txBody>
-                    <a:bodyPr/>
-                    <a:lstStyle/>
-                    <a:p>
-                      <a:pPr marL="0" indent="0">
-                        <a:buNone/>
-                      </a:pPr>
-                      <a:r>
-                        <a:rPr lang="en-US" sz="1150" dirty="0">
-                          <a:solidFill>
-                            <a:srgbClr val="1A1A1A"/>
-                          </a:solidFill>
-                          <a:latin typeface="Calibri" pitchFamily="34" charset="0"/>
-                          <a:ea typeface="Calibri" pitchFamily="34" charset="-122"/>
-                          <a:cs typeface="Calibri" pitchFamily="34" charset="-120"/>
-                        </a:rPr>
-                        <a:t>주민 캐릭터 100% · UI 이미지 92% · 자원 데이터 78% · UI 프리팹 54%</a:t>
-                      </a:r>
-                      <a:endParaRPr lang="en-US" sz="1150" dirty="0">
-                        <a:latin typeface="Calibri" charset="0"/>
-                        <a:ea typeface="Calibri" charset="0"/>
-                        <a:cs typeface="Calibri" charset="0"/>
-                      </a:endParaRPr>
-                    </a:p>
-                  </a:txBody>
-                  <a:tcPr marL="101600" marR="101600" marT="50800" marB="50800" anchor="ctr">
-                    <a:lnL w="6350" cap="flat" cmpd="sng" algn="ctr">
-                      <a:solidFill>
-                        <a:srgbClr val="D8D8D8"/>
-                      </a:solidFill>
-                      <a:prstDash val="solid"/>
-                      <a:round/>
-                      <a:headEnd type="none" w="med" len="med"/>
-                      <a:tailEnd type="none" w="med" len="med"/>
-                    </a:lnL>
-                    <a:lnR w="6350" cap="flat" cmpd="sng" algn="ctr">
-                      <a:solidFill>
-                        <a:srgbClr val="D8D8D8"/>
-                      </a:solidFill>
-                      <a:prstDash val="solid"/>
-                      <a:round/>
-                      <a:headEnd type="none" w="med" len="med"/>
-                      <a:tailEnd type="none" w="med" len="med"/>
-                    </a:lnR>
-                    <a:lnT w="6350" cap="flat" cmpd="sng" algn="ctr">
-                      <a:solidFill>
-                        <a:srgbClr val="D8D8D8"/>
-                      </a:solidFill>
-                      <a:prstDash val="solid"/>
-                      <a:round/>
-                      <a:headEnd type="none" w="med" len="med"/>
-                      <a:tailEnd type="none" w="med" len="med"/>
-                    </a:lnT>
-                    <a:lnB w="6350" cap="flat" cmpd="sng" algn="ctr">
-                      <a:solidFill>
-                        <a:srgbClr val="D8D8D8"/>
-                      </a:solidFill>
-                      <a:prstDash val="solid"/>
-                      <a:round/>
-                      <a:headEnd type="none" w="med" len="med"/>
-                      <a:tailEnd type="none" w="med" len="med"/>
-                    </a:lnB>
-                  </a:tcPr>
-                </a:tc>
-                <a:extLst>
-                  <a:ext uri="{0D108BD9-81ED-4DB2-BD59-A6C34878D82A}">
-                    <a16:rowId xmlns:a16="http://schemas.microsoft.com/office/drawing/2014/main" val="10002"/>
-                  </a:ext>
-                </a:extLst>
-              </a:tr>
-              <a:tr h="566928">
-                <a:tc>
-                  <a:txBody>
-                    <a:bodyPr/>
-                    <a:lstStyle/>
-                    <a:p>
-                      <a:pPr marL="0" indent="0">
-                        <a:buNone/>
-                      </a:pPr>
-                      <a:r>
-                        <a:rPr lang="en-US" sz="1150" dirty="0">
-                          <a:solidFill>
-                            <a:srgbClr val="1A1A1A"/>
-                          </a:solidFill>
-                          <a:latin typeface="Calibri" pitchFamily="34" charset="0"/>
-                          <a:ea typeface="Calibri" pitchFamily="34" charset="-122"/>
-                          <a:cs typeface="Calibri" pitchFamily="34" charset="-120"/>
-                        </a:rPr>
-                        <a:t>이하늘</a:t>
-                      </a:r>
-                      <a:endParaRPr lang="en-US" sz="1150" dirty="0">
-                        <a:latin typeface="Calibri" charset="0"/>
-                        <a:ea typeface="Calibri" charset="0"/>
-                        <a:cs typeface="Calibri" charset="0"/>
-                      </a:endParaRPr>
-                    </a:p>
-                  </a:txBody>
-                  <a:tcPr marL="101600" marR="101600" marT="50800" marB="50800" anchor="ctr">
-                    <a:lnL w="6350" cap="flat" cmpd="sng" algn="ctr">
-                      <a:solidFill>
-                        <a:srgbClr val="D8D8D8"/>
-                      </a:solidFill>
-                      <a:prstDash val="solid"/>
-                      <a:round/>
-                      <a:headEnd type="none" w="med" len="med"/>
-                      <a:tailEnd type="none" w="med" len="med"/>
-                    </a:lnL>
-                    <a:lnR w="6350" cap="flat" cmpd="sng" algn="ctr">
-                      <a:solidFill>
-                        <a:srgbClr val="D8D8D8"/>
-                      </a:solidFill>
-                      <a:prstDash val="solid"/>
-                      <a:round/>
-                      <a:headEnd type="none" w="med" len="med"/>
-                      <a:tailEnd type="none" w="med" len="med"/>
-                    </a:lnR>
-                    <a:lnT w="6350" cap="flat" cmpd="sng" algn="ctr">
-                      <a:solidFill>
-                        <a:srgbClr val="D8D8D8"/>
-                      </a:solidFill>
-                      <a:prstDash val="solid"/>
-                      <a:round/>
-                      <a:headEnd type="none" w="med" len="med"/>
-                      <a:tailEnd type="none" w="med" len="med"/>
-                    </a:lnT>
-                    <a:lnB w="6350" cap="flat" cmpd="sng" algn="ctr">
-                      <a:solidFill>
-                        <a:srgbClr val="D8D8D8"/>
-                      </a:solidFill>
-                      <a:prstDash val="solid"/>
-                      <a:round/>
-                      <a:headEnd type="none" w="med" len="med"/>
-                      <a:tailEnd type="none" w="med" len="med"/>
-                    </a:lnB>
-                  </a:tcPr>
-                </a:tc>
-                <a:tc>
-                  <a:txBody>
-                    <a:bodyPr/>
-                    <a:lstStyle/>
-                    <a:p>
-                      <a:pPr marL="0" indent="0">
-                        <a:buNone/>
-                      </a:pPr>
-                      <a:r>
-                        <a:rPr lang="en-US" sz="1150" dirty="0">
-                          <a:solidFill>
-                            <a:srgbClr val="1A1A1A"/>
-                          </a:solidFill>
-                          <a:latin typeface="Calibri" pitchFamily="34" charset="0"/>
-                          <a:ea typeface="Calibri" pitchFamily="34" charset="-122"/>
-                          <a:cs typeface="Calibri" pitchFamily="34" charset="-120"/>
-                        </a:rPr>
-                        <a:t>238</a:t>
-                      </a:r>
-                      <a:endParaRPr lang="en-US" sz="1150" dirty="0">
-                        <a:latin typeface="Calibri" charset="0"/>
-                        <a:ea typeface="Calibri" charset="0"/>
-                        <a:cs typeface="Calibri" charset="0"/>
-                      </a:endParaRPr>
-                    </a:p>
-                  </a:txBody>
-                  <a:tcPr marL="101600" marR="101600" marT="50800" marB="50800" anchor="ctr">
-                    <a:lnL w="6350" cap="flat" cmpd="sng" algn="ctr">
-                      <a:solidFill>
-                        <a:srgbClr val="D8D8D8"/>
-                      </a:solidFill>
-                      <a:prstDash val="solid"/>
-                      <a:round/>
-                      <a:headEnd type="none" w="med" len="med"/>
-                      <a:tailEnd type="none" w="med" len="med"/>
-                    </a:lnL>
-                    <a:lnR w="6350" cap="flat" cmpd="sng" algn="ctr">
-                      <a:solidFill>
-                        <a:srgbClr val="D8D8D8"/>
-                      </a:solidFill>
-                      <a:prstDash val="solid"/>
-                      <a:round/>
-                      <a:headEnd type="none" w="med" len="med"/>
-                      <a:tailEnd type="none" w="med" len="med"/>
-                    </a:lnR>
-                    <a:lnT w="6350" cap="flat" cmpd="sng" algn="ctr">
-                      <a:solidFill>
-                        <a:srgbClr val="D8D8D8"/>
-                      </a:solidFill>
-                      <a:prstDash val="solid"/>
-                      <a:round/>
-                      <a:headEnd type="none" w="med" len="med"/>
-                      <a:tailEnd type="none" w="med" len="med"/>
-                    </a:lnT>
-                    <a:lnB w="6350" cap="flat" cmpd="sng" algn="ctr">
-                      <a:solidFill>
-                        <a:srgbClr val="D8D8D8"/>
-                      </a:solidFill>
-                      <a:prstDash val="solid"/>
-                      <a:round/>
-                      <a:headEnd type="none" w="med" len="med"/>
-                      <a:tailEnd type="none" w="med" len="med"/>
-                    </a:lnB>
-                  </a:tcPr>
-                </a:tc>
-                <a:tc>
-                  <a:txBody>
-                    <a:bodyPr/>
-                    <a:lstStyle/>
-                    <a:p>
-                      <a:pPr marL="0" indent="0">
-                        <a:buNone/>
-                      </a:pPr>
-                      <a:r>
-                        <a:rPr lang="en-US" sz="1150" dirty="0">
-                          <a:solidFill>
-                            <a:srgbClr val="1A1A1A"/>
-                          </a:solidFill>
-                          <a:latin typeface="Calibri" pitchFamily="34" charset="0"/>
-                          <a:ea typeface="Calibri" pitchFamily="34" charset="-122"/>
-                          <a:cs typeface="Calibri" pitchFamily="34" charset="-120"/>
-                        </a:rPr>
-                        <a:t>35건</a:t>
-                      </a:r>
-                      <a:endParaRPr lang="en-US" sz="1150" dirty="0">
-                        <a:latin typeface="Calibri" charset="0"/>
-                        <a:ea typeface="Calibri" charset="0"/>
-                        <a:cs typeface="Calibri" charset="0"/>
-                      </a:endParaRPr>
-                    </a:p>
-                  </a:txBody>
-                  <a:tcPr marL="101600" marR="101600" marT="50800" marB="50800" anchor="ctr">
-                    <a:lnL w="6350" cap="flat" cmpd="sng" algn="ctr">
-                      <a:solidFill>
-                        <a:srgbClr val="D8D8D8"/>
-                      </a:solidFill>
-                      <a:prstDash val="solid"/>
-                      <a:round/>
-                      <a:headEnd type="none" w="med" len="med"/>
-                      <a:tailEnd type="none" w="med" len="med"/>
-                    </a:lnL>
-                    <a:lnR w="6350" cap="flat" cmpd="sng" algn="ctr">
-                      <a:solidFill>
-                        <a:srgbClr val="D8D8D8"/>
-                      </a:solidFill>
-                      <a:prstDash val="solid"/>
-                      <a:round/>
-                      <a:headEnd type="none" w="med" len="med"/>
-                      <a:tailEnd type="none" w="med" len="med"/>
-                    </a:lnR>
-                    <a:lnT w="6350" cap="flat" cmpd="sng" algn="ctr">
-                      <a:solidFill>
-                        <a:srgbClr val="D8D8D8"/>
-                      </a:solidFill>
-                      <a:prstDash val="solid"/>
-                      <a:round/>
-                      <a:headEnd type="none" w="med" len="med"/>
-                      <a:tailEnd type="none" w="med" len="med"/>
-                    </a:lnT>
-                    <a:lnB w="6350" cap="flat" cmpd="sng" algn="ctr">
-                      <a:solidFill>
-                        <a:srgbClr val="D8D8D8"/>
-                      </a:solidFill>
-                      <a:prstDash val="solid"/>
-                      <a:round/>
-                      <a:headEnd type="none" w="med" len="med"/>
-                      <a:tailEnd type="none" w="med" len="med"/>
-                    </a:lnB>
-                  </a:tcPr>
-                </a:tc>
-                <a:tc>
-                  <a:txBody>
-                    <a:bodyPr/>
-                    <a:lstStyle/>
-                    <a:p>
-                      <a:pPr marL="0" indent="0">
-                        <a:buNone/>
-                      </a:pPr>
-                      <a:r>
-                        <a:rPr lang="en-US" sz="1150" dirty="0">
-                          <a:solidFill>
-                            <a:srgbClr val="1A1A1A"/>
-                          </a:solidFill>
-                          <a:latin typeface="Calibri" pitchFamily="34" charset="0"/>
-                          <a:ea typeface="Calibri" pitchFamily="34" charset="-122"/>
-                          <a:cs typeface="Calibri" pitchFamily="34" charset="-120"/>
-                        </a:rPr>
-                        <a:t>튜토리얼 99% · 건물 아트 99% · 튜토리얼 로직 91% · 점령 73%</a:t>
-                      </a:r>
-                      <a:endParaRPr lang="en-US" sz="1150" dirty="0">
-                        <a:latin typeface="Calibri" charset="0"/>
-                        <a:ea typeface="Calibri" charset="0"/>
-                        <a:cs typeface="Calibri" charset="0"/>
-                      </a:endParaRPr>
-                    </a:p>
-                  </a:txBody>
-                  <a:tcPr marL="101600" marR="101600" marT="50800" marB="50800" anchor="ctr">
-                    <a:lnL w="6350" cap="flat" cmpd="sng" algn="ctr">
-                      <a:solidFill>
-                        <a:srgbClr val="D8D8D8"/>
-                      </a:solidFill>
-                      <a:prstDash val="solid"/>
-                      <a:round/>
-                      <a:headEnd type="none" w="med" len="med"/>
-                      <a:tailEnd type="none" w="med" len="med"/>
-                    </a:lnL>
-                    <a:lnR w="6350" cap="flat" cmpd="sng" algn="ctr">
-                      <a:solidFill>
-                        <a:srgbClr val="D8D8D8"/>
-                      </a:solidFill>
-                      <a:prstDash val="solid"/>
-                      <a:round/>
-                      <a:headEnd type="none" w="med" len="med"/>
-                      <a:tailEnd type="none" w="med" len="med"/>
-                    </a:lnR>
-                    <a:lnT w="6350" cap="flat" cmpd="sng" algn="ctr">
-                      <a:solidFill>
-                        <a:srgbClr val="D8D8D8"/>
-                      </a:solidFill>
-                      <a:prstDash val="solid"/>
-                      <a:round/>
-                      <a:headEnd type="none" w="med" len="med"/>
-                      <a:tailEnd type="none" w="med" len="med"/>
-                    </a:lnT>
-                    <a:lnB w="6350" cap="flat" cmpd="sng" algn="ctr">
-                      <a:solidFill>
-                        <a:srgbClr val="D8D8D8"/>
-                      </a:solidFill>
-                      <a:prstDash val="solid"/>
-                      <a:round/>
-                      <a:headEnd type="none" w="med" len="med"/>
-                      <a:tailEnd type="none" w="med" len="med"/>
-                    </a:lnB>
-                  </a:tcPr>
-                </a:tc>
-                <a:extLst>
-                  <a:ext uri="{0D108BD9-81ED-4DB2-BD59-A6C34878D82A}">
-                    <a16:rowId xmlns:a16="http://schemas.microsoft.com/office/drawing/2014/main" val="10003"/>
-                  </a:ext>
-                </a:extLst>
-              </a:tr>
-              <a:tr h="566928">
-                <a:tc>
-                  <a:txBody>
-                    <a:bodyPr/>
-                    <a:lstStyle/>
-                    <a:p>
-                      <a:pPr marL="0" indent="0">
-                        <a:buNone/>
-                      </a:pPr>
-                      <a:r>
-                        <a:rPr lang="en-US" sz="1150" dirty="0">
-                          <a:solidFill>
-                            <a:srgbClr val="1A1A1A"/>
-                          </a:solidFill>
-                          <a:latin typeface="Calibri" pitchFamily="34" charset="0"/>
-                          <a:ea typeface="Calibri" pitchFamily="34" charset="-122"/>
-                          <a:cs typeface="Calibri" pitchFamily="34" charset="-120"/>
-                        </a:rPr>
-                        <a:t>나상욱</a:t>
-                      </a:r>
-                      <a:endParaRPr lang="en-US" sz="1150" dirty="0">
-                        <a:latin typeface="Calibri" charset="0"/>
-                        <a:ea typeface="Calibri" charset="0"/>
-                        <a:cs typeface="Calibri" charset="0"/>
-                      </a:endParaRPr>
-                    </a:p>
-                  </a:txBody>
-                  <a:tcPr marL="101600" marR="101600" marT="50800" marB="50800" anchor="ctr">
-                    <a:lnL w="6350" cap="flat" cmpd="sng" algn="ctr">
-                      <a:solidFill>
-                        <a:srgbClr val="D8D8D8"/>
-                      </a:solidFill>
-                      <a:prstDash val="solid"/>
-                      <a:round/>
-                      <a:headEnd type="none" w="med" len="med"/>
-                      <a:tailEnd type="none" w="med" len="med"/>
-                    </a:lnL>
-                    <a:lnR w="6350" cap="flat" cmpd="sng" algn="ctr">
-                      <a:solidFill>
-                        <a:srgbClr val="D8D8D8"/>
-                      </a:solidFill>
-                      <a:prstDash val="solid"/>
-                      <a:round/>
-                      <a:headEnd type="none" w="med" len="med"/>
-                      <a:tailEnd type="none" w="med" len="med"/>
-                    </a:lnR>
-                    <a:lnT w="6350" cap="flat" cmpd="sng" algn="ctr">
-                      <a:solidFill>
-                        <a:srgbClr val="D8D8D8"/>
-                      </a:solidFill>
-                      <a:prstDash val="solid"/>
-                      <a:round/>
-                      <a:headEnd type="none" w="med" len="med"/>
-                      <a:tailEnd type="none" w="med" len="med"/>
-                    </a:lnT>
-                    <a:lnB w="6350" cap="flat" cmpd="sng" algn="ctr">
-                      <a:solidFill>
-                        <a:srgbClr val="D8D8D8"/>
-                      </a:solidFill>
-                      <a:prstDash val="solid"/>
-                      <a:round/>
-                      <a:headEnd type="none" w="med" len="med"/>
-                      <a:tailEnd type="none" w="med" len="med"/>
-                    </a:lnB>
-                  </a:tcPr>
-                </a:tc>
-                <a:tc>
-                  <a:txBody>
-                    <a:bodyPr/>
-                    <a:lstStyle/>
-                    <a:p>
-                      <a:pPr marL="0" indent="0">
-                        <a:buNone/>
-                      </a:pPr>
-                      <a:r>
-                        <a:rPr lang="en-US" sz="1150" dirty="0">
-                          <a:solidFill>
-                            <a:srgbClr val="1A1A1A"/>
-                          </a:solidFill>
-                          <a:latin typeface="Calibri" pitchFamily="34" charset="0"/>
-                          <a:ea typeface="Calibri" pitchFamily="34" charset="-122"/>
-                          <a:cs typeface="Calibri" pitchFamily="34" charset="-120"/>
-                        </a:rPr>
-                        <a:t>389</a:t>
-                      </a:r>
-                      <a:endParaRPr lang="en-US" sz="1150" dirty="0">
-                        <a:latin typeface="Calibri" charset="0"/>
-                        <a:ea typeface="Calibri" charset="0"/>
-                        <a:cs typeface="Calibri" charset="0"/>
-                      </a:endParaRPr>
-                    </a:p>
-                  </a:txBody>
-                  <a:tcPr marL="101600" marR="101600" marT="50800" marB="50800" anchor="ctr">
-                    <a:lnL w="6350" cap="flat" cmpd="sng" algn="ctr">
-                      <a:solidFill>
-                        <a:srgbClr val="D8D8D8"/>
-                      </a:solidFill>
-                      <a:prstDash val="solid"/>
-                      <a:round/>
-                      <a:headEnd type="none" w="med" len="med"/>
-                      <a:tailEnd type="none" w="med" len="med"/>
-                    </a:lnL>
-                    <a:lnR w="6350" cap="flat" cmpd="sng" algn="ctr">
-                      <a:solidFill>
-                        <a:srgbClr val="D8D8D8"/>
-                      </a:solidFill>
-                      <a:prstDash val="solid"/>
-                      <a:round/>
-                      <a:headEnd type="none" w="med" len="med"/>
-                      <a:tailEnd type="none" w="med" len="med"/>
-                    </a:lnR>
-                    <a:lnT w="6350" cap="flat" cmpd="sng" algn="ctr">
-                      <a:solidFill>
-                        <a:srgbClr val="D8D8D8"/>
-                      </a:solidFill>
-                      <a:prstDash val="solid"/>
-                      <a:round/>
-                      <a:headEnd type="none" w="med" len="med"/>
-                      <a:tailEnd type="none" w="med" len="med"/>
-                    </a:lnT>
-                    <a:lnB w="6350" cap="flat" cmpd="sng" algn="ctr">
-                      <a:solidFill>
-                        <a:srgbClr val="D8D8D8"/>
-                      </a:solidFill>
-                      <a:prstDash val="solid"/>
-                      <a:round/>
-                      <a:headEnd type="none" w="med" len="med"/>
-                      <a:tailEnd type="none" w="med" len="med"/>
-                    </a:lnB>
-                  </a:tcPr>
-                </a:tc>
-                <a:tc>
-                  <a:txBody>
-                    <a:bodyPr/>
-                    <a:lstStyle/>
-                    <a:p>
-                      <a:pPr marL="0" indent="0">
-                        <a:buNone/>
-                      </a:pPr>
-                      <a:r>
-                        <a:rPr lang="en-US" sz="1150" dirty="0">
-                          <a:solidFill>
-                            <a:srgbClr val="1A1A1A"/>
-                          </a:solidFill>
-                          <a:latin typeface="Calibri" pitchFamily="34" charset="0"/>
-                          <a:ea typeface="Calibri" pitchFamily="34" charset="-122"/>
-                          <a:cs typeface="Calibri" pitchFamily="34" charset="-120"/>
-                        </a:rPr>
-                        <a:t>50건</a:t>
-                      </a:r>
-                      <a:endParaRPr lang="en-US" sz="1150" dirty="0">
-                        <a:latin typeface="Calibri" charset="0"/>
-                        <a:ea typeface="Calibri" charset="0"/>
-                        <a:cs typeface="Calibri" charset="0"/>
-                      </a:endParaRPr>
-                    </a:p>
-                  </a:txBody>
-                  <a:tcPr marL="101600" marR="101600" marT="50800" marB="50800" anchor="ctr">
-                    <a:lnL w="6350" cap="flat" cmpd="sng" algn="ctr">
-                      <a:solidFill>
-                        <a:srgbClr val="D8D8D8"/>
-                      </a:solidFill>
-                      <a:prstDash val="solid"/>
-                      <a:round/>
-                      <a:headEnd type="none" w="med" len="med"/>
-                      <a:tailEnd type="none" w="med" len="med"/>
-                    </a:lnL>
-                    <a:lnR w="6350" cap="flat" cmpd="sng" algn="ctr">
-                      <a:solidFill>
-                        <a:srgbClr val="D8D8D8"/>
-                      </a:solidFill>
-                      <a:prstDash val="solid"/>
-                      <a:round/>
-                      <a:headEnd type="none" w="med" len="med"/>
-                      <a:tailEnd type="none" w="med" len="med"/>
-                    </a:lnR>
-                    <a:lnT w="6350" cap="flat" cmpd="sng" algn="ctr">
-                      <a:solidFill>
-                        <a:srgbClr val="D8D8D8"/>
-                      </a:solidFill>
-                      <a:prstDash val="solid"/>
-                      <a:round/>
-                      <a:headEnd type="none" w="med" len="med"/>
-                      <a:tailEnd type="none" w="med" len="med"/>
-                    </a:lnT>
-                    <a:lnB w="6350" cap="flat" cmpd="sng" algn="ctr">
-                      <a:solidFill>
-                        <a:srgbClr val="D8D8D8"/>
-                      </a:solidFill>
-                      <a:prstDash val="solid"/>
-                      <a:round/>
-                      <a:headEnd type="none" w="med" len="med"/>
-                      <a:tailEnd type="none" w="med" len="med"/>
-                    </a:lnB>
-                  </a:tcPr>
-                </a:tc>
-                <a:tc>
-                  <a:txBody>
-                    <a:bodyPr/>
-                    <a:lstStyle/>
-                    <a:p>
-                      <a:pPr marL="0" indent="0">
-                        <a:buNone/>
-                      </a:pPr>
-                      <a:r>
-                        <a:rPr lang="en-US" sz="1150" dirty="0">
-                          <a:solidFill>
-                            <a:srgbClr val="1A1A1A"/>
-                          </a:solidFill>
-                          <a:latin typeface="Calibri" pitchFamily="34" charset="0"/>
-                          <a:ea typeface="Calibri" pitchFamily="34" charset="-122"/>
-                          <a:cs typeface="Calibri" pitchFamily="34" charset="-120"/>
-                        </a:rPr>
-                        <a:t>점령 밸런스 93% · 웨이브 77% · 웨이브 로직 76% · 몬스터 74%</a:t>
-                      </a:r>
-                      <a:endParaRPr lang="en-US" sz="1150" dirty="0">
-                        <a:latin typeface="Calibri" charset="0"/>
-                        <a:ea typeface="Calibri" charset="0"/>
-                        <a:cs typeface="Calibri" charset="0"/>
-                      </a:endParaRPr>
-                    </a:p>
-                  </a:txBody>
-                  <a:tcPr marL="101600" marR="101600" marT="50800" marB="50800" anchor="ctr">
-                    <a:lnL w="6350" cap="flat" cmpd="sng" algn="ctr">
-                      <a:solidFill>
-                        <a:srgbClr val="D8D8D8"/>
-                      </a:solidFill>
-                      <a:prstDash val="solid"/>
-                      <a:round/>
-                      <a:headEnd type="none" w="med" len="med"/>
-                      <a:tailEnd type="none" w="med" len="med"/>
-                    </a:lnL>
-                    <a:lnR w="6350" cap="flat" cmpd="sng" algn="ctr">
-                      <a:solidFill>
-                        <a:srgbClr val="D8D8D8"/>
-                      </a:solidFill>
-                      <a:prstDash val="solid"/>
-                      <a:round/>
-                      <a:headEnd type="none" w="med" len="med"/>
-                      <a:tailEnd type="none" w="med" len="med"/>
-                    </a:lnR>
-                    <a:lnT w="6350" cap="flat" cmpd="sng" algn="ctr">
-                      <a:solidFill>
-                        <a:srgbClr val="D8D8D8"/>
-                      </a:solidFill>
-                      <a:prstDash val="solid"/>
-                      <a:round/>
-                      <a:headEnd type="none" w="med" len="med"/>
-                      <a:tailEnd type="none" w="med" len="med"/>
-                    </a:lnT>
-                    <a:lnB w="6350" cap="flat" cmpd="sng" algn="ctr">
-                      <a:solidFill>
-                        <a:srgbClr val="D8D8D8"/>
-                      </a:solidFill>
-                      <a:prstDash val="solid"/>
-                      <a:round/>
-                      <a:headEnd type="none" w="med" len="med"/>
-                      <a:tailEnd type="none" w="med" len="med"/>
-                    </a:lnB>
-                  </a:tcPr>
-                </a:tc>
-                <a:extLst>
-                  <a:ext uri="{0D108BD9-81ED-4DB2-BD59-A6C34878D82A}">
-                    <a16:rowId xmlns:a16="http://schemas.microsoft.com/office/drawing/2014/main" val="10004"/>
-                  </a:ext>
-                </a:extLst>
-              </a:tr>
-            </a:tbl>
-          </a:graphicData>
-        </a:graphic>
-      </p:graphicFrame>
-      <p:sp>
-        <p:nvSpPr>
-          <p:cNvPr id="6" name="Text 3"/>
+      <p:sp>
+        <p:nvSpPr>
+          <p:cNvPr id="5" name="Text 3"/>
           <p:cNvSpPr txBox="1"/>
           <p:nvPr/>
         </p:nvSpPr>
         <p:spPr>
           <a:xfrm>
-            <a:off x="640080" y="4937760"/>
-            <a:ext cx="10908792" cy="256032"/>
+            <a:off x="640080" y="2075688"/>
+            <a:ext cx="2286000" cy="777240"/>
           </a:xfrm>
           <a:prstGeom prst="rect">
             <a:avLst/>
@@ -20810,7 +19534,7 @@
               <a:buNone/>
             </a:pPr>
             <a:r>
-              <a:rPr lang="en-US" sz="1150" b="1" dirty="0">
+              <a:rPr lang="en-US" sz="4000" b="1" dirty="0">
                 <a:solidFill>
                   <a:srgbClr val="B85042"/>
                 </a:solidFill>
@@ -20818,22 +19542,22 @@
                 <a:ea typeface="Calibri" pitchFamily="34" charset="-122"/>
                 <a:cs typeface="Calibri" pitchFamily="34" charset="-120"/>
               </a:rPr>
-              <a:t>기여 분석에서 확인된 협업 구조</a:t>
-            </a:r>
-            <a:endParaRPr lang="en-US" sz="1150" dirty="0"/>
-          </a:p>
-        </p:txBody>
-      </p:sp>
-      <p:sp>
-        <p:nvSpPr>
-          <p:cNvPr id="5" name="Text 4"/>
+              <a:t>70%+</a:t>
+            </a:r>
+            <a:endParaRPr lang="en-US" sz="4000" dirty="0"/>
+          </a:p>
+        </p:txBody>
+      </p:sp>
+      <p:sp>
+        <p:nvSpPr>
+          <p:cNvPr id="6" name="Text 4"/>
           <p:cNvSpPr txBox="1"/>
           <p:nvPr/>
         </p:nvSpPr>
         <p:spPr>
           <a:xfrm>
-            <a:off x="640080" y="5248656"/>
-            <a:ext cx="10908792" cy="1280160"/>
+            <a:off x="3337560" y="2057400"/>
+            <a:ext cx="8211312" cy="384048"/>
           </a:xfrm>
           <a:prstGeom prst="rect">
             <a:avLst/>
@@ -20842,17 +19566,14 @@
           <a:ln/>
         </p:spPr>
         <p:txBody>
-          <a:bodyPr wrap="square" lIns="0" tIns="0" rIns="0" bIns="0" rtlCol="0" anchor="t"/>
+          <a:bodyPr wrap="square" lIns="0" tIns="0" rIns="0" bIns="0" rtlCol="0" anchor="ctr"/>
           <a:lstStyle/>
           <a:p>
             <a:pPr marL="0" indent="0">
-              <a:spcAft>
-                <a:spcPts val="600"/>
-              </a:spcAft>
               <a:buNone/>
             </a:pPr>
             <a:r>
-              <a:rPr lang="en-US" sz="1200" dirty="0">
+              <a:rPr lang="en-US" sz="2100" b="1" dirty="0">
                 <a:solidFill>
                   <a:srgbClr val="1A1A1A"/>
                 </a:solidFill>
@@ -20860,62 +19581,22 @@
                 <a:ea typeface="Calibri" pitchFamily="34" charset="-122"/>
                 <a:cs typeface="Calibri" pitchFamily="34" charset="-120"/>
               </a:rPr>
-              <a:t>영역 분담 네 명이 인프라 · UI · 낮 운영 · 밤 전투로 나눠 맡아, 전담 영역 점유율이 대부분 70% 이상 — 담당 경계가 명확했음</a:t>
-            </a:r>
-            <a:endParaRPr lang="en-US" sz="1200" dirty="0"/>
-          </a:p>
-          <a:p>
-            <a:pPr marL="0" indent="0">
-              <a:spcAft>
-                <a:spcPts val="600"/>
-              </a:spcAft>
-              <a:buNone/>
-            </a:pPr>
-            <a:r>
-              <a:rPr lang="en-US" sz="1200" dirty="0">
-                <a:solidFill>
-                  <a:srgbClr val="1A1A1A"/>
-                </a:solidFill>
-                <a:latin typeface="Calibri" pitchFamily="34" charset="0"/>
-                <a:ea typeface="Calibri" pitchFamily="34" charset="-122"/>
-                <a:cs typeface="Calibri" pitchFamily="34" charset="-120"/>
-              </a:rPr>
-              <a:t>공동 구역 씬 배선과 건물 스크립트 등 시스템 간 접점만 공동 작업 — 충돌 지점을 이 구역으로 국한시킴</a:t>
-            </a:r>
-            <a:endParaRPr lang="en-US" sz="1200" dirty="0"/>
-          </a:p>
-          <a:p>
-            <a:pPr marL="0" indent="0">
-              <a:spcAft>
-                <a:spcPts val="600"/>
-              </a:spcAft>
-              <a:buNone/>
-            </a:pPr>
-            <a:r>
-              <a:rPr lang="en-US" sz="1200" dirty="0">
-                <a:solidFill>
-                  <a:srgbClr val="1A1A1A"/>
-                </a:solidFill>
-                <a:latin typeface="Calibri" pitchFamily="34" charset="0"/>
-                <a:ea typeface="Calibri" pitchFamily="34" charset="-122"/>
-                <a:cs typeface="Calibri" pitchFamily="34" charset="-120"/>
-              </a:rPr>
-              <a:t>통합 체계 전체 PR 110건 중 92건(83.6%)을 팀장이 직접 리뷰·머지해 master 품질을 단일 창구에서 관리</a:t>
-            </a:r>
-            <a:endParaRPr lang="en-US" sz="1200" dirty="0"/>
-          </a:p>
-        </p:txBody>
-      </p:sp>
-      <p:sp>
-        <p:nvSpPr>
-          <p:cNvPr id="8" name="Text 5"/>
+              <a:t>영역 분담</a:t>
+            </a:r>
+            <a:endParaRPr lang="en-US" sz="2100" dirty="0"/>
+          </a:p>
+        </p:txBody>
+      </p:sp>
+      <p:sp>
+        <p:nvSpPr>
+          <p:cNvPr id="7" name="Text 5"/>
           <p:cNvSpPr txBox="1"/>
           <p:nvPr/>
         </p:nvSpPr>
         <p:spPr>
           <a:xfrm>
-            <a:off x="640080" y="6053328"/>
-            <a:ext cx="10908792" cy="274320"/>
+            <a:off x="3337560" y="2514600"/>
+            <a:ext cx="8211312" cy="777240"/>
           </a:xfrm>
           <a:prstGeom prst="rect">
             <a:avLst/>
@@ -20924,6 +19605,68 @@
           <a:ln/>
         </p:spPr>
         <p:txBody>
+          <a:bodyPr wrap="square" lIns="0" tIns="0" rIns="0" bIns="0" rtlCol="0" anchor="t"/>
+          <a:lstStyle/>
+          <a:p>
+            <a:pPr marL="0" indent="0">
+              <a:lnSpc>
+                <a:spcPct val="130000"/>
+              </a:lnSpc>
+              <a:buNone/>
+            </a:pPr>
+            <a:r>
+              <a:rPr lang="en-US" sz="1500" dirty="0">
+                <a:solidFill>
+                  <a:srgbClr val="1A1A1A"/>
+                </a:solidFill>
+                <a:latin typeface="Calibri" pitchFamily="34" charset="0"/>
+                <a:ea typeface="Calibri" pitchFamily="34" charset="-122"/>
+                <a:cs typeface="Calibri" pitchFamily="34" charset="-120"/>
+              </a:rPr>
+              <a:t>네 명이 인프라 · UI · 낮 운영 · 밤 전투로 나눠 맡아,</a:t>
+            </a:r>
+            <a:endParaRPr lang="en-US" sz="1500" dirty="0"/>
+          </a:p>
+          <a:p>
+            <a:pPr marL="0" indent="0">
+              <a:lnSpc>
+                <a:spcPct val="130000"/>
+              </a:lnSpc>
+              <a:buNone/>
+            </a:pPr>
+            <a:r>
+              <a:rPr lang="en-US" sz="1500" dirty="0">
+                <a:solidFill>
+                  <a:srgbClr val="1A1A1A"/>
+                </a:solidFill>
+                <a:latin typeface="Calibri" pitchFamily="34" charset="0"/>
+                <a:ea typeface="Calibri" pitchFamily="34" charset="-122"/>
+                <a:cs typeface="Calibri" pitchFamily="34" charset="-120"/>
+              </a:rPr>
+              <a:t>전담 영역 점유율이 대부분 70% 이상 — 담당 경계가 명확했습니다.</a:t>
+            </a:r>
+            <a:endParaRPr lang="en-US" sz="1500" dirty="0"/>
+          </a:p>
+        </p:txBody>
+      </p:sp>
+      <p:sp>
+        <p:nvSpPr>
+          <p:cNvPr id="8" name="Text 6"/>
+          <p:cNvSpPr txBox="1"/>
+          <p:nvPr/>
+        </p:nvSpPr>
+        <p:spPr>
+          <a:xfrm>
+            <a:off x="640080" y="3447288"/>
+            <a:ext cx="2286000" cy="777240"/>
+          </a:xfrm>
+          <a:prstGeom prst="rect">
+            <a:avLst/>
+          </a:prstGeom>
+          <a:noFill/>
+          <a:ln/>
+        </p:spPr>
+        <p:txBody>
           <a:bodyPr wrap="square" lIns="0" tIns="0" rIns="0" bIns="0" rtlCol="0" anchor="ctr"/>
           <a:lstStyle/>
           <a:p>
@@ -20931,23 +19674,264 @@
               <a:buNone/>
             </a:pPr>
             <a:r>
-              <a:rPr lang="en-US" sz="1050" dirty="0">
-                <a:solidFill>
-                  <a:srgbClr val="6E6E6E"/>
-                </a:solidFill>
-                <a:latin typeface="Calibri" pitchFamily="34" charset="0"/>
-                <a:ea typeface="Calibri" pitchFamily="34" charset="-122"/>
-                <a:cs typeface="Calibri" pitchFamily="34" charset="-120"/>
-              </a:rPr>
-              <a:t>※ 점유율은 코드 라인 수가 아니라 해당 영역의 파일을 수정한 횟수 기준입니다.</a:t>
-            </a:r>
-            <a:endParaRPr lang="en-US" sz="1050" dirty="0"/>
-          </a:p>
-        </p:txBody>
-      </p:sp>
-      <p:sp>
-        <p:nvSpPr>
-          <p:cNvPr id="9" name="Text 6"/>
+              <a:rPr lang="en-US" sz="4000" b="1" dirty="0">
+                <a:solidFill>
+                  <a:srgbClr val="B85042"/>
+                </a:solidFill>
+                <a:latin typeface="Calibri" pitchFamily="34" charset="0"/>
+                <a:ea typeface="Calibri" pitchFamily="34" charset="-122"/>
+                <a:cs typeface="Calibri" pitchFamily="34" charset="-120"/>
+              </a:rPr>
+              <a:t>2곳</a:t>
+            </a:r>
+            <a:endParaRPr lang="en-US" sz="4000" dirty="0"/>
+          </a:p>
+        </p:txBody>
+      </p:sp>
+      <p:sp>
+        <p:nvSpPr>
+          <p:cNvPr id="9" name="Text 7"/>
+          <p:cNvSpPr txBox="1"/>
+          <p:nvPr/>
+        </p:nvSpPr>
+        <p:spPr>
+          <a:xfrm>
+            <a:off x="3337560" y="3429000"/>
+            <a:ext cx="8211312" cy="384048"/>
+          </a:xfrm>
+          <a:prstGeom prst="rect">
+            <a:avLst/>
+          </a:prstGeom>
+          <a:noFill/>
+          <a:ln/>
+        </p:spPr>
+        <p:txBody>
+          <a:bodyPr wrap="square" lIns="0" tIns="0" rIns="0" bIns="0" rtlCol="0" anchor="ctr"/>
+          <a:lstStyle/>
+          <a:p>
+            <a:pPr marL="0" indent="0">
+              <a:buNone/>
+            </a:pPr>
+            <a:r>
+              <a:rPr lang="en-US" sz="2100" b="1" dirty="0">
+                <a:solidFill>
+                  <a:srgbClr val="1A1A1A"/>
+                </a:solidFill>
+                <a:latin typeface="Calibri" pitchFamily="34" charset="0"/>
+                <a:ea typeface="Calibri" pitchFamily="34" charset="-122"/>
+                <a:cs typeface="Calibri" pitchFamily="34" charset="-120"/>
+              </a:rPr>
+              <a:t>공동 구역</a:t>
+            </a:r>
+            <a:endParaRPr lang="en-US" sz="2100" dirty="0"/>
+          </a:p>
+        </p:txBody>
+      </p:sp>
+      <p:sp>
+        <p:nvSpPr>
+          <p:cNvPr id="10" name="Text 8"/>
+          <p:cNvSpPr txBox="1"/>
+          <p:nvPr/>
+        </p:nvSpPr>
+        <p:spPr>
+          <a:xfrm>
+            <a:off x="3337560" y="3886200"/>
+            <a:ext cx="8211312" cy="777240"/>
+          </a:xfrm>
+          <a:prstGeom prst="rect">
+            <a:avLst/>
+          </a:prstGeom>
+          <a:noFill/>
+          <a:ln/>
+        </p:spPr>
+        <p:txBody>
+          <a:bodyPr wrap="square" lIns="0" tIns="0" rIns="0" bIns="0" rtlCol="0" anchor="t"/>
+          <a:lstStyle/>
+          <a:p>
+            <a:pPr marL="0" indent="0">
+              <a:lnSpc>
+                <a:spcPct val="130000"/>
+              </a:lnSpc>
+              <a:buNone/>
+            </a:pPr>
+            <a:r>
+              <a:rPr lang="en-US" sz="1500" dirty="0">
+                <a:solidFill>
+                  <a:srgbClr val="1A1A1A"/>
+                </a:solidFill>
+                <a:latin typeface="Calibri" pitchFamily="34" charset="0"/>
+                <a:ea typeface="Calibri" pitchFamily="34" charset="-122"/>
+                <a:cs typeface="Calibri" pitchFamily="34" charset="-120"/>
+              </a:rPr>
+              <a:t>씬 배선과 건물 스크립트 등 시스템 간 접점만 공동 작업 —</a:t>
+            </a:r>
+            <a:endParaRPr lang="en-US" sz="1500" dirty="0"/>
+          </a:p>
+          <a:p>
+            <a:pPr marL="0" indent="0">
+              <a:lnSpc>
+                <a:spcPct val="130000"/>
+              </a:lnSpc>
+              <a:buNone/>
+            </a:pPr>
+            <a:r>
+              <a:rPr lang="en-US" sz="1500" dirty="0">
+                <a:solidFill>
+                  <a:srgbClr val="1A1A1A"/>
+                </a:solidFill>
+                <a:latin typeface="Calibri" pitchFamily="34" charset="0"/>
+                <a:ea typeface="Calibri" pitchFamily="34" charset="-122"/>
+                <a:cs typeface="Calibri" pitchFamily="34" charset="-120"/>
+              </a:rPr>
+              <a:t>4인이 동시에 작업해도 충돌 지점을 좁게 유지했습니다.</a:t>
+            </a:r>
+            <a:endParaRPr lang="en-US" sz="1500" dirty="0"/>
+          </a:p>
+        </p:txBody>
+      </p:sp>
+      <p:sp>
+        <p:nvSpPr>
+          <p:cNvPr id="11" name="Text 9"/>
+          <p:cNvSpPr txBox="1"/>
+          <p:nvPr/>
+        </p:nvSpPr>
+        <p:spPr>
+          <a:xfrm>
+            <a:off x="640080" y="4818888"/>
+            <a:ext cx="2286000" cy="777240"/>
+          </a:xfrm>
+          <a:prstGeom prst="rect">
+            <a:avLst/>
+          </a:prstGeom>
+          <a:noFill/>
+          <a:ln/>
+        </p:spPr>
+        <p:txBody>
+          <a:bodyPr wrap="square" lIns="0" tIns="0" rIns="0" bIns="0" rtlCol="0" anchor="ctr"/>
+          <a:lstStyle/>
+          <a:p>
+            <a:pPr marL="0" indent="0">
+              <a:buNone/>
+            </a:pPr>
+            <a:r>
+              <a:rPr lang="en-US" sz="4000" b="1" dirty="0">
+                <a:solidFill>
+                  <a:srgbClr val="B85042"/>
+                </a:solidFill>
+                <a:latin typeface="Calibri" pitchFamily="34" charset="0"/>
+                <a:ea typeface="Calibri" pitchFamily="34" charset="-122"/>
+                <a:cs typeface="Calibri" pitchFamily="34" charset="-120"/>
+              </a:rPr>
+              <a:t>83.6%</a:t>
+            </a:r>
+            <a:endParaRPr lang="en-US" sz="4000" dirty="0"/>
+          </a:p>
+        </p:txBody>
+      </p:sp>
+      <p:sp>
+        <p:nvSpPr>
+          <p:cNvPr id="12" name="Text 10"/>
+          <p:cNvSpPr txBox="1"/>
+          <p:nvPr/>
+        </p:nvSpPr>
+        <p:spPr>
+          <a:xfrm>
+            <a:off x="3337560" y="4800600"/>
+            <a:ext cx="8211312" cy="384048"/>
+          </a:xfrm>
+          <a:prstGeom prst="rect">
+            <a:avLst/>
+          </a:prstGeom>
+          <a:noFill/>
+          <a:ln/>
+        </p:spPr>
+        <p:txBody>
+          <a:bodyPr wrap="square" lIns="0" tIns="0" rIns="0" bIns="0" rtlCol="0" anchor="ctr"/>
+          <a:lstStyle/>
+          <a:p>
+            <a:pPr marL="0" indent="0">
+              <a:buNone/>
+            </a:pPr>
+            <a:r>
+              <a:rPr lang="en-US" sz="2100" b="1" dirty="0">
+                <a:solidFill>
+                  <a:srgbClr val="1A1A1A"/>
+                </a:solidFill>
+                <a:latin typeface="Calibri" pitchFamily="34" charset="0"/>
+                <a:ea typeface="Calibri" pitchFamily="34" charset="-122"/>
+                <a:cs typeface="Calibri" pitchFamily="34" charset="-120"/>
+              </a:rPr>
+              <a:t>통합 창구</a:t>
+            </a:r>
+            <a:endParaRPr lang="en-US" sz="2100" dirty="0"/>
+          </a:p>
+        </p:txBody>
+      </p:sp>
+      <p:sp>
+        <p:nvSpPr>
+          <p:cNvPr id="13" name="Text 11"/>
+          <p:cNvSpPr txBox="1"/>
+          <p:nvPr/>
+        </p:nvSpPr>
+        <p:spPr>
+          <a:xfrm>
+            <a:off x="3337560" y="5257800"/>
+            <a:ext cx="8211312" cy="777240"/>
+          </a:xfrm>
+          <a:prstGeom prst="rect">
+            <a:avLst/>
+          </a:prstGeom>
+          <a:noFill/>
+          <a:ln/>
+        </p:spPr>
+        <p:txBody>
+          <a:bodyPr wrap="square" lIns="0" tIns="0" rIns="0" bIns="0" rtlCol="0" anchor="t"/>
+          <a:lstStyle/>
+          <a:p>
+            <a:pPr marL="0" indent="0">
+              <a:lnSpc>
+                <a:spcPct val="130000"/>
+              </a:lnSpc>
+              <a:buNone/>
+            </a:pPr>
+            <a:r>
+              <a:rPr lang="en-US" sz="1500" dirty="0">
+                <a:solidFill>
+                  <a:srgbClr val="1A1A1A"/>
+                </a:solidFill>
+                <a:latin typeface="Calibri" pitchFamily="34" charset="0"/>
+                <a:ea typeface="Calibri" pitchFamily="34" charset="-122"/>
+                <a:cs typeface="Calibri" pitchFamily="34" charset="-120"/>
+              </a:rPr>
+              <a:t>전체 PR 110건 중 92건을 팀장이 직접 리뷰 · 머지 —</a:t>
+            </a:r>
+            <a:endParaRPr lang="en-US" sz="1500" dirty="0"/>
+          </a:p>
+          <a:p>
+            <a:pPr marL="0" indent="0">
+              <a:lnSpc>
+                <a:spcPct val="130000"/>
+              </a:lnSpc>
+              <a:buNone/>
+            </a:pPr>
+            <a:r>
+              <a:rPr lang="en-US" sz="1500" dirty="0">
+                <a:solidFill>
+                  <a:srgbClr val="1A1A1A"/>
+                </a:solidFill>
+                <a:latin typeface="Calibri" pitchFamily="34" charset="0"/>
+                <a:ea typeface="Calibri" pitchFamily="34" charset="-122"/>
+                <a:cs typeface="Calibri" pitchFamily="34" charset="-120"/>
+              </a:rPr>
+              <a:t>master 브랜치 품질을 단일 창구에서 관리했습니다.</a:t>
+            </a:r>
+            <a:endParaRPr lang="en-US" sz="1500" dirty="0"/>
+          </a:p>
+        </p:txBody>
+      </p:sp>
+      <p:sp>
+        <p:nvSpPr>
+          <p:cNvPr id="15" name="Text 13"/>
           <p:cNvSpPr txBox="1"/>
           <p:nvPr/>
         </p:nvSpPr>
@@ -20986,7 +19970,7 @@
       </p:sp>
       <p:sp>
         <p:nvSpPr>
-          <p:cNvPr id="10" name="Text 7"/>
+          <p:cNvPr id="16" name="Text 14"/>
           <p:cNvSpPr txBox="1"/>
           <p:nvPr/>
         </p:nvSpPr>
